--- a/slides/07 The Legend of Zelda.pptx
+++ b/slides/07 The Legend of Zelda.pptx
@@ -48,7 +48,6 @@
     <p:sldId id="292" r:id="rId51"/>
     <p:sldId id="294" r:id="rId53"/>
     <p:sldId id="287" r:id="rId37"/>
-    <p:sldId id="293" r:id="rId52"/>
   </p:sldIdLst>
   <p:sldSz cy="5143500" cx="9144000"/>
   <p:notesSz cx="6858000" cy="9144000"/>
@@ -3515,64 +3514,6 @@
           <a:p>
             <a:r>
               <a:t>Exercise: sketch the hierarchy, then the composition, then implement one part (a shooting behaviour any enemy can have).</a:t>
-            </a:r>
-          </a:p>
-        </p:txBody>
-      </p:sp>
-    </p:spTree>
-  </p:cSld>
-  <p:clrMapOvr>
-    <a:masterClrMapping/>
-  </p:clrMapOvr>
-</p:notes>
-</file>
-
-<file path=ppt/notesSlides/notesSlide39.xml><?xml version="1.0" encoding="utf-8"?>
-<p:notes xmlns:a="http://schemas.openxmlformats.org/drawingml/2006/main" xmlns:p="http://schemas.openxmlformats.org/presentationml/2006/main" xmlns:r="http://schemas.openxmlformats.org/officeDocument/2006/relationships">
-  <p:cSld>
-    <p:spTree>
-      <p:nvGrpSpPr>
-        <p:cNvPr id="1" name=""/>
-        <p:cNvGrpSpPr/>
-        <p:nvPr/>
-      </p:nvGrpSpPr>
-      <p:grpSpPr>
-        <a:xfrm>
-          <a:off x="0" y="0"/>
-          <a:ext cx="0" cy="0"/>
-          <a:chOff x="0" y="0"/>
-          <a:chExt cx="0" cy="0"/>
-        </a:xfrm>
-      </p:grpSpPr>
-      <p:sp>
-        <p:nvSpPr>
-          <p:cNvPr id="2" name="Slide Image Placeholder 1"/>
-          <p:cNvSpPr>
-            <a:spLocks noGrp="1"/>
-          </p:cNvSpPr>
-          <p:nvPr>
-            <p:ph type="sldImg" idx="2"/>
-          </p:nvPr>
-        </p:nvSpPr>
-        <p:spPr/>
-      </p:sp>
-      <p:sp>
-        <p:nvSpPr>
-          <p:cNvPr id="3" name="Notes Placeholder 2"/>
-          <p:cNvSpPr>
-            <a:spLocks noGrp="1"/>
-          </p:cNvSpPr>
-          <p:nvPr>
-            <p:ph type="body" idx="1"/>
-          </p:nvPr>
-        </p:nvSpPr>
-        <p:spPr/>
-        <p:txBody>
-          <a:bodyPr/>
-          <a:lstStyle/>
-          <a:p>
-            <a:r>
-              <a:t>Next milestone by session 09: the self-review, with an event map of your game.</a:t>
             </a:r>
           </a:p>
         </p:txBody>
@@ -25063,156 +25004,6 @@
 </p:sld>
 </file>
 
-<file path=ppt/slides/slide41.xml><?xml version="1.0" encoding="utf-8"?>
-<p:sld xmlns:a="http://schemas.openxmlformats.org/drawingml/2006/main" xmlns:p="http://schemas.openxmlformats.org/presentationml/2006/main" xmlns:r="http://schemas.openxmlformats.org/officeDocument/2006/relationships">
-  <p:cSld>
-    <p:spTree>
-      <p:nvGrpSpPr>
-        <p:cNvPr id="1" name=""/>
-        <p:cNvGrpSpPr/>
-        <p:nvPr/>
-      </p:nvGrpSpPr>
-      <p:grpSpPr/>
-      <p:sp>
-        <p:nvSpPr>
-          <p:cNvPr id="63" name="Google Shape;63;p13"/>
-          <p:cNvSpPr txBox="1"/>
-          <p:nvPr>
-            <p:ph type="title"/>
-          </p:nvPr>
-        </p:nvSpPr>
-        <p:spPr>
-          <a:xfrm>
-            <a:off x="311700" y="195615"/>
-            <a:ext cx="8520600" cy="572700"/>
-          </a:xfrm>
-          <a:prstGeom prst="rect">
-            <a:avLst/>
-          </a:prstGeom>
-        </p:spPr>
-        <p:txBody>
-          <a:bodyPr anchorCtr="0" anchor="t" bIns="91425" lIns="91425" spcFirstLastPara="1" rIns="91425" wrap="square" tIns="91425">
-            <a:normAutofit fontScale="90000"/>
-          </a:bodyPr>
-          <a:lstStyle/>
-          <a:p>
-            <a:pPr indent="0" lvl="0" marL="0" rtl="0" algn="l">
-              <a:spcBef>
-                <a:spcPts val="0"/>
-              </a:spcBef>
-              <a:spcAft>
-                <a:spcPts val="0"/>
-              </a:spcAft>
-              <a:buNone/>
-            </a:pPr>
-            <a:r>
-              <a:rPr lang="en"/>
-              <a:t>Your Course Project</a:t>
-            </a:r>
-            <a:endParaRPr/>
-          </a:p>
-        </p:txBody>
-      </p:sp>
-      <p:sp>
-        <p:nvSpPr>
-          <p:cNvPr id="64" name="Google Shape;64;p13"/>
-          <p:cNvSpPr txBox="1"/>
-          <p:nvPr>
-            <p:ph idx="1" type="body"/>
-          </p:nvPr>
-        </p:nvSpPr>
-        <p:spPr>
-          <a:xfrm>
-            <a:off x="311700" y="885950"/>
-            <a:ext cx="8520600" cy="4023300"/>
-          </a:xfrm>
-          <a:prstGeom prst="rect">
-            <a:avLst/>
-          </a:prstGeom>
-        </p:spPr>
-        <p:txBody>
-          <a:bodyPr anchorCtr="0" anchor="t" bIns="91425" lIns="91425" spcFirstLastPara="1" rIns="91425" wrap="square" tIns="91425">
-            <a:normAutofit/>
-          </a:bodyPr>
-          <a:lstStyle/>
-          <a:p>
-            <a:pPr indent="-330200" lvl="0" marL="457200" rtl="0" algn="l">
-              <a:spcBef>
-                <a:spcPts val="0"/>
-              </a:spcBef>
-              <a:spcAft>
-                <a:spcPts val="0"/>
-              </a:spcAft>
-              <a:buSzPts val="1600"/>
-              <a:buChar char="●"/>
-            </a:pPr>
-            <a:r>
-              <a:rPr lang="en"/>
-              <a:t>Next milestone, by session 09: self-review</a:t>
-            </a:r>
-            <a:endParaRPr/>
-          </a:p>
-          <a:p>
-            <a:pPr indent="-317500" lvl="1" marL="914400" rtl="0" algn="l">
-              <a:spcBef>
-                <a:spcPts val="0"/>
-              </a:spcBef>
-              <a:spcAft>
-                <a:spcPts val="0"/>
-              </a:spcAft>
-              <a:buSzPts val="1400"/>
-              <a:buChar char="○"/>
-            </a:pPr>
-            <a:r>
-              <a:rPr lang="en"/>
-              <a:t>Updated class diagram, list of patterns, and an event map</a:t>
-            </a:r>
-            <a:endParaRPr/>
-          </a:p>
-          <a:p>
-            <a:pPr indent="-317500" lvl="1" marL="914400" rtl="0" algn="l">
-              <a:spcBef>
-                <a:spcPts val="0"/>
-              </a:spcBef>
-              <a:spcAft>
-                <a:spcPts val="0"/>
-              </a:spcAft>
-              <a:buSzPts val="1400"/>
-              <a:buChar char="○"/>
-            </a:pPr>
-            <a:r>
-              <a:rPr lang="en"/>
-              <a:t>The meaningful moments in your game: who fires them, who reacts</a:t>
-            </a:r>
-            <a:endParaRPr/>
-          </a:p>
-          <a:p>
-            <a:pPr indent="-317500" lvl="1" marL="914400" rtl="0" algn="l">
-              <a:spcBef>
-                <a:spcPts val="0"/>
-              </a:spcBef>
-              <a:spcAft>
-                <a:spcPts val="0"/>
-              </a:spcAft>
-              <a:buSzPts val="1400"/>
-              <a:buChar char="○"/>
-            </a:pPr>
-            <a:r>
-              <a:rPr lang="en"/>
-              <a:t>At least one refactoring</a:t>
-            </a:r>
-            <a:endParaRPr/>
-          </a:p>
-        </p:txBody>
-      </p:sp>
-    </p:spTree>
-  </p:cSld>
-  <p:clrMapOvr>
-    <a:masterClrMapping/>
-  </p:clrMapOvr>
-</p:sld>
-</file>
-
 <file path=ppt/slides/slide5.xml><?xml version="1.0" encoding="utf-8"?>
 <p:sld xmlns:a="http://schemas.openxmlformats.org/drawingml/2006/main" xmlns:r="http://schemas.openxmlformats.org/officeDocument/2006/relationships" xmlns:mc="http://schemas.openxmlformats.org/markup-compatibility/2006" xmlns:mv="urn:schemas-microsoft-com:mac:vml" xmlns:p="http://schemas.openxmlformats.org/presentationml/2006/main" xmlns:c="http://schemas.openxmlformats.org/drawingml/2006/chart" xmlns:dgm="http://schemas.openxmlformats.org/drawingml/2006/diagram" xmlns:o="urn:schemas-microsoft-com:office:office" xmlns:v="urn:schemas-microsoft-com:vml" xmlns:pvml="urn:schemas-microsoft-com:office:powerpoint" xmlns:com="http://schemas.openxmlformats.org/drawingml/2006/compatibility" xmlns:p14="http://schemas.microsoft.com/office/powerpoint/2010/main" xmlns:p15="http://schemas.microsoft.com/office/powerpoint/2012/main" xmlns:ahyp="http://schemas.microsoft.com/office/drawing/2018/hyperlinkcolor">
   <p:cSld>

--- a/slides/07 The Legend of Zelda.pptx
+++ b/slides/07 The Legend of Zelda.pptx
@@ -3812,7 +3812,7 @@
           <a:lstStyle/>
           <a:p>
             <a:r>
-              <a:t>Open gar-games/07-zelda live. Show the README: the step table, the code map, how to run a step.</a:t>
+              <a:t>Open gar-games/07-the-legend-of-zelda live. Show the README: the step table, the code map, how to run a step.</a:t>
             </a:r>
           </a:p>
           <a:p>
@@ -25096,7 +25096,7 @@
             </a:pPr>
             <a:r>
               <a:rPr lang="en"/>
-              <a:t>github.com/Metamate/gar-games, folder 07-zelda</a:t>
+              <a:t>github.com/Metamate/gar-games, folder 07-the-legend-of-zelda</a:t>
             </a:r>
             <a:endParaRPr/>
           </a:p>

--- a/slides/07 The Legend of Zelda.pptx
+++ b/slides/07 The Legend of Zelda.pptx
@@ -7995,22 +7995,22 @@
       </p:sp>
       <p:pic>
         <p:nvPicPr>
-          <p:cNvPr id="97" name="Picture 97" descr="zelda-play.png"/>
+          <p:cNvPr id="97" name="Picture 97" descr="topdown.png"/>
           <p:cNvPicPr>
             <a:picLocks noChangeAspect="1"/>
           </p:cNvPicPr>
           <p:nvPr/>
         </p:nvPicPr>
         <p:blipFill>
-          <a:blip r:embed="rId4"/>
+          <a:blip r:embed="rId3"/>
           <a:stretch>
             <a:fillRect/>
           </a:stretch>
         </p:blipFill>
         <p:spPr>
           <a:xfrm>
-            <a:off x="1138224" y="1062675"/>
-            <a:ext cx="6867555" cy="3862999"/>
+            <a:off x="1138225" y="1062675"/>
+            <a:ext cx="6867553" cy="3862998"/>
           </a:xfrm>
           <a:prstGeom prst="rect">
             <a:avLst/>
@@ -18138,14 +18138,14 @@
       </p:sp>
       <p:pic>
         <p:nvPicPr>
-          <p:cNvPr id="52" name="Picture 52" descr="gif-zelda.gif"/>
+          <p:cNvPr id="52" name="Picture 52" descr="the-legend-of-zelda.gif"/>
           <p:cNvPicPr>
             <a:picLocks noChangeAspect="1"/>
           </p:cNvPicPr>
           <p:nvPr/>
         </p:nvPicPr>
         <p:blipFill>
-          <a:blip r:embed="rId4"/>
+          <a:blip r:embed="rId3"/>
           <a:stretch>
             <a:fillRect/>
           </a:stretch>
@@ -18153,7 +18153,7 @@
         <p:spPr>
           <a:xfrm>
             <a:off x="1412777" y="1203675"/>
-            <a:ext cx="6318444" cy="3554125"/>
+            <a:ext cx="6318444" cy="3554124"/>
           </a:xfrm>
           <a:prstGeom prst="rect">
             <a:avLst/>
@@ -26487,14 +26487,14 @@
       </p:pic>
       <p:pic>
         <p:nvPicPr>
-          <p:cNvPr id="83" name="Picture 85" descr="zelda_sword.png"/>
+          <p:cNvPr id="83" name="Picture 85" descr="character_swing_sword.png"/>
           <p:cNvPicPr>
             <a:picLocks noChangeAspect="1"/>
           </p:cNvPicPr>
           <p:nvPr/>
         </p:nvPicPr>
         <p:blipFill>
-          <a:blip r:embed="rId8"/>
+          <a:blip r:embed="rId6"/>
           <a:stretch>
             <a:fillRect/>
           </a:stretch>
@@ -26511,14 +26511,14 @@
       </p:pic>
       <p:pic>
         <p:nvPicPr>
-          <p:cNvPr id="84" name="Picture 85" descr="zelda_walk.png"/>
+          <p:cNvPr id="84" name="Picture 85" descr="character_walk.png"/>
           <p:cNvPicPr>
             <a:picLocks noChangeAspect="1"/>
           </p:cNvPicPr>
           <p:nvPr/>
         </p:nvPicPr>
         <p:blipFill>
-          <a:blip r:embed="rId9"/>
+          <a:blip r:embed="rId5"/>
           <a:stretch>
             <a:fillRect/>
           </a:stretch>
@@ -26526,7 +26526,7 @@
         <p:spPr>
           <a:xfrm>
             <a:off x="5454471" y="874004"/>
-            <a:ext cx="848874" cy="1697749"/>
+            <a:ext cx="848874" cy="1697748"/>
           </a:xfrm>
           <a:prstGeom prst="rect">
             <a:avLst/>

--- a/slides/07 The Legend of Zelda.pptx
+++ b/slides/07 The Legend of Zelda.pptx
@@ -9706,7 +9706,7 @@
             </a:pPr>
             <a:r>
               <a:rPr lang="en"/>
-              <a:t>In C#, we don’t need to implement the observer pattern. Events are part of the language!</a:t>
+              <a:t>In C#, we don’t need to implement the Observer pattern. Events are part of the language!</a:t>
             </a:r>
             <a:endParaRPr/>
           </a:p>

--- a/slides/07 The Legend of Zelda.pptx
+++ b/slides/07 The Legend of Zelda.pptx
@@ -40,6 +40,7 @@
     <p:sldId id="282" r:id="rId32"/>
     <p:sldId id="283" r:id="rId33"/>
     <p:sldId id="291" r:id="rId50"/>
+    <p:sldId id="297" r:id="rId52"/>
     <p:sldId id="284" r:id="rId34"/>
     <p:sldId id="285" r:id="rId35"/>
     <p:sldId id="289" r:id="rId48"/>
@@ -821,7 +822,7 @@
           <a:lstStyle/>
           <a:p>
             <a:r>
-              <a:t>Welcome. Today we build The Legend of Zelda. The main topic: composition vs. inheritance.</a:t>
+              <a:t>Welcome. Today we build The Legend of Zelda. The main topic: events and the Observer pattern.</a:t>
             </a:r>
           </a:p>
           <a:p>
@@ -3526,6 +3527,64 @@
 </p:notes>
 </file>
 
+<file path=ppt/notesSlides/notesSlide39.xml><?xml version="1.0" encoding="utf-8"?>
+<p:notes xmlns:a="http://schemas.openxmlformats.org/drawingml/2006/main" xmlns:p="http://schemas.openxmlformats.org/presentationml/2006/main" xmlns:r="http://schemas.openxmlformats.org/officeDocument/2006/relationships">
+  <p:cSld>
+    <p:spTree>
+      <p:nvGrpSpPr>
+        <p:cNvPr id="1" name=""/>
+        <p:cNvGrpSpPr/>
+        <p:nvPr/>
+      </p:nvGrpSpPr>
+      <p:grpSpPr>
+        <a:xfrm>
+          <a:off x="0" y="0"/>
+          <a:ext cx="0" cy="0"/>
+          <a:chOff x="0" y="0"/>
+          <a:chExt cx="0" cy="0"/>
+        </a:xfrm>
+      </p:grpSpPr>
+      <p:sp>
+        <p:nvSpPr>
+          <p:cNvPr id="2" name="Slide Image Placeholder 1"/>
+          <p:cNvSpPr>
+            <a:spLocks noGrp="1"/>
+          </p:cNvSpPr>
+          <p:nvPr>
+            <p:ph type="sldImg" idx="2"/>
+          </p:nvPr>
+        </p:nvSpPr>
+        <p:spPr/>
+      </p:sp>
+      <p:sp>
+        <p:nvSpPr>
+          <p:cNvPr id="3" name="Notes Placeholder 2"/>
+          <p:cNvSpPr>
+            <a:spLocks noGrp="1"/>
+          </p:cNvSpPr>
+          <p:nvPr>
+            <p:ph type="body" idx="1"/>
+          </p:nvPr>
+        </p:nvSpPr>
+        <p:spPr/>
+        <p:txBody>
+          <a:bodyPr/>
+          <a:lstStyle/>
+          <a:p>
+            <a:r>
+              <a:t>Pairs, about 5 minutes. RoomShiftDuration in GameSettings. The ease-out goes in the two Add setters in Dungeon.BeginShift. It starts fast and settles: most game UI eases out.</a:t>
+            </a:r>
+          </a:p>
+        </p:txBody>
+      </p:sp>
+    </p:spTree>
+  </p:cSld>
+  <p:clrMapOvr>
+    <a:masterClrMapping/>
+  </p:clrMapOvr>
+</p:notes>
+</file>
+
 <file path=ppt/notesSlides/notesSlide4.xml><?xml version="1.0" encoding="utf-8"?>
 <p:notes xmlns:a="http://schemas.openxmlformats.org/drawingml/2006/main" xmlns:r="http://schemas.openxmlformats.org/officeDocument/2006/relationships" xmlns:mc="http://schemas.openxmlformats.org/markup-compatibility/2006" xmlns:mv="urn:schemas-microsoft-com:mac:vml" xmlns:p="http://schemas.openxmlformats.org/presentationml/2006/main" xmlns:c="http://schemas.openxmlformats.org/drawingml/2006/chart" xmlns:dgm="http://schemas.openxmlformats.org/drawingml/2006/diagram" xmlns:o="urn:schemas-microsoft-com:office:office" xmlns:v="urn:schemas-microsoft-com:vml" xmlns:pvml="urn:schemas-microsoft-com:office:powerpoint" xmlns:com="http://schemas.openxmlformats.org/drawingml/2006/compatibility" xmlns:p14="http://schemas.microsoft.com/office/powerpoint/2010/main" xmlns:p15="http://schemas.microsoft.com/office/powerpoint/2012/main" xmlns:ahyp="http://schemas.microsoft.com/office/drawing/2018/hyperlinkcolor" showMasterPhAnim="0" showMasterSp="0">
   <p:cSld>
@@ -3602,7 +3661,7 @@
           <a:lstStyle/>
           <a:p>
             <a:r>
-              <a:t>The main topic: composition vs. inheritance. With it: the Observer pattern and C# events, hitboxes, and a tweening system.</a:t>
+              <a:t>The main topic: events and the Observer pattern, with C# delegates, events and lambdas. With it: hitboxes, a tweening system, and composition vs. inheritance, the question Plants vs. Zombies answers.</a:t>
             </a:r>
           </a:p>
         </p:txBody>
@@ -20784,6 +20843,145 @@
 </file>
 
 <file path=ppt/slides/slide33.xml><?xml version="1.0" encoding="utf-8"?>
+<p:sld xmlns:a="http://schemas.openxmlformats.org/drawingml/2006/main" xmlns:p="http://schemas.openxmlformats.org/presentationml/2006/main" xmlns:r="http://schemas.openxmlformats.org/officeDocument/2006/relationships">
+  <p:cSld>
+    <p:spTree>
+      <p:nvGrpSpPr>
+        <p:cNvPr id="1" name=""/>
+        <p:cNvGrpSpPr/>
+        <p:nvPr/>
+      </p:nvGrpSpPr>
+      <p:grpSpPr/>
+      <p:sp>
+        <p:nvSpPr>
+          <p:cNvPr id="2" name="Title 1"/>
+          <p:cNvSpPr>
+            <a:spLocks noGrp="1"/>
+          </p:cNvSpPr>
+          <p:nvPr>
+            <p:ph type="title"/>
+          </p:nvPr>
+        </p:nvSpPr>
+        <p:spPr/>
+        <p:txBody>
+          <a:bodyPr/>
+          <a:lstStyle/>
+          <a:p>
+            <a:pPr indent="0" lvl="0" marL="0" rtl="0" algn="l">
+              <a:spcBef>
+                <a:spcPts val="0"/>
+              </a:spcBef>
+              <a:spcAft>
+                <a:spcPts val="0"/>
+              </a:spcAft>
+              <a:buNone/>
+            </a:pPr>
+            <a:r>
+              <a:rPr lang="en"/>
+              <a:t>Try It: A Slower, Softer Scroll</a:t>
+            </a:r>
+            <a:endParaRPr/>
+          </a:p>
+        </p:txBody>
+      </p:sp>
+      <p:sp>
+        <p:nvSpPr>
+          <p:cNvPr id="3" name="Text Placeholder 2"/>
+          <p:cNvSpPr>
+            <a:spLocks noGrp="1"/>
+          </p:cNvSpPr>
+          <p:nvPr>
+            <p:ph type="body" idx="1"/>
+          </p:nvPr>
+        </p:nvSpPr>
+        <p:spPr>
+          <a:xfrm>
+            <a:off x="311700" y="885950"/>
+            <a:ext cx="8520600" cy="1673352"/>
+          </a:xfrm>
+        </p:spPr>
+        <p:txBody>
+          <a:bodyPr/>
+          <a:lstStyle/>
+          <a:p>
+            <a:pPr indent="-330200" lvl="0" marL="457200" rtl="0" algn="l">
+              <a:spcBef>
+                <a:spcPts val="0"/>
+              </a:spcBef>
+              <a:spcAft>
+                <a:spcPts val="0"/>
+              </a:spcAft>
+              <a:buSzPts val="1600"/>
+              <a:buChar char="●"/>
+            </a:pPr>
+            <a:r>
+              <a:rPr lang="en"/>
+              <a:t>In Zelda7:</a:t>
+            </a:r>
+            <a:endParaRPr/>
+          </a:p>
+          <a:p>
+            <a:pPr indent="-330200" lvl="0" marL="457200" rtl="0" algn="l">
+              <a:spcBef>
+                <a:spcPts val="0"/>
+              </a:spcBef>
+              <a:spcAft>
+                <a:spcPts val="0"/>
+              </a:spcAft>
+              <a:buSzPts val="1600"/>
+              <a:buChar char="●"/>
+            </a:pPr>
+            <a:r>
+              <a:rPr lang="en"/>
+              <a:t>Make the room shift take twice as long</a:t>
+            </a:r>
+            <a:endParaRPr/>
+          </a:p>
+          <a:p>
+            <a:pPr indent="-330200" lvl="0" marL="457200" rtl="0" algn="l">
+              <a:spcBef>
+                <a:spcPts val="0"/>
+              </a:spcBef>
+              <a:spcAft>
+                <a:spcPts val="0"/>
+              </a:spcAft>
+              <a:buSzPts val="1600"/>
+              <a:buChar char="●"/>
+            </a:pPr>
+            <a:r>
+              <a:rPr lang="en"/>
+              <a:t>Ease out: pass 1 - (1 - t) * (1 - t) to Vector2.Lerp instead of t</a:t>
+            </a:r>
+            <a:endParaRPr/>
+          </a:p>
+          <a:p>
+            <a:pPr indent="-330200" lvl="0" marL="457200" rtl="0" algn="l">
+              <a:spcBef>
+                <a:spcPts val="0"/>
+              </a:spcBef>
+              <a:spcAft>
+                <a:spcPts val="0"/>
+              </a:spcAft>
+              <a:buSzPts val="1600"/>
+              <a:buChar char="●"/>
+            </a:pPr>
+            <a:r>
+              <a:rPr lang="en"/>
+              <a:t>How does the scroll feel now?</a:t>
+            </a:r>
+            <a:endParaRPr/>
+          </a:p>
+        </p:txBody>
+      </p:sp>
+    </p:spTree>
+  </p:cSld>
+  <p:clrMapOvr>
+    <a:masterClrMapping/>
+  </p:clrMapOvr>
+</p:sld>
+</file>
+
+<file path=ppt/slides/slide34.xml><?xml version="1.0" encoding="utf-8"?>
 <p:sld xmlns:a="http://schemas.openxmlformats.org/drawingml/2006/main" xmlns:r="http://schemas.openxmlformats.org/officeDocument/2006/relationships" xmlns:mc="http://schemas.openxmlformats.org/markup-compatibility/2006" xmlns:mv="urn:schemas-microsoft-com:mac:vml" xmlns:p="http://schemas.openxmlformats.org/presentationml/2006/main" xmlns:c="http://schemas.openxmlformats.org/drawingml/2006/chart" xmlns:dgm="http://schemas.openxmlformats.org/drawingml/2006/diagram" xmlns:o="urn:schemas-microsoft-com:office:office" xmlns:v="urn:schemas-microsoft-com:vml" xmlns:pvml="urn:schemas-microsoft-com:office:powerpoint" xmlns:com="http://schemas.openxmlformats.org/drawingml/2006/compatibility" xmlns:p14="http://schemas.microsoft.com/office/powerpoint/2010/main" xmlns:p15="http://schemas.microsoft.com/office/powerpoint/2012/main" xmlns:ahyp="http://schemas.microsoft.com/office/drawing/2018/hyperlinkcolor">
   <p:cSld>
     <p:spTree>
@@ -21114,7 +21312,7 @@
 </p:sld>
 </file>
 
-<file path=ppt/slides/slide34.xml><?xml version="1.0" encoding="utf-8"?>
+<file path=ppt/slides/slide35.xml><?xml version="1.0" encoding="utf-8"?>
 <p:sld xmlns:a="http://schemas.openxmlformats.org/drawingml/2006/main" xmlns:r="http://schemas.openxmlformats.org/officeDocument/2006/relationships" xmlns:mc="http://schemas.openxmlformats.org/markup-compatibility/2006" xmlns:mv="urn:schemas-microsoft-com:mac:vml" xmlns:p="http://schemas.openxmlformats.org/presentationml/2006/main" xmlns:c="http://schemas.openxmlformats.org/drawingml/2006/chart" xmlns:dgm="http://schemas.openxmlformats.org/drawingml/2006/diagram" xmlns:o="urn:schemas-microsoft-com:office:office" xmlns:v="urn:schemas-microsoft-com:vml" xmlns:pvml="urn:schemas-microsoft-com:office:powerpoint" xmlns:com="http://schemas.openxmlformats.org/drawingml/2006/compatibility" xmlns:p14="http://schemas.microsoft.com/office/powerpoint/2010/main" xmlns:p15="http://schemas.microsoft.com/office/powerpoint/2012/main" xmlns:ahyp="http://schemas.microsoft.com/office/drawing/2018/hyperlinkcolor">
   <p:cSld>
     <p:spTree>
@@ -21908,7 +22106,7 @@
 </p:sld>
 </file>
 
-<file path=ppt/slides/slide35.xml><?xml version="1.0" encoding="utf-8"?>
+<file path=ppt/slides/slide36.xml><?xml version="1.0" encoding="utf-8"?>
 <p:sld xmlns:a="http://schemas.openxmlformats.org/drawingml/2006/main" xmlns:p="http://schemas.openxmlformats.org/presentationml/2006/main" xmlns:r="http://schemas.openxmlformats.org/officeDocument/2006/relationships">
   <p:cSld>
     <p:spTree>
@@ -22519,7 +22717,7 @@
 </p:sld>
 </file>
 
-<file path=ppt/slides/slide36.xml><?xml version="1.0" encoding="utf-8"?>
+<file path=ppt/slides/slide37.xml><?xml version="1.0" encoding="utf-8"?>
 <p:sld xmlns:a="http://schemas.openxmlformats.org/drawingml/2006/main" xmlns:p="http://schemas.openxmlformats.org/presentationml/2006/main" xmlns:r="http://schemas.openxmlformats.org/officeDocument/2006/relationships">
   <p:cSld>
     <p:spTree>
@@ -22888,7 +23086,7 @@
 </p:sld>
 </file>
 
-<file path=ppt/slides/slide37.xml><?xml version="1.0" encoding="utf-8"?>
+<file path=ppt/slides/slide38.xml><?xml version="1.0" encoding="utf-8"?>
 <p:sld xmlns:a="http://schemas.openxmlformats.org/drawingml/2006/main" xmlns:r="http://schemas.openxmlformats.org/officeDocument/2006/relationships" xmlns:mc="http://schemas.openxmlformats.org/markup-compatibility/2006" xmlns:mv="urn:schemas-microsoft-com:mac:vml" xmlns:p="http://schemas.openxmlformats.org/presentationml/2006/main" xmlns:c="http://schemas.openxmlformats.org/drawingml/2006/chart" xmlns:dgm="http://schemas.openxmlformats.org/drawingml/2006/diagram" xmlns:o="urn:schemas-microsoft-com:office:office" xmlns:v="urn:schemas-microsoft-com:vml" xmlns:pvml="urn:schemas-microsoft-com:office:powerpoint" xmlns:com="http://schemas.openxmlformats.org/drawingml/2006/compatibility" xmlns:p14="http://schemas.microsoft.com/office/powerpoint/2010/main" xmlns:p15="http://schemas.microsoft.com/office/powerpoint/2012/main" xmlns:ahyp="http://schemas.microsoft.com/office/drawing/2018/hyperlinkcolor">
   <p:cSld>
     <p:spTree>
@@ -23475,7 +23673,7 @@
 </p:sld>
 </file>
 
-<file path=ppt/slides/slide38.xml><?xml version="1.0" encoding="utf-8"?>
+<file path=ppt/slides/slide39.xml><?xml version="1.0" encoding="utf-8"?>
 <p:sld xmlns:a="http://schemas.openxmlformats.org/drawingml/2006/main" xmlns:p="http://schemas.openxmlformats.org/presentationml/2006/main" xmlns:r="http://schemas.openxmlformats.org/officeDocument/2006/relationships">
   <p:cSld>
     <p:spTree>
@@ -23622,179 +23820,6 @@
               <a:t>E.g. a shooting behaviour that any enemy can be given</a:t>
             </a:r>
             <a:endParaRPr/>
-          </a:p>
-        </p:txBody>
-      </p:sp>
-    </p:spTree>
-  </p:cSld>
-  <p:clrMapOvr>
-    <a:masterClrMapping/>
-  </p:clrMapOvr>
-</p:sld>
-</file>
-
-<file path=ppt/slides/slide39.xml><?xml version="1.0" encoding="utf-8"?>
-<p:sld xmlns:a="http://schemas.openxmlformats.org/drawingml/2006/main" xmlns:p="http://schemas.openxmlformats.org/presentationml/2006/main" xmlns:r="http://schemas.openxmlformats.org/officeDocument/2006/relationships">
-  <p:cSld>
-    <p:spTree>
-      <p:nvGrpSpPr>
-        <p:cNvPr id="1" name=""/>
-        <p:cNvGrpSpPr/>
-        <p:nvPr/>
-      </p:nvGrpSpPr>
-      <p:grpSpPr/>
-      <p:sp>
-        <p:nvSpPr>
-          <p:cNvPr id="2" name="Title 1"/>
-          <p:cNvSpPr>
-            <a:spLocks noGrp="1"/>
-          </p:cNvSpPr>
-          <p:nvPr>
-            <p:ph type="title"/>
-          </p:nvPr>
-        </p:nvSpPr>
-        <p:spPr/>
-        <p:txBody>
-          <a:bodyPr/>
-          <a:lstStyle/>
-          <a:p>
-            <a:pPr indent="0" lvl="0" marL="0" rtl="0" algn="l">
-              <a:spcBef>
-                <a:spcPts val="0"/>
-              </a:spcBef>
-              <a:spcAft>
-                <a:spcPts val="0"/>
-              </a:spcAft>
-              <a:buNone/>
-            </a:pPr>
-            <a:r>
-              <a:rPr lang="en"/>
-              <a:t>Check Yourself</a:t>
-            </a:r>
-            <a:endParaRPr/>
-          </a:p>
-        </p:txBody>
-      </p:sp>
-      <p:sp>
-        <p:nvSpPr>
-          <p:cNvPr id="3" name="Text Placeholder 2"/>
-          <p:cNvSpPr>
-            <a:spLocks noGrp="1"/>
-          </p:cNvSpPr>
-          <p:nvPr>
-            <p:ph type="body" idx="1"/>
-          </p:nvPr>
-        </p:nvSpPr>
-        <p:spPr>
-          <a:xfrm>
-            <a:off x="311700" y="885950"/>
-            <a:ext cx="8520600" cy="1719072"/>
-          </a:xfrm>
-        </p:spPr>
-        <p:txBody>
-          <a:bodyPr/>
-          <a:lstStyle/>
-          <a:p>
-            <a:pPr indent="-330200" lvl="0" marL="457200" rtl="0" algn="l">
-              <a:spcBef>
-                <a:spcPts val="0"/>
-              </a:spcBef>
-              <a:spcAft>
-                <a:spcPts val="0"/>
-              </a:spcAft>
-              <a:buSzPts val="1600"/>
-              <a:buChar char="●"/>
-            </a:pPr>
-            <a:r>
-              <a:rPr lang="en"/>
-              <a:t>When does inheritance fit, and when is composition better?</a:t>
-            </a:r>
-            <a:endParaRPr/>
-          </a:p>
-          <a:p>
-            <a:pPr indent="-330200" lvl="0" marL="457200" rtl="0" algn="l">
-              <a:spcBef>
-                <a:spcPts val="0"/>
-              </a:spcBef>
-              <a:spcAft>
-                <a:spcPts val="0"/>
-              </a:spcAft>
-              <a:buSzPts val="1600"/>
-              <a:buChar char="●"/>
-            </a:pPr>
-            <a:r>
-              <a:rPr lang="en"/>
-              <a:t>Why does Observer suit UI code particularly well?</a:t>
-            </a:r>
-            <a:endParaRPr/>
-          </a:p>
-          <a:p>
-            <a:pPr indent="-330200" lvl="0" marL="457200" rtl="0" algn="l">
-              <a:spcBef>
-                <a:spcPts val="0"/>
-              </a:spcBef>
-              <a:spcAft>
-                <a:spcPts val="0"/>
-              </a:spcAft>
-              <a:buSzPts val="1600"/>
-              <a:buChar char="●"/>
-            </a:pPr>
-            <a:r>
-              <a:rPr lang="en"/>
-              <a:t>What is the difference between a delegate and an event in C#?</a:t>
-            </a:r>
-            <a:endParaRPr/>
-          </a:p>
-          <a:p>
-            <a:pPr indent="-330200" lvl="0" marL="457200" rtl="0" algn="l">
-              <a:spcBef>
-                <a:spcPts val="0"/>
-              </a:spcBef>
-              <a:spcAft>
-                <a:spcPts val="0"/>
-              </a:spcAft>
-              <a:buSzPts val="1600"/>
-              <a:buChar char="●"/>
-            </a:pPr>
-            <a:r>
-              <a:rPr lang="en"/>
-              <a:t>What is the cost of data-driven design?</a:t>
-            </a:r>
-            <a:endParaRPr/>
-          </a:p>
-        </p:txBody>
-      </p:sp>
-      <p:sp>
-        <p:nvSpPr>
-          <p:cNvPr id="4" name="TextBox 3"/>
-          <p:cNvSpPr txBox="1"/>
-          <p:nvPr/>
-        </p:nvSpPr>
-        <p:spPr>
-          <a:xfrm>
-            <a:off x="457200" y="3182112"/>
-            <a:ext cx="8229600" cy="457200"/>
-          </a:xfrm>
-          <a:prstGeom prst="rect">
-            <a:avLst/>
-          </a:prstGeom>
-          <a:noFill/>
-        </p:spPr>
-        <p:txBody>
-          <a:bodyPr wrap="square">
-            <a:spAutoFit/>
-          </a:bodyPr>
-          <a:lstStyle/>
-          <a:p>
-            <a:pPr algn="ctr"/>
-            <a:r>
-              <a:rPr sz="1400" b="0" i="0">
-                <a:solidFill>
-                  <a:srgbClr val="9AA3AB"/>
-                </a:solidFill>
-              </a:rPr>
-              <a:t>The answers, and more questions, are on the course site.</a:t>
-            </a:r>
           </a:p>
         </p:txBody>
       </p:sp>
@@ -23874,7 +23899,7 @@
         <p:spPr>
           <a:xfrm>
             <a:off x="311700" y="885950"/>
-            <a:ext cx="8520600" cy="4023300"/>
+            <a:ext cx="8520600" cy="2441448"/>
           </a:xfrm>
           <a:prstGeom prst="rect">
             <a:avLst/>
@@ -23898,7 +23923,7 @@
             </a:pPr>
             <a:r>
               <a:rPr lang="en"/>
-              <a:t>Composition vs. Inheritance</a:t>
+              <a:t>Observer Pattern (Delegates &amp; Events)</a:t>
             </a:r>
             <a:endParaRPr/>
           </a:p>
@@ -23915,7 +23940,7 @@
             </a:pPr>
             <a:r>
               <a:rPr lang="en"/>
-              <a:t>Observer Pattern (Delegates &amp; Events)</a:t>
+              <a:t>Hitboxes/Hurtboxes</a:t>
             </a:r>
             <a:endParaRPr/>
           </a:p>
@@ -23932,7 +23957,7 @@
             </a:pPr>
             <a:r>
               <a:rPr lang="en"/>
-              <a:t>Hitboxes/Hurtboxes</a:t>
+              <a:t>Dungeon Generation</a:t>
             </a:r>
             <a:endParaRPr/>
           </a:p>
@@ -23966,7 +23991,7 @@
             </a:pPr>
             <a:r>
               <a:rPr lang="en"/>
-              <a:t>Dungeon Generation</a:t>
+              <a:t>Data-Driven Design (again)</a:t>
             </a:r>
             <a:endParaRPr/>
           </a:p>
@@ -23983,7 +24008,7 @@
             </a:pPr>
             <a:r>
               <a:rPr lang="en"/>
-              <a:t>Data-Driven Design (again)</a:t>
+              <a:t>Composition vs. Inheritance</a:t>
             </a:r>
             <a:endParaRPr/>
           </a:p>
@@ -24322,6 +24347,179 @@
 </file>
 
 <file path=ppt/slides/slide40.xml><?xml version="1.0" encoding="utf-8"?>
+<p:sld xmlns:a="http://schemas.openxmlformats.org/drawingml/2006/main" xmlns:p="http://schemas.openxmlformats.org/presentationml/2006/main" xmlns:r="http://schemas.openxmlformats.org/officeDocument/2006/relationships">
+  <p:cSld>
+    <p:spTree>
+      <p:nvGrpSpPr>
+        <p:cNvPr id="1" name=""/>
+        <p:cNvGrpSpPr/>
+        <p:nvPr/>
+      </p:nvGrpSpPr>
+      <p:grpSpPr/>
+      <p:sp>
+        <p:nvSpPr>
+          <p:cNvPr id="2" name="Title 1"/>
+          <p:cNvSpPr>
+            <a:spLocks noGrp="1"/>
+          </p:cNvSpPr>
+          <p:nvPr>
+            <p:ph type="title"/>
+          </p:nvPr>
+        </p:nvSpPr>
+        <p:spPr/>
+        <p:txBody>
+          <a:bodyPr/>
+          <a:lstStyle/>
+          <a:p>
+            <a:pPr indent="0" lvl="0" marL="0" rtl="0" algn="l">
+              <a:spcBef>
+                <a:spcPts val="0"/>
+              </a:spcBef>
+              <a:spcAft>
+                <a:spcPts val="0"/>
+              </a:spcAft>
+              <a:buNone/>
+            </a:pPr>
+            <a:r>
+              <a:rPr lang="en"/>
+              <a:t>Check Yourself</a:t>
+            </a:r>
+            <a:endParaRPr/>
+          </a:p>
+        </p:txBody>
+      </p:sp>
+      <p:sp>
+        <p:nvSpPr>
+          <p:cNvPr id="3" name="Text Placeholder 2"/>
+          <p:cNvSpPr>
+            <a:spLocks noGrp="1"/>
+          </p:cNvSpPr>
+          <p:nvPr>
+            <p:ph type="body" idx="1"/>
+          </p:nvPr>
+        </p:nvSpPr>
+        <p:spPr>
+          <a:xfrm>
+            <a:off x="311700" y="885950"/>
+            <a:ext cx="8520600" cy="1719072"/>
+          </a:xfrm>
+        </p:spPr>
+        <p:txBody>
+          <a:bodyPr/>
+          <a:lstStyle/>
+          <a:p>
+            <a:pPr indent="-330200" lvl="0" marL="457200" rtl="0" algn="l">
+              <a:spcBef>
+                <a:spcPts val="0"/>
+              </a:spcBef>
+              <a:spcAft>
+                <a:spcPts val="0"/>
+              </a:spcAft>
+              <a:buSzPts val="1600"/>
+              <a:buChar char="●"/>
+            </a:pPr>
+            <a:r>
+              <a:rPr lang="en"/>
+              <a:t>When does inheritance fit, and when is composition better?</a:t>
+            </a:r>
+            <a:endParaRPr/>
+          </a:p>
+          <a:p>
+            <a:pPr indent="-330200" lvl="0" marL="457200" rtl="0" algn="l">
+              <a:spcBef>
+                <a:spcPts val="0"/>
+              </a:spcBef>
+              <a:spcAft>
+                <a:spcPts val="0"/>
+              </a:spcAft>
+              <a:buSzPts val="1600"/>
+              <a:buChar char="●"/>
+            </a:pPr>
+            <a:r>
+              <a:rPr lang="en"/>
+              <a:t>Why does Observer suit UI code particularly well?</a:t>
+            </a:r>
+            <a:endParaRPr/>
+          </a:p>
+          <a:p>
+            <a:pPr indent="-330200" lvl="0" marL="457200" rtl="0" algn="l">
+              <a:spcBef>
+                <a:spcPts val="0"/>
+              </a:spcBef>
+              <a:spcAft>
+                <a:spcPts val="0"/>
+              </a:spcAft>
+              <a:buSzPts val="1600"/>
+              <a:buChar char="●"/>
+            </a:pPr>
+            <a:r>
+              <a:rPr lang="en"/>
+              <a:t>What is the difference between a delegate and an event in C#?</a:t>
+            </a:r>
+            <a:endParaRPr/>
+          </a:p>
+          <a:p>
+            <a:pPr indent="-330200" lvl="0" marL="457200" rtl="0" algn="l">
+              <a:spcBef>
+                <a:spcPts val="0"/>
+              </a:spcBef>
+              <a:spcAft>
+                <a:spcPts val="0"/>
+              </a:spcAft>
+              <a:buSzPts val="1600"/>
+              <a:buChar char="●"/>
+            </a:pPr>
+            <a:r>
+              <a:rPr lang="en"/>
+              <a:t>What is the cost of data-driven design?</a:t>
+            </a:r>
+            <a:endParaRPr/>
+          </a:p>
+        </p:txBody>
+      </p:sp>
+      <p:sp>
+        <p:nvSpPr>
+          <p:cNvPr id="4" name="TextBox 3"/>
+          <p:cNvSpPr txBox="1"/>
+          <p:nvPr/>
+        </p:nvSpPr>
+        <p:spPr>
+          <a:xfrm>
+            <a:off x="457200" y="3182112"/>
+            <a:ext cx="8229600" cy="457200"/>
+          </a:xfrm>
+          <a:prstGeom prst="rect">
+            <a:avLst/>
+          </a:prstGeom>
+          <a:noFill/>
+        </p:spPr>
+        <p:txBody>
+          <a:bodyPr wrap="square">
+            <a:spAutoFit/>
+          </a:bodyPr>
+          <a:lstStyle/>
+          <a:p>
+            <a:pPr algn="ctr"/>
+            <a:r>
+              <a:rPr sz="1400" b="0" i="0">
+                <a:solidFill>
+                  <a:srgbClr val="9AA3AB"/>
+                </a:solidFill>
+              </a:rPr>
+              <a:t>The answers, and more questions, are on the course site.</a:t>
+            </a:r>
+          </a:p>
+        </p:txBody>
+      </p:sp>
+    </p:spTree>
+  </p:cSld>
+  <p:clrMapOvr>
+    <a:masterClrMapping/>
+  </p:clrMapOvr>
+</p:sld>
+</file>
+
+<file path=ppt/slides/slide41.xml><?xml version="1.0" encoding="utf-8"?>
 <p:sld xmlns:a="http://schemas.openxmlformats.org/drawingml/2006/main" xmlns:r="http://schemas.openxmlformats.org/officeDocument/2006/relationships" xmlns:mc="http://schemas.openxmlformats.org/markup-compatibility/2006" xmlns:mv="urn:schemas-microsoft-com:mac:vml" xmlns:p="http://schemas.openxmlformats.org/presentationml/2006/main" xmlns:c="http://schemas.openxmlformats.org/drawingml/2006/chart" xmlns:dgm="http://schemas.openxmlformats.org/drawingml/2006/diagram" xmlns:o="urn:schemas-microsoft-com:office:office" xmlns:v="urn:schemas-microsoft-com:vml" xmlns:pvml="urn:schemas-microsoft-com:office:powerpoint" xmlns:com="http://schemas.openxmlformats.org/drawingml/2006/compatibility" xmlns:p14="http://schemas.microsoft.com/office/powerpoint/2010/main" xmlns:p15="http://schemas.microsoft.com/office/powerpoint/2012/main" xmlns:ahyp="http://schemas.microsoft.com/office/drawing/2018/hyperlinkcolor">
   <p:cSld>
     <p:spTree>

--- a/slides/07 The Legend of Zelda.pptx
+++ b/slides/07 The Legend of Zelda.pptx
@@ -3456,7 +3456,7 @@
           <a:lstStyle/>
           <a:p>
             <a:r>
-              <a:t>Games tween constantly, so GMDCore gets a TweenManager: Tween, After, Every, chained with Add and Finish. No progress variables anywhere.</a:t>
+              <a:t>Games tween constantly, so GARCore gets a TweenManager: Tween, After, Every, chained with Add and Finish. No progress variables anywhere.</a:t>
             </a:r>
           </a:p>
         </p:txBody>
@@ -20263,7 +20263,7 @@
                   <a:srgbClr val="DEE2E6"/>
                 </a:solidFill>
               </a:rPr>
-              <a:t>GMDCore gets a reusable TweenManager</a:t>
+              <a:t>GARCore gets a reusable TweenManager</a:t>
             </a:r>
             <a:endParaRPr/>
           </a:p>

--- a/slides/07 The Legend of Zelda.pptx
+++ b/slides/07 The Legend of Zelda.pptx
@@ -822,7 +822,7 @@
           <a:lstStyle/>
           <a:p>
             <a:r>
-              <a:t>Welcome. Today we build The Legend of Zelda. The main topic: events and the Observer pattern.</a:t>
+              <a:t>Welcome. Today we build The Legend of Zelda. The main topic: reacting to events without knowing who reacts.</a:t>
             </a:r>
           </a:p>
           <a:p>
@@ -3661,7 +3661,7 @@
           <a:lstStyle/>
           <a:p>
             <a:r>
-              <a:t>The main topic: events and the Observer pattern, with C# delegates, events and lambdas. With it: hitboxes, a tweening system, and composition vs. inheritance, the question Plants vs. Zombies answers.</a:t>
+              <a:t>The main topic: reacting to events without knowing who reacts, the Observer pattern, with C# delegates, events and lambdas. With it: hitboxes, a tweening system, and composition vs. inheritance, the question Plants vs. Zombies answers.</a:t>
             </a:r>
           </a:p>
         </p:txBody>
@@ -23899,7 +23899,7 @@
         <p:spPr>
           <a:xfrm>
             <a:off x="311700" y="885950"/>
-            <a:ext cx="8520600" cy="2441448"/>
+            <a:ext cx="8520600" cy="2825496"/>
           </a:xfrm>
           <a:prstGeom prst="rect">
             <a:avLst/>
@@ -23910,6 +23910,23 @@
             <a:normAutofit/>
           </a:bodyPr>
           <a:lstStyle/>
+          <a:p>
+            <a:pPr indent="-330200" lvl="0" marL="457200" rtl="0" algn="l">
+              <a:spcBef>
+                <a:spcPts val="0"/>
+              </a:spcBef>
+              <a:spcAft>
+                <a:spcPts val="0"/>
+              </a:spcAft>
+              <a:buSzPts val="1600"/>
+              <a:buChar char="●"/>
+            </a:pPr>
+            <a:r>
+              <a:rPr lang="en" b="1"/>
+              <a:t>Main topic: Reacting to events without knowing who reacts</a:t>
+            </a:r>
+            <a:endParaRPr/>
+          </a:p>
           <a:p>
             <a:pPr indent="-330200" lvl="0" marL="457200" rtl="0" algn="l">
               <a:spcBef>

--- a/slides/07 The Legend of Zelda.pptx
+++ b/slides/07 The Legend of Zelda.pptx
@@ -2277,6 +2277,11 @@
           <a:p>
             <a:r>
               <a:t>The OnPlayerDied chain is the one to trace first: room, dungeon, play state.</a:t>
+            </a:r>
+          </a:p>
+          <a:p>
+            <a:r>
+              <a:t>The sound queue: a HashSet of names that PlaySound adds to (duplicates merge for free), played and cleared once per frame after the update. A sound can be up to a frame late; nobody hears it.</a:t>
             </a:r>
           </a:p>
           <a:p>
@@ -15885,7 +15890,7 @@
             </a:pPr>
             <a:r>
               <a:rPr lang="en"/>
-              <a:t>SoundManager.PlaySound is called from many classes. How would events help?</a:t>
+              <a:t>SoundManager.PlaySound is called from many classes. How would events help? Then queue the sounds, and play each once per frame</a:t>
             </a:r>
             <a:endParaRPr/>
           </a:p>

--- a/slides/07 The Legend of Zelda.pptx
+++ b/slides/07 The Legend of Zelda.pptx
@@ -822,7 +822,7 @@
           <a:lstStyle/>
           <a:p>
             <a:r>
-              <a:t>Welcome. Today we build The Legend of Zelda. The main topic: reacting to events without knowing who reacts.</a:t>
+              <a:t>Welcome. Today we build The Legend of Zelda. The main topic: events.</a:t>
             </a:r>
           </a:p>
           <a:p>
@@ -3666,7 +3666,7 @@
           <a:lstStyle/>
           <a:p>
             <a:r>
-              <a:t>The main topic: reacting to events without knowing who reacts, the Observer pattern, with C# delegates, events and lambdas. With it: hitboxes, a tweening system, and composition vs. inheritance, the question Plants vs. Zombies answers.</a:t>
+              <a:t>Today’s main topic is events. We look at the Observer pattern and how C# does it with delegates, events and lambdas. Also hitboxes, a tweening system, and composition vs. inheritance, which Plants vs. Zombies picks up.</a:t>
             </a:r>
           </a:p>
         </p:txBody>
@@ -23928,7 +23928,7 @@
             </a:pPr>
             <a:r>
               <a:rPr lang="en" b="1"/>
-              <a:t>Main topic: Reacting to events without knowing who reacts</a:t>
+              <a:t>Main topic: Events</a:t>
             </a:r>
             <a:endParaRPr/>
           </a:p>

--- a/slides/07 The Legend of Zelda.pptx
+++ b/slides/07 The Legend of Zelda.pptx
@@ -2919,7 +2919,7 @@
           <a:lstStyle/>
           <a:p>
             <a:r>
-              <a:t>A new enemy is one XML block and a row in the sheet. Ask the question: someone writes type="skelton". When do you find out? At runtime, not compile time. That’s the cost.</a:t>
+              <a:t>A new enemy is one XML block and a row in the sheet. Ask the question: someone writes type="skelton". When do you find out? Only at runtime. That’s the cost.</a:t>
             </a:r>
           </a:p>
         </p:txBody>
@@ -3312,7 +3312,7 @@
           </a:p>
           <a:p>
             <a:r>
-              <a:t>A: Inheritance fits when there is one clear "is a" axis and the shared behaviour is needed by every subclass. Composition fits when behaviours combine freely: instead of one subclass per combination, an object has the parts it needs, and they can even change at runtime.</a:t>
+              <a:t>A: Inheritance fits when there is one clear "is a" axis and the shared behaviour is needed by every subclass. Composition fits when behaviours combine freely. Instead of one subclass per combination, an object has the parts it needs, and they can even change at runtime.</a:t>
             </a:r>
           </a:p>
           <a:p/>
@@ -21078,7 +21078,7 @@
             </a:pPr>
             <a:r>
               <a:rPr lang="en"/>
-              <a:t>Walking through a door, the player should go under the arch, not over it.</a:t>
+              <a:t>Walking through a door, the player should go under the arch.</a:t>
             </a:r>
             <a:endParaRPr/>
           </a:p>
@@ -22892,7 +22892,7 @@
                   <a:srgbClr val="9AA3AB"/>
                 </a:solidFill>
               </a:rPr>
-              <a:t>it holds, not the Enemy class</a:t>
+              <a:t>it holds</a:t>
             </a:r>
           </a:p>
         </p:txBody>
@@ -23022,7 +23022,7 @@
                   <a:srgbClr val="DEE2E6"/>
                 </a:solidFill>
               </a:rPr>
-              <a:t>Data instead of subclasses</a:t>
+              <a:t>Enemy types as data</a:t>
             </a:r>
           </a:p>
           <a:p>
@@ -23033,7 +23033,7 @@
                   <a:srgbClr val="9AA3AB"/>
                 </a:solidFill>
               </a:rPr>
-              <a:t>enemy types come from XML,</a:t>
+              <a:t>they come from XML,</a:t>
             </a:r>
           </a:p>
           <a:p>
@@ -23044,7 +23044,7 @@
                   <a:srgbClr val="9AA3AB"/>
                 </a:solidFill>
               </a:rPr>
-              <a:t>not one class each</a:t>
+              <a:t>with no class for each</a:t>
             </a:r>
           </a:p>
         </p:txBody>

--- a/slides/07 The Legend of Zelda.pptx
+++ b/slides/07 The Legend of Zelda.pptx
@@ -16560,7 +16560,7 @@
             </a:pPr>
             <a:r>
               <a:rPr lang="en"/>
-              <a:t>Tweening: move a value from A to B over time, instead of snapping it there.</a:t>
+              <a:t>Tweening moves a value from A to B over time.</a:t>
             </a:r>
             <a:endParaRPr/>
           </a:p>
@@ -22815,7 +22815,7 @@
             </a:pPr>
             <a:r>
               <a:rPr lang="en"/>
-              <a:t>Zelda already composes: ask whether it’s what something is, or what it can do.</a:t>
+              <a:t>Zelda already composes. Ask whether it’s what something is, or what it can do.</a:t>
             </a:r>
             <a:endParaRPr/>
           </a:p>
@@ -23078,7 +23078,7 @@
                   <a:srgbClr val="9AA3AB"/>
                 </a:solidFill>
               </a:rPr>
-              <a:t>Plants vs. Zombies takes this all the way: the Component pattern.</a:t>
+              <a:t>Plants vs. Zombies takes this all the way, with the Component pattern.</a:t>
             </a:r>
           </a:p>
         </p:txBody>

--- a/slides/07 The Legend of Zelda.pptx
+++ b/slides/07 The Legend of Zelda.pptx
@@ -18209,15 +18209,15 @@
           <p:nvPr/>
         </p:nvPicPr>
         <p:blipFill>
-          <a:blip r:embed="rId3"/>
+          <a:blip r:embed="rId4"/>
           <a:stretch>
             <a:fillRect/>
           </a:stretch>
         </p:blipFill>
         <p:spPr>
           <a:xfrm>
-            <a:off x="1412777" y="1203675"/>
-            <a:ext cx="6318444" cy="3554124"/>
+            <a:off x="1412778" y="1203675"/>
+            <a:ext cx="6318442" cy="3554124"/>
           </a:xfrm>
           <a:prstGeom prst="rect">
             <a:avLst/>

--- a/slides/07 The Legend of Zelda.pptx
+++ b/slides/07 The Legend of Zelda.pptx
@@ -2919,7 +2919,7 @@
           <a:lstStyle/>
           <a:p>
             <a:r>
-              <a:t>A new enemy is one XML block and a row in the sheet. Ask the question: someone writes type="skelton". When do you find out? Only at runtime. That’s the cost.</a:t>
+              <a:t>A new enemy is one XML block and a row in the sheet. Ask the question: someone writes type="rta". When do you find out? Only at runtime. That’s the cost.</a:t>
             </a:r>
           </a:p>
         </p:txBody>
@@ -7977,15 +7977,15 @@
           <p:nvPr/>
         </p:nvPicPr>
         <p:blipFill>
-          <a:blip r:embed="rId4"/>
+          <a:blip r:embed="rId3"/>
           <a:stretch>
             <a:fillRect/>
           </a:stretch>
         </p:blipFill>
         <p:spPr>
           <a:xfrm>
-            <a:off x="1597488" y="920715"/>
-            <a:ext cx="5949024" cy="4070384"/>
+            <a:off x="1597489" y="920715"/>
+            <a:ext cx="5949022" cy="4070384"/>
           </a:xfrm>
           <a:prstGeom prst="rect">
             <a:avLst/>
@@ -21471,7 +21471,7 @@
                 </a:solidFill>
                 <a:latin typeface="Consolas"/>
               </a:rPr>
-              <a:t>&lt;Enemy type="skeleton" width="16" height="16" walkSpeed="20" health="1"&gt;</a:t>
+              <a:t>&lt;Enemy type="rat" width="16" height="16" walkSpeed="20" health="1"&gt;</a:t>
             </a:r>
           </a:p>
           <a:p>
@@ -21586,7 +21586,7 @@
                   <a:srgbClr val="DEE2E6"/>
                 </a:solidFill>
               </a:rPr>
-              <a:t>Someone writes type="skelton". When do you find out?</a:t>
+              <a:t>Someone writes type="rta". When do you find out?</a:t>
             </a:r>
           </a:p>
         </p:txBody>
@@ -26683,14 +26683,14 @@
       </p:sp>
       <p:pic>
         <p:nvPicPr>
-          <p:cNvPr id="82" name="Picture 85" descr="zelda_tilesheet.png"/>
+          <p:cNvPr id="82" name="Picture 85" descr="tilesheet.png"/>
           <p:cNvPicPr>
             <a:picLocks noChangeAspect="1"/>
           </p:cNvPicPr>
           <p:nvPr/>
         </p:nvPicPr>
         <p:blipFill>
-          <a:blip r:embed="rId7"/>
+          <a:blip r:embed="rId4"/>
           <a:stretch>
             <a:fillRect/>
           </a:stretch>
@@ -26698,7 +26698,7 @@
         <p:spPr>
           <a:xfrm>
             <a:off x="408714" y="1425731"/>
-            <a:ext cx="4573373" cy="3129150"/>
+            <a:ext cx="4573373" cy="3129149"/>
           </a:xfrm>
           <a:prstGeom prst="rect">
             <a:avLst/>
@@ -26714,7 +26714,7 @@
           <p:nvPr/>
         </p:nvPicPr>
         <p:blipFill>
-          <a:blip r:embed="rId6"/>
+          <a:blip r:embed="rId8"/>
           <a:stretch>
             <a:fillRect/>
           </a:stretch>
@@ -26738,15 +26738,15 @@
           <p:nvPr/>
         </p:nvPicPr>
         <p:blipFill>
-          <a:blip r:embed="rId5"/>
+          <a:blip r:embed="rId9"/>
           <a:stretch>
             <a:fillRect/>
           </a:stretch>
         </p:blipFill>
         <p:spPr>
           <a:xfrm>
-            <a:off x="5454471" y="874004"/>
-            <a:ext cx="848874" cy="1697748"/>
+            <a:off x="5454471" y="1086222"/>
+            <a:ext cx="848874" cy="1273311"/>
           </a:xfrm>
           <a:prstGeom prst="rect">
             <a:avLst/>
@@ -26755,14 +26755,14 @@
       </p:pic>
       <p:pic>
         <p:nvPicPr>
-          <p:cNvPr id="85" name="Picture 85" descr="zelda_entities.png"/>
+          <p:cNvPr id="85" name="Picture 85" descr="entities.png"/>
           <p:cNvPicPr>
             <a:picLocks noChangeAspect="1"/>
           </p:cNvPicPr>
           <p:nvPr/>
         </p:nvPicPr>
         <p:blipFill>
-          <a:blip r:embed="rId10"/>
+          <a:blip r:embed="rId3"/>
           <a:stretch>
             <a:fillRect/>
           </a:stretch>

--- a/slides/07 The Legend of Zelda.pptx
+++ b/slides/07 The Legend of Zelda.pptx
@@ -18209,7 +18209,7 @@
           <p:nvPr/>
         </p:nvPicPr>
         <p:blipFill>
-          <a:blip r:embed="rId4"/>
+          <a:blip r:embed="rId3"/>
           <a:stretch>
             <a:fillRect/>
           </a:stretch>
@@ -18217,7 +18217,7 @@
         <p:spPr>
           <a:xfrm>
             <a:off x="1412778" y="1203675"/>
-            <a:ext cx="6318442" cy="3554124"/>
+            <a:ext cx="6318442" cy="3554123"/>
           </a:xfrm>
           <a:prstGeom prst="rect">
             <a:avLst/>

--- a/slides/07 The Legend of Zelda.pptx
+++ b/slides/07 The Legend of Zelda.pptx
@@ -8059,14 +8059,14 @@
       </p:sp>
       <p:pic>
         <p:nvPicPr>
-          <p:cNvPr id="97" name="Picture 97" descr="topdown.png"/>
+          <p:cNvPr id="97" name="Picture 97" descr="f010.png"/>
           <p:cNvPicPr>
             <a:picLocks noChangeAspect="1"/>
           </p:cNvPicPr>
           <p:nvPr/>
         </p:nvPicPr>
         <p:blipFill>
-          <a:blip r:embed="rId3"/>
+          <a:blip r:embed="rId4"/>
           <a:stretch>
             <a:fillRect/>
           </a:stretch>
@@ -8074,7 +8074,7 @@
         <p:spPr>
           <a:xfrm>
             <a:off x="1138225" y="1062675"/>
-            <a:ext cx="6867553" cy="3862998"/>
+            <a:ext cx="6867552" cy="3862997"/>
           </a:xfrm>
           <a:prstGeom prst="rect">
             <a:avLst/>
@@ -26714,7 +26714,7 @@
           <p:nvPr/>
         </p:nvPicPr>
         <p:blipFill>
-          <a:blip r:embed="rId8"/>
+          <a:blip r:embed="rId6"/>
           <a:stretch>
             <a:fillRect/>
           </a:stretch>
@@ -26738,7 +26738,7 @@
           <p:nvPr/>
         </p:nvPicPr>
         <p:blipFill>
-          <a:blip r:embed="rId9"/>
+          <a:blip r:embed="rId7"/>
           <a:stretch>
             <a:fillRect/>
           </a:stretch>
@@ -26762,7 +26762,7 @@
           <p:nvPr/>
         </p:nvPicPr>
         <p:blipFill>
-          <a:blip r:embed="rId3"/>
+          <a:blip r:embed="rId5"/>
           <a:stretch>
             <a:fillRect/>
           </a:stretch>

--- a/slides/07 The Legend of Zelda.pptx
+++ b/slides/07 The Legend of Zelda.pptx
@@ -8059,22 +8059,22 @@
       </p:sp>
       <p:pic>
         <p:nvPicPr>
-          <p:cNvPr id="97" name="Picture 97" descr="f010.png"/>
+          <p:cNvPr id="97" name="Picture 97" descr="f026.png"/>
           <p:cNvPicPr>
             <a:picLocks noChangeAspect="1"/>
           </p:cNvPicPr>
           <p:nvPr/>
         </p:nvPicPr>
         <p:blipFill>
-          <a:blip r:embed="rId4"/>
+          <a:blip r:embed="rId3"/>
           <a:stretch>
             <a:fillRect/>
           </a:stretch>
         </p:blipFill>
         <p:spPr>
           <a:xfrm>
-            <a:off x="1138225" y="1062675"/>
-            <a:ext cx="6867552" cy="3862997"/>
+            <a:off x="1138226" y="1062675"/>
+            <a:ext cx="6867550" cy="3862996"/>
           </a:xfrm>
           <a:prstGeom prst="rect">
             <a:avLst/>
@@ -18209,15 +18209,15 @@
           <p:nvPr/>
         </p:nvPicPr>
         <p:blipFill>
-          <a:blip r:embed="rId3"/>
+          <a:blip r:embed="rId4"/>
           <a:stretch>
             <a:fillRect/>
           </a:stretch>
         </p:blipFill>
         <p:spPr>
           <a:xfrm>
-            <a:off x="1412778" y="1203675"/>
-            <a:ext cx="6318442" cy="3554123"/>
+            <a:off x="1412779" y="1203675"/>
+            <a:ext cx="6318440" cy="3554123"/>
           </a:xfrm>
           <a:prstGeom prst="rect">
             <a:avLst/>
@@ -26762,7 +26762,7 @@
           <p:nvPr/>
         </p:nvPicPr>
         <p:blipFill>
-          <a:blip r:embed="rId5"/>
+          <a:blip r:embed="rId3"/>
           <a:stretch>
             <a:fillRect/>
           </a:stretch>

--- a/slides/07 The Legend of Zelda.pptx
+++ b/slides/07 The Legend of Zelda.pptx
@@ -23945,7 +23945,7 @@
             </a:pPr>
             <a:r>
               <a:rPr lang="en"/>
-              <a:t>Observer Pattern (Delegates &amp; Events)</a:t>
+              <a:t>Dungeon Generation</a:t>
             </a:r>
             <a:endParaRPr/>
           </a:p>
@@ -23979,7 +23979,7 @@
             </a:pPr>
             <a:r>
               <a:rPr lang="en"/>
-              <a:t>Dungeon Generation</a:t>
+              <a:t>Observer Pattern (Delegates &amp; Events)</a:t>
             </a:r>
             <a:endParaRPr/>
           </a:p>

--- a/slides/07 The Legend of Zelda.pptx
+++ b/slides/07 The Legend of Zelda.pptx
@@ -3323,7 +3323,7 @@
           </a:p>
           <a:p>
             <a:r>
-              <a:t>A: The UI depends on the game data, but the game shouldn't depend on the UI. With events, the health bar subscribes to HealthChanged and gameplay code never needs to know a health bar exists. The UI also only updates when something actually changes.</a:t>
+              <a:t>A: The UI depends on the game data, but the game shouldn't depend on the UI. With events, a health bar subscribes to an event on the player, and gameplay code never needs to know a health bar exists. The UI also only updates when something actually changes.</a:t>
             </a:r>
           </a:p>
           <a:p/>

--- a/slides/07 The Legend of Zelda.pptx
+++ b/slides/07 The Legend of Zelda.pptx
@@ -10565,7 +10565,7 @@
                 <a:cs typeface="Consolas"/>
                 <a:sym typeface="Consolas"/>
               </a:rPr>
-              <a:t>// GameObject.cs</a:t>
+              <a:t>// A delegate, as a property</a:t>
             </a:r>
             <a:endParaRPr sz="1000">
               <a:solidFill>
@@ -10812,7 +10812,7 @@
                 <a:cs typeface="Consolas"/>
                 <a:sym typeface="Consolas"/>
               </a:rPr>
-              <a:t>// Room.cs</a:t>
+              <a:t>// The room adds a handler</a:t>
             </a:r>
             <a:endParaRPr sz="1000">
               <a:solidFill>
@@ -13127,7 +13127,7 @@
             </a:pPr>
             <a:r>
               <a:rPr lang="en"/>
-              <a:t>A short piece of behaviour in one place without declaring a whole method for it</a:t>
+              <a:t>The value of the expression is returned</a:t>
             </a:r>
             <a:endParaRPr/>
           </a:p>
@@ -13144,24 +13144,7 @@
             </a:pPr>
             <a:r>
               <a:rPr lang="en"/>
-              <a:t>Implicit return</a:t>
-            </a:r>
-            <a:endParaRPr/>
-          </a:p>
-          <a:p>
-            <a:pPr indent="-330200" lvl="0" marL="457200" rtl="0" algn="l">
-              <a:spcBef>
-                <a:spcPts val="0"/>
-              </a:spcBef>
-              <a:spcAft>
-                <a:spcPts val="0"/>
-              </a:spcAft>
-              <a:buSzPts val="1600"/>
-              <a:buChar char="●"/>
-            </a:pPr>
-            <a:r>
-              <a:rPr lang="en"/>
-              <a:t>Common use: passing behaviour as an argument, or subscribing to events</a:t>
+              <a:t>Used to pass behaviour as an argument, and to subscribe to events</a:t>
             </a:r>
             <a:endParaRPr/>
           </a:p>

--- a/slides/07 The Legend of Zelda.pptx
+++ b/slides/07 The Legend of Zelda.pptx
@@ -27,12 +27,14 @@
     <p:sldId id="270" r:id="rId20"/>
     <p:sldId id="271" r:id="rId21"/>
     <p:sldId id="272" r:id="rId22"/>
+    <p:sldId id="299" r:id="rId57"/>
     <p:sldId id="273" r:id="rId23"/>
     <p:sldId id="274" r:id="rId24"/>
     <p:sldId id="275" r:id="rId25"/>
     <p:sldId id="276" r:id="rId26"/>
     <p:sldId id="277" r:id="rId27"/>
     <p:sldId id="278" r:id="rId28"/>
+    <p:sldId id="298" r:id="rId56"/>
     <p:sldId id="296" r:id="rId55"/>
     <p:sldId id="279" r:id="rId29"/>
     <p:sldId id="280" r:id="rId30"/>
@@ -2739,6 +2741,31 @@
               <a:t>Without it, the player is drawn over the door arch. Three passes: rooms; arch masks into the stencil buffer only; the player where nothing is marked.</a:t>
             </a:r>
           </a:p>
+          <a:p>
+            <a:r>
+              <a:t>Pass 1: draw the rooms</a:t>
+            </a:r>
+          </a:p>
+          <a:p>
+            <a:r>
+              <a:t>Pass 2: mark the arches</a:t>
+            </a:r>
+          </a:p>
+          <a:p>
+            <a:r>
+              <a:t>in the stencil buffer, with no colour</a:t>
+            </a:r>
+          </a:p>
+          <a:p>
+            <a:r>
+              <a:t>Pass 3: draw the player again</a:t>
+            </a:r>
+          </a:p>
+          <a:p>
+            <a:r>
+              <a:t>only where nothing is marked</a:t>
+            </a:r>
+          </a:p>
         </p:txBody>
       </p:sp>
     </p:spTree>
@@ -3788,6 +3815,132 @@
           <a:p>
             <a:r>
               <a:t>Room and Dungeon don’t change, and don’t know about the sound: that’s what the event is for.</a:t>
+            </a:r>
+          </a:p>
+        </p:txBody>
+      </p:sp>
+    </p:spTree>
+  </p:cSld>
+  <p:clrMapOvr>
+    <a:masterClrMapping/>
+  </p:clrMapOvr>
+</p:notes>
+</file>
+
+<file path=ppt/notesSlides/notesSlide42.xml><?xml version="1.0" encoding="utf-8"?>
+<p:notes xmlns:a="http://schemas.openxmlformats.org/drawingml/2006/main" xmlns:p="http://schemas.openxmlformats.org/presentationml/2006/main" xmlns:r="http://schemas.openxmlformats.org/officeDocument/2006/relationships">
+  <p:cSld>
+    <p:spTree>
+      <p:nvGrpSpPr>
+        <p:cNvPr id="1" name=""/>
+        <p:cNvGrpSpPr/>
+        <p:nvPr/>
+      </p:nvGrpSpPr>
+      <p:grpSpPr>
+        <a:xfrm>
+          <a:off x="0" y="0"/>
+          <a:ext cx="0" cy="0"/>
+          <a:chOff x="0" y="0"/>
+          <a:chExt cx="0" cy="0"/>
+        </a:xfrm>
+      </p:grpSpPr>
+      <p:sp>
+        <p:nvSpPr>
+          <p:cNvPr id="2" name="Slide Image Placeholder 1"/>
+          <p:cNvSpPr>
+            <a:spLocks noGrp="1"/>
+          </p:cNvSpPr>
+          <p:nvPr>
+            <p:ph type="sldImg" idx="2"/>
+          </p:nvPr>
+        </p:nvSpPr>
+        <p:spPr/>
+      </p:sp>
+      <p:sp>
+        <p:nvSpPr>
+          <p:cNvPr id="3" name="Notes Placeholder 2"/>
+          <p:cNvSpPr>
+            <a:spLocks noGrp="1"/>
+          </p:cNvSpPr>
+          <p:nvPr>
+            <p:ph type="body" idx="1"/>
+          </p:nvPr>
+        </p:nvSpPr>
+        <p:spPr/>
+        <p:txBody>
+          <a:bodyPr/>
+          <a:lstStyle/>
+          <a:p>
+            <a:r>
+              <a:t>An event is handled inside the call that raises it. A queue stores it and handles it later, at a safe point.</a:t>
+            </a:r>
+          </a:p>
+          <a:p>
+            <a:r>
+              <a:t>Ask: where have we queued before? Answer: Snake's turns, one per tick.</a:t>
+            </a:r>
+          </a:p>
+        </p:txBody>
+      </p:sp>
+    </p:spTree>
+  </p:cSld>
+  <p:clrMapOvr>
+    <a:masterClrMapping/>
+  </p:clrMapOvr>
+</p:notes>
+</file>
+
+<file path=ppt/notesSlides/notesSlide43.xml><?xml version="1.0" encoding="utf-8"?>
+<p:notes xmlns:a="http://schemas.openxmlformats.org/drawingml/2006/main" xmlns:p="http://schemas.openxmlformats.org/presentationml/2006/main" xmlns:r="http://schemas.openxmlformats.org/officeDocument/2006/relationships">
+  <p:cSld>
+    <p:spTree>
+      <p:nvGrpSpPr>
+        <p:cNvPr id="1" name=""/>
+        <p:cNvGrpSpPr/>
+        <p:nvPr/>
+      </p:nvGrpSpPr>
+      <p:grpSpPr>
+        <a:xfrm>
+          <a:off x="0" y="0"/>
+          <a:ext cx="0" cy="0"/>
+          <a:chOff x="0" y="0"/>
+          <a:chExt cx="0" cy="0"/>
+        </a:xfrm>
+      </p:grpSpPr>
+      <p:sp>
+        <p:nvSpPr>
+          <p:cNvPr id="2" name="Slide Image Placeholder 1"/>
+          <p:cNvSpPr>
+            <a:spLocks noGrp="1"/>
+          </p:cNvSpPr>
+          <p:nvPr>
+            <p:ph type="sldImg" idx="2"/>
+          </p:nvPr>
+        </p:nvSpPr>
+        <p:spPr/>
+      </p:sp>
+      <p:sp>
+        <p:nvSpPr>
+          <p:cNvPr id="3" name="Notes Placeholder 2"/>
+          <p:cNvSpPr>
+            <a:spLocks noGrp="1"/>
+          </p:cNvSpPr>
+          <p:nvPr>
+            <p:ph type="body" idx="1"/>
+          </p:nvPr>
+        </p:nvSpPr>
+        <p:spPr/>
+        <p:txBody>
+          <a:bodyPr/>
+          <a:lstStyle/>
+          <a:p>
+            <a:r>
+              <a:t>The room announces, the dungeon passes it on, the play state reacts. The subscriptions point the other way.</a:t>
+            </a:r>
+          </a:p>
+          <a:p>
+            <a:r>
+              <a:t>Ask: what does Room know about PlayState? Answer: nothing.</a:t>
             </a:r>
           </a:p>
         </p:txBody>
@@ -8379,232 +8532,28 @@
       </p:sp>
       <p:pic>
         <p:nvPicPr>
-          <p:cNvPr id="116" name="Google Shape;116;p21"/>
-          <p:cNvPicPr preferRelativeResize="0"/>
+          <p:cNvPr id="116" name="Picture 115" descr="hitboxes.png"/>
+          <p:cNvPicPr>
+            <a:picLocks noChangeAspect="1"/>
+          </p:cNvPicPr>
           <p:nvPr/>
         </p:nvPicPr>
         <p:blipFill>
-          <a:blip r:embed="rId3">
-            <a:alphaModFix/>
-          </a:blip>
+          <a:blip r:embed="rId5"/>
           <a:stretch>
             <a:fillRect/>
           </a:stretch>
         </p:blipFill>
         <p:spPr>
           <a:xfrm>
-            <a:off x="420250" y="1033600"/>
-            <a:ext cx="3436050" cy="1935950"/>
+            <a:off x="320039" y="1051560"/>
+            <a:ext cx="8503920" cy="3897630"/>
           </a:xfrm>
           <a:prstGeom prst="rect">
             <a:avLst/>
           </a:prstGeom>
-          <a:noFill/>
-          <a:ln>
-            <a:noFill/>
-          </a:ln>
         </p:spPr>
       </p:pic>
-      <p:pic>
-        <p:nvPicPr>
-          <p:cNvPr id="117" name="Google Shape;117;p21"/>
-          <p:cNvPicPr preferRelativeResize="0"/>
-          <p:nvPr/>
-        </p:nvPicPr>
-        <p:blipFill>
-          <a:blip r:embed="rId4">
-            <a:alphaModFix/>
-          </a:blip>
-          <a:stretch>
-            <a:fillRect/>
-          </a:stretch>
-        </p:blipFill>
-        <p:spPr>
-          <a:xfrm>
-            <a:off x="4171546" y="2254075"/>
-            <a:ext cx="4735726" cy="2655175"/>
-          </a:xfrm>
-          <a:prstGeom prst="rect">
-            <a:avLst/>
-          </a:prstGeom>
-          <a:noFill/>
-          <a:ln>
-            <a:noFill/>
-          </a:ln>
-        </p:spPr>
-      </p:pic>
-      <p:cxnSp>
-        <p:nvCxnSpPr>
-          <p:cNvPr id="118" name="Google Shape;118;p21"/>
-          <p:cNvCxnSpPr>
-            <a:stCxn id="119" idx="1"/>
-          </p:cNvCxnSpPr>
-          <p:nvPr/>
-        </p:nvCxnSpPr>
-        <p:spPr>
-          <a:xfrm flipH="1">
-            <a:off x="2667075" y="1824150"/>
-            <a:ext cx="1590900" cy="758100"/>
-          </a:xfrm>
-          <a:prstGeom prst="straightConnector1">
-            <a:avLst/>
-          </a:prstGeom>
-          <a:noFill/>
-          <a:ln cap="flat" cmpd="sng" w="9525">
-            <a:solidFill>
-              <a:srgbClr val="FF0000"/>
-            </a:solidFill>
-            <a:prstDash val="solid"/>
-            <a:round/>
-            <a:headEnd len="med" w="med" type="none"/>
-            <a:tailEnd len="med" w="med" type="triangle"/>
-          </a:ln>
-        </p:spPr>
-      </p:cxnSp>
-      <p:cxnSp>
-        <p:nvCxnSpPr>
-          <p:cNvPr id="120" name="Google Shape;120;p21"/>
-          <p:cNvCxnSpPr>
-            <a:stCxn id="121" idx="0"/>
-          </p:cNvCxnSpPr>
-          <p:nvPr/>
-        </p:nvCxnSpPr>
-        <p:spPr>
-          <a:xfrm rot="10800000">
-            <a:off x="1877175" y="2471025"/>
-            <a:ext cx="599100" cy="1272600"/>
-          </a:xfrm>
-          <a:prstGeom prst="straightConnector1">
-            <a:avLst/>
-          </a:prstGeom>
-          <a:noFill/>
-          <a:ln cap="flat" cmpd="sng" w="9525">
-            <a:solidFill>
-              <a:srgbClr val="00FF00"/>
-            </a:solidFill>
-            <a:prstDash val="solid"/>
-            <a:round/>
-            <a:headEnd len="med" w="med" type="none"/>
-            <a:tailEnd len="med" w="med" type="triangle"/>
-          </a:ln>
-        </p:spPr>
-      </p:cxnSp>
-      <p:sp>
-        <p:nvSpPr>
-          <p:cNvPr id="119" name="Google Shape;119;p21"/>
-          <p:cNvSpPr txBox="1"/>
-          <p:nvPr/>
-        </p:nvSpPr>
-        <p:spPr>
-          <a:xfrm>
-            <a:off x="4257975" y="1633200"/>
-            <a:ext cx="843000" cy="381900"/>
-          </a:xfrm>
-          <a:prstGeom prst="rect">
-            <a:avLst/>
-          </a:prstGeom>
-          <a:noFill/>
-          <a:ln>
-            <a:noFill/>
-          </a:ln>
-        </p:spPr>
-        <p:txBody>
-          <a:bodyPr anchorCtr="0" anchor="ctr" bIns="91425" lIns="91425" spcFirstLastPara="1" rIns="91425" wrap="square" tIns="91425">
-            <a:noAutofit/>
-          </a:bodyPr>
-          <a:lstStyle/>
-          <a:p>
-            <a:pPr indent="0" lvl="0" marL="0" rtl="0" algn="l">
-              <a:spcBef>
-                <a:spcPts val="0"/>
-              </a:spcBef>
-              <a:spcAft>
-                <a:spcPts val="0"/>
-              </a:spcAft>
-              <a:buNone/>
-            </a:pPr>
-            <a:r>
-              <a:rPr lang="en" sz="1600">
-                <a:solidFill>
-                  <a:srgbClr val="FF0000"/>
-                </a:solidFill>
-                <a:latin typeface="Roboto Light"/>
-                <a:ea typeface="Roboto Light"/>
-                <a:cs typeface="Roboto Light"/>
-                <a:sym typeface="Roboto Light"/>
-              </a:rPr>
-              <a:t>Hitbox</a:t>
-            </a:r>
-            <a:endParaRPr sz="1600">
-              <a:solidFill>
-                <a:srgbClr val="FF0000"/>
-              </a:solidFill>
-              <a:latin typeface="Roboto Light"/>
-              <a:ea typeface="Roboto Light"/>
-              <a:cs typeface="Roboto Light"/>
-              <a:sym typeface="Roboto Light"/>
-            </a:endParaRPr>
-          </a:p>
-        </p:txBody>
-      </p:sp>
-      <p:sp>
-        <p:nvSpPr>
-          <p:cNvPr id="121" name="Google Shape;121;p21"/>
-          <p:cNvSpPr txBox="1"/>
-          <p:nvPr/>
-        </p:nvSpPr>
-        <p:spPr>
-          <a:xfrm>
-            <a:off x="2004375" y="3743625"/>
-            <a:ext cx="943800" cy="429600"/>
-          </a:xfrm>
-          <a:prstGeom prst="rect">
-            <a:avLst/>
-          </a:prstGeom>
-          <a:noFill/>
-          <a:ln>
-            <a:noFill/>
-          </a:ln>
-        </p:spPr>
-        <p:txBody>
-          <a:bodyPr anchorCtr="0" anchor="ctr" bIns="91425" lIns="91425" spcFirstLastPara="1" rIns="91425" wrap="square" tIns="91425">
-            <a:noAutofit/>
-          </a:bodyPr>
-          <a:lstStyle/>
-          <a:p>
-            <a:pPr indent="0" lvl="0" marL="0" rtl="0" algn="l">
-              <a:spcBef>
-                <a:spcPts val="0"/>
-              </a:spcBef>
-              <a:spcAft>
-                <a:spcPts val="0"/>
-              </a:spcAft>
-              <a:buNone/>
-            </a:pPr>
-            <a:r>
-              <a:rPr lang="en" sz="1600">
-                <a:solidFill>
-                  <a:srgbClr val="00FF00"/>
-                </a:solidFill>
-                <a:latin typeface="Roboto Light"/>
-                <a:ea typeface="Roboto Light"/>
-                <a:cs typeface="Roboto Light"/>
-                <a:sym typeface="Roboto Light"/>
-              </a:rPr>
-              <a:t>Hurtbox</a:t>
-            </a:r>
-            <a:endParaRPr sz="1600">
-              <a:solidFill>
-                <a:srgbClr val="00FF00"/>
-              </a:solidFill>
-              <a:latin typeface="Roboto Light"/>
-              <a:ea typeface="Roboto Light"/>
-              <a:cs typeface="Roboto Light"/>
-              <a:sym typeface="Roboto Light"/>
-            </a:endParaRPr>
-          </a:p>
-        </p:txBody>
-      </p:sp>
     </p:spTree>
   </p:cSld>
   <p:clrMapOvr>
@@ -16417,30 +16366,26 @@
       </p:sp>
       <p:pic>
         <p:nvPicPr>
-          <p:cNvPr id="204" name="Google Shape;204;p33" title="R.gif"/>
-          <p:cNvPicPr preferRelativeResize="0"/>
+          <p:cNvPr id="204" name="Picture 203" descr="room-shift.png"/>
+          <p:cNvPicPr>
+            <a:picLocks noChangeAspect="1"/>
+          </p:cNvPicPr>
           <p:nvPr/>
         </p:nvPicPr>
         <p:blipFill>
-          <a:blip r:embed="rId3">
-            <a:alphaModFix/>
-          </a:blip>
+          <a:blip r:embed="rId4"/>
           <a:stretch>
             <a:fillRect/>
           </a:stretch>
         </p:blipFill>
         <p:spPr>
           <a:xfrm>
-            <a:off x="2842337" y="1240300"/>
-            <a:ext cx="3459325" cy="3243125"/>
+            <a:off x="360381" y="1051560"/>
+            <a:ext cx="8423237" cy="3977640"/>
           </a:xfrm>
           <a:prstGeom prst="rect">
             <a:avLst/>
           </a:prstGeom>
-          <a:noFill/>
-          <a:ln>
-            <a:noFill/>
-          </a:ln>
         </p:spPr>
       </p:pic>
     </p:spTree>
@@ -21036,8 +20981,8 @@
         </p:nvSpPr>
         <p:spPr>
           <a:xfrm>
-            <a:off x="311700" y="885950"/>
-            <a:ext cx="8520600" cy="521208"/>
+            <a:off x="311700" y="886968"/>
+            <a:ext cx="8520600" cy="457200"/>
           </a:xfrm>
           <a:prstGeom prst="rect">
             <a:avLst/>
@@ -21069,229 +21014,28 @@
       </p:sp>
       <p:pic>
         <p:nvPicPr>
-          <p:cNvPr id="230" name="Google Shape;230;p37"/>
-          <p:cNvPicPr preferRelativeResize="0"/>
+          <p:cNvPr id="230" name="Picture 229" descr="stencil.png"/>
+          <p:cNvPicPr>
+            <a:picLocks noChangeAspect="1"/>
+          </p:cNvPicPr>
           <p:nvPr/>
         </p:nvPicPr>
         <p:blipFill>
-          <a:blip r:embed="rId4">
-            <a:alphaModFix/>
-          </a:blip>
+          <a:blip r:embed="rId5"/>
           <a:stretch>
             <a:fillRect/>
           </a:stretch>
         </p:blipFill>
         <p:spPr>
           <a:xfrm>
-            <a:off x="5760720" y="1463040"/>
-            <a:ext cx="2926080" cy="1864572"/>
+            <a:off x="320039" y="1371600"/>
+            <a:ext cx="8503920" cy="3543300"/>
           </a:xfrm>
           <a:prstGeom prst="rect">
             <a:avLst/>
           </a:prstGeom>
-          <a:noFill/>
-          <a:ln>
-            <a:noFill/>
-          </a:ln>
         </p:spPr>
       </p:pic>
-      <p:sp>
-        <p:nvSpPr>
-          <p:cNvPr id="231" name="Rounded Rectangle 230"/>
-          <p:cNvSpPr/>
-          <p:nvPr/>
-        </p:nvSpPr>
-        <p:spPr>
-          <a:xfrm>
-            <a:off x="457200" y="1417320"/>
-            <a:ext cx="4937760" cy="731520"/>
-          </a:xfrm>
-          <a:prstGeom prst="roundRect">
-            <a:avLst>
-              <a:gd name="adj" fmla="val 12000"/>
-            </a:avLst>
-          </a:prstGeom>
-          <a:solidFill>
-            <a:srgbClr val="2E3338"/>
-          </a:solidFill>
-          <a:ln>
-            <a:noFill/>
-          </a:ln>
-          <a:effectLst/>
-        </p:spPr>
-        <p:style>
-          <a:lnRef idx="1">
-            <a:schemeClr val="accent1"/>
-          </a:lnRef>
-          <a:fillRef idx="3">
-            <a:schemeClr val="accent1"/>
-          </a:fillRef>
-          <a:effectRef idx="2">
-            <a:schemeClr val="accent1"/>
-          </a:effectRef>
-          <a:fontRef idx="minor">
-            <a:schemeClr val="lt1"/>
-          </a:fontRef>
-        </p:style>
-        <p:txBody>
-          <a:bodyPr rtlCol="0" anchor="ctr" wrap="square" lIns="73152" rIns="73152"/>
-          <a:lstStyle/>
-          <a:p>
-            <a:pPr algn="l"/>
-            <a:r>
-              <a:rPr sz="1500" b="1">
-                <a:solidFill>
-                  <a:srgbClr val="DEE2E6"/>
-                </a:solidFill>
-              </a:rPr>
-              <a:t>Pass 1: draw the rooms</a:t>
-            </a:r>
-          </a:p>
-          <a:p>
-            <a:pPr algn="l"/>
-            <a:r>
-              <a:rPr sz="1300" b="0">
-                <a:solidFill>
-                  <a:srgbClr val="9AA3AB"/>
-                </a:solidFill>
-              </a:rPr>
-              <a:t>as usual</a:t>
-            </a:r>
-          </a:p>
-        </p:txBody>
-      </p:sp>
-      <p:sp>
-        <p:nvSpPr>
-          <p:cNvPr id="232" name="Rounded Rectangle 231"/>
-          <p:cNvSpPr/>
-          <p:nvPr/>
-        </p:nvSpPr>
-        <p:spPr>
-          <a:xfrm>
-            <a:off x="457200" y="2286000"/>
-            <a:ext cx="4937760" cy="731520"/>
-          </a:xfrm>
-          <a:prstGeom prst="roundRect">
-            <a:avLst>
-              <a:gd name="adj" fmla="val 12000"/>
-            </a:avLst>
-          </a:prstGeom>
-          <a:solidFill>
-            <a:srgbClr val="2E3338"/>
-          </a:solidFill>
-          <a:ln w="25400">
-            <a:solidFill>
-              <a:srgbClr val="D45D35"/>
-            </a:solidFill>
-          </a:ln>
-          <a:effectLst/>
-        </p:spPr>
-        <p:style>
-          <a:lnRef idx="1">
-            <a:schemeClr val="accent1"/>
-          </a:lnRef>
-          <a:fillRef idx="3">
-            <a:schemeClr val="accent1"/>
-          </a:fillRef>
-          <a:effectRef idx="2">
-            <a:schemeClr val="accent1"/>
-          </a:effectRef>
-          <a:fontRef idx="minor">
-            <a:schemeClr val="lt1"/>
-          </a:fontRef>
-        </p:style>
-        <p:txBody>
-          <a:bodyPr rtlCol="0" anchor="ctr" wrap="square" lIns="73152" rIns="73152"/>
-          <a:lstStyle/>
-          <a:p>
-            <a:pPr algn="l"/>
-            <a:r>
-              <a:rPr sz="1500" b="1">
-                <a:solidFill>
-                  <a:srgbClr val="DEE2E6"/>
-                </a:solidFill>
-              </a:rPr>
-              <a:t>Pass 2: mark the arches</a:t>
-            </a:r>
-          </a:p>
-          <a:p>
-            <a:pPr algn="l"/>
-            <a:r>
-              <a:rPr sz="1300" b="0">
-                <a:solidFill>
-                  <a:srgbClr val="9AA3AB"/>
-                </a:solidFill>
-              </a:rPr>
-              <a:t>in the stencil buffer, with no colour</a:t>
-            </a:r>
-          </a:p>
-        </p:txBody>
-      </p:sp>
-      <p:sp>
-        <p:nvSpPr>
-          <p:cNvPr id="233" name="Rounded Rectangle 232"/>
-          <p:cNvSpPr/>
-          <p:nvPr/>
-        </p:nvSpPr>
-        <p:spPr>
-          <a:xfrm>
-            <a:off x="457200" y="3154680"/>
-            <a:ext cx="4937760" cy="731520"/>
-          </a:xfrm>
-          <a:prstGeom prst="roundRect">
-            <a:avLst>
-              <a:gd name="adj" fmla="val 12000"/>
-            </a:avLst>
-          </a:prstGeom>
-          <a:solidFill>
-            <a:srgbClr val="2E3338"/>
-          </a:solidFill>
-          <a:ln>
-            <a:noFill/>
-          </a:ln>
-          <a:effectLst/>
-        </p:spPr>
-        <p:style>
-          <a:lnRef idx="1">
-            <a:schemeClr val="accent1"/>
-          </a:lnRef>
-          <a:fillRef idx="3">
-            <a:schemeClr val="accent1"/>
-          </a:fillRef>
-          <a:effectRef idx="2">
-            <a:schemeClr val="accent1"/>
-          </a:effectRef>
-          <a:fontRef idx="minor">
-            <a:schemeClr val="lt1"/>
-          </a:fontRef>
-        </p:style>
-        <p:txBody>
-          <a:bodyPr rtlCol="0" anchor="ctr" wrap="square" lIns="73152" rIns="73152"/>
-          <a:lstStyle/>
-          <a:p>
-            <a:pPr algn="l"/>
-            <a:r>
-              <a:rPr sz="1500" b="1">
-                <a:solidFill>
-                  <a:srgbClr val="DEE2E6"/>
-                </a:solidFill>
-              </a:rPr>
-              <a:t>Pass 3: draw the player again</a:t>
-            </a:r>
-          </a:p>
-          <a:p>
-            <a:pPr algn="l"/>
-            <a:r>
-              <a:rPr sz="1300" b="0">
-                <a:solidFill>
-                  <a:srgbClr val="9AA3AB"/>
-                </a:solidFill>
-              </a:rPr>
-              <a:t>only where nothing is marked</a:t>
-            </a:r>
-          </a:p>
-        </p:txBody>
-      </p:sp>
     </p:spTree>
   </p:cSld>
   <p:clrMapOvr>
@@ -25204,6 +24948,154 @@
       </p:par>
     </p:tnLst>
   </p:timing>
+</p:sld>
+</file>
+
+<file path=ppt/slides/slide42.xml><?xml version="1.0" encoding="utf-8"?>
+<p:sld xmlns:a="http://schemas.openxmlformats.org/drawingml/2006/main" xmlns:p="http://schemas.openxmlformats.org/presentationml/2006/main" xmlns:r="http://schemas.openxmlformats.org/officeDocument/2006/relationships">
+  <p:cSld>
+    <p:spTree>
+      <p:nvGrpSpPr>
+        <p:cNvPr id="1" name=""/>
+        <p:cNvGrpSpPr/>
+        <p:nvPr/>
+      </p:nvGrpSpPr>
+      <p:grpSpPr/>
+      <p:sp>
+        <p:nvSpPr>
+          <p:cNvPr id="2" name="Title 1"/>
+          <p:cNvSpPr>
+            <a:spLocks noGrp="1"/>
+          </p:cNvSpPr>
+          <p:nvPr>
+            <p:ph type="title"/>
+          </p:nvPr>
+        </p:nvSpPr>
+        <p:spPr/>
+        <p:txBody>
+          <a:bodyPr/>
+          <a:lstStyle/>
+          <a:p>
+            <a:pPr indent="0" lvl="0" marL="0" rtl="0" algn="l">
+              <a:spcBef>
+                <a:spcPts val="0"/>
+              </a:spcBef>
+              <a:spcAft>
+                <a:spcPts val="0"/>
+              </a:spcAft>
+              <a:buNone/>
+            </a:pPr>
+            <a:r>
+              <a:rPr lang="en"/>
+              <a:t>Event Queue</a:t>
+            </a:r>
+            <a:endParaRPr/>
+          </a:p>
+        </p:txBody>
+      </p:sp>
+      <p:pic>
+        <p:nvPicPr>
+          <p:cNvPr id="3" name="Picture 2" descr="event-queue.png"/>
+          <p:cNvPicPr>
+            <a:picLocks noChangeAspect="1"/>
+          </p:cNvPicPr>
+          <p:nvPr/>
+        </p:nvPicPr>
+        <p:blipFill>
+          <a:blip r:embed="rId2"/>
+          <a:stretch>
+            <a:fillRect/>
+          </a:stretch>
+        </p:blipFill>
+        <p:spPr>
+          <a:xfrm>
+            <a:off x="320039" y="1051560"/>
+            <a:ext cx="8503920" cy="3897630"/>
+          </a:xfrm>
+          <a:prstGeom prst="rect">
+            <a:avLst/>
+          </a:prstGeom>
+        </p:spPr>
+      </p:pic>
+    </p:spTree>
+  </p:cSld>
+  <p:clrMapOvr>
+    <a:masterClrMapping/>
+  </p:clrMapOvr>
+</p:sld>
+</file>
+
+<file path=ppt/slides/slide43.xml><?xml version="1.0" encoding="utf-8"?>
+<p:sld xmlns:a="http://schemas.openxmlformats.org/drawingml/2006/main" xmlns:p="http://schemas.openxmlformats.org/presentationml/2006/main" xmlns:r="http://schemas.openxmlformats.org/officeDocument/2006/relationships">
+  <p:cSld>
+    <p:spTree>
+      <p:nvGrpSpPr>
+        <p:cNvPr id="1" name=""/>
+        <p:cNvGrpSpPr/>
+        <p:nvPr/>
+      </p:nvGrpSpPr>
+      <p:grpSpPr/>
+      <p:sp>
+        <p:nvSpPr>
+          <p:cNvPr id="2" name="Title 1"/>
+          <p:cNvSpPr>
+            <a:spLocks noGrp="1"/>
+          </p:cNvSpPr>
+          <p:nvPr>
+            <p:ph type="title"/>
+          </p:nvPr>
+        </p:nvSpPr>
+        <p:spPr/>
+        <p:txBody>
+          <a:bodyPr/>
+          <a:lstStyle/>
+          <a:p>
+            <a:pPr indent="0" lvl="0" marL="0" rtl="0" algn="l">
+              <a:spcBef>
+                <a:spcPts val="0"/>
+              </a:spcBef>
+              <a:spcAft>
+                <a:spcPts val="0"/>
+              </a:spcAft>
+              <a:buNone/>
+            </a:pPr>
+            <a:r>
+              <a:rPr lang="en"/>
+              <a:t>The Event Travels Up</a:t>
+            </a:r>
+            <a:endParaRPr/>
+          </a:p>
+        </p:txBody>
+      </p:sp>
+      <p:pic>
+        <p:nvPicPr>
+          <p:cNvPr id="3" name="Picture 2" descr="event-flow.png"/>
+          <p:cNvPicPr>
+            <a:picLocks noChangeAspect="1"/>
+          </p:cNvPicPr>
+          <p:nvPr/>
+        </p:nvPicPr>
+        <p:blipFill>
+          <a:blip r:embed="rId2"/>
+          <a:stretch>
+            <a:fillRect/>
+          </a:stretch>
+        </p:blipFill>
+        <p:spPr>
+          <a:xfrm>
+            <a:off x="320039" y="1051560"/>
+            <a:ext cx="8503920" cy="3897630"/>
+          </a:xfrm>
+          <a:prstGeom prst="rect">
+            <a:avLst/>
+          </a:prstGeom>
+        </p:spPr>
+      </p:pic>
+    </p:spTree>
+  </p:cSld>
+  <p:clrMapOvr>
+    <a:masterClrMapping/>
+  </p:clrMapOvr>
 </p:sld>
 </file>
 

--- a/slides/07 The Legend of Zelda.pptx
+++ b/slides/07 The Legend of Zelda.pptx
@@ -19,14 +19,11 @@
     <p:sldId id="263" r:id="rId13"/>
     <p:sldId id="264" r:id="rId14"/>
     <p:sldId id="265" r:id="rId15"/>
-    <p:sldId id="266" r:id="rId16"/>
     <p:sldId id="267" r:id="rId17"/>
     <p:sldId id="268" r:id="rId18"/>
     <p:sldId id="295" r:id="rId54"/>
     <p:sldId id="269" r:id="rId19"/>
     <p:sldId id="270" r:id="rId20"/>
-    <p:sldId id="271" r:id="rId21"/>
-    <p:sldId id="272" r:id="rId22"/>
     <p:sldId id="299" r:id="rId57"/>
     <p:sldId id="273" r:id="rId23"/>
     <p:sldId id="274" r:id="rId24"/>
@@ -931,95 +928,6 @@
 </p:notes>
 </file>
 
-<file path=ppt/notesSlides/notesSlide11.xml><?xml version="1.0" encoding="utf-8"?>
-<p:notes xmlns:a="http://schemas.openxmlformats.org/drawingml/2006/main" xmlns:r="http://schemas.openxmlformats.org/officeDocument/2006/relationships" xmlns:mc="http://schemas.openxmlformats.org/markup-compatibility/2006" xmlns:mv="urn:schemas-microsoft-com:mac:vml" xmlns:p="http://schemas.openxmlformats.org/presentationml/2006/main" xmlns:c="http://schemas.openxmlformats.org/drawingml/2006/chart" xmlns:dgm="http://schemas.openxmlformats.org/drawingml/2006/diagram" xmlns:o="urn:schemas-microsoft-com:office:office" xmlns:v="urn:schemas-microsoft-com:vml" xmlns:pvml="urn:schemas-microsoft-com:office:powerpoint" xmlns:com="http://schemas.openxmlformats.org/drawingml/2006/compatibility" xmlns:p14="http://schemas.microsoft.com/office/powerpoint/2010/main" xmlns:p15="http://schemas.microsoft.com/office/powerpoint/2012/main" xmlns:ahyp="http://schemas.microsoft.com/office/drawing/2018/hyperlinkcolor" showMasterPhAnim="0" showMasterSp="0">
-  <p:cSld>
-    <p:spTree>
-      <p:nvGrpSpPr>
-        <p:cNvPr id="98" name="Shape 98"/>
-        <p:cNvGrpSpPr/>
-        <p:nvPr/>
-      </p:nvGrpSpPr>
-      <p:grpSpPr>
-        <a:xfrm>
-          <a:off x="0" y="0"/>
-          <a:ext cx="0" cy="0"/>
-          <a:chOff x="0" y="0"/>
-          <a:chExt cx="0" cy="0"/>
-        </a:xfrm>
-      </p:grpSpPr>
-      <p:sp>
-        <p:nvSpPr>
-          <p:cNvPr id="99" name="Google Shape;99;g3d0d4f8444f_0_15:notes"/>
-          <p:cNvSpPr/>
-          <p:nvPr>
-            <p:ph idx="2" type="sldImg"/>
-          </p:nvPr>
-        </p:nvSpPr>
-        <p:spPr>
-          <a:xfrm>
-            <a:off x="381300" y="685800"/>
-            <a:ext cx="6096000" cy="3429000"/>
-          </a:xfrm>
-          <a:custGeom>
-            <a:rect b="b" l="l" r="r" t="t"/>
-            <a:pathLst>
-              <a:path extrusionOk="0" h="120000" w="120000">
-                <a:moveTo>
-                  <a:pt x="0" y="0"/>
-                </a:moveTo>
-                <a:lnTo>
-                  <a:pt x="120000" y="0"/>
-                </a:lnTo>
-                <a:lnTo>
-                  <a:pt x="120000" y="120000"/>
-                </a:lnTo>
-                <a:lnTo>
-                  <a:pt x="0" y="120000"/>
-                </a:lnTo>
-                <a:close/>
-              </a:path>
-            </a:pathLst>
-          </a:custGeom>
-        </p:spPr>
-      </p:sp>
-      <p:sp>
-        <p:nvSpPr>
-          <p:cNvPr id="100" name="Google Shape;100;g3d0d4f8444f_0_15:notes"/>
-          <p:cNvSpPr txBox="1"/>
-          <p:nvPr>
-            <p:ph idx="1" type="body"/>
-          </p:nvPr>
-        </p:nvSpPr>
-        <p:spPr>
-          <a:xfrm>
-            <a:off x="685800" y="4343400"/>
-            <a:ext cx="5486400" cy="4114800"/>
-          </a:xfrm>
-          <a:prstGeom prst="rect">
-            <a:avLst/>
-          </a:prstGeom>
-        </p:spPr>
-        <p:txBody>
-          <a:bodyPr anchorCtr="0" anchor="t" bIns="91425" lIns="91425" spcFirstLastPara="1" rIns="91425" wrap="square" tIns="91425">
-            <a:noAutofit/>
-          </a:bodyPr>
-          <a:lstStyle/>
-          <a:p>
-            <a:r>
-              <a:t>Real dungeon maps: rooms connected by doors. Ours is simpler: an endless series of rooms.</a:t>
-            </a:r>
-          </a:p>
-        </p:txBody>
-      </p:sp>
-    </p:spTree>
-  </p:cSld>
-  <p:clrMapOvr>
-    <a:masterClrMapping/>
-  </p:clrMapOvr>
-</p:notes>
-</file>
-
 <file path=ppt/notesSlides/notesSlide12.xml><?xml version="1.0" encoding="utf-8"?>
 <p:notes xmlns:a="http://schemas.openxmlformats.org/drawingml/2006/main" xmlns:r="http://schemas.openxmlformats.org/officeDocument/2006/relationships" xmlns:mc="http://schemas.openxmlformats.org/markup-compatibility/2006" xmlns:mv="urn:schemas-microsoft-com:mac:vml" xmlns:p="http://schemas.openxmlformats.org/presentationml/2006/main" xmlns:c="http://schemas.openxmlformats.org/drawingml/2006/chart" xmlns:dgm="http://schemas.openxmlformats.org/drawingml/2006/diagram" xmlns:o="urn:schemas-microsoft-com:office:office" xmlns:v="urn:schemas-microsoft-com:vml" xmlns:pvml="urn:schemas-microsoft-com:office:powerpoint" xmlns:com="http://schemas.openxmlformats.org/drawingml/2006/compatibility" xmlns:p14="http://schemas.microsoft.com/office/powerpoint/2010/main" xmlns:p15="http://schemas.microsoft.com/office/powerpoint/2012/main" xmlns:ahyp="http://schemas.microsoft.com/office/drawing/2018/hyperlinkcolor" showMasterPhAnim="0" showMasterSp="0">
   <p:cSld>
@@ -1376,182 +1284,9 @@
               <a:t>The subject announces; observers subscribe. The dependency is flipped: the subject doesn’t know who listens.</a:t>
             </a:r>
           </a:p>
-        </p:txBody>
-      </p:sp>
-    </p:spTree>
-  </p:cSld>
-  <p:clrMapOvr>
-    <a:masterClrMapping/>
-  </p:clrMapOvr>
-</p:notes>
-</file>
-
-<file path=ppt/notesSlides/notesSlide16.xml><?xml version="1.0" encoding="utf-8"?>
-<p:notes xmlns:a="http://schemas.openxmlformats.org/drawingml/2006/main" xmlns:r="http://schemas.openxmlformats.org/officeDocument/2006/relationships" xmlns:mc="http://schemas.openxmlformats.org/markup-compatibility/2006" xmlns:mv="urn:schemas-microsoft-com:mac:vml" xmlns:p="http://schemas.openxmlformats.org/presentationml/2006/main" xmlns:c="http://schemas.openxmlformats.org/drawingml/2006/chart" xmlns:dgm="http://schemas.openxmlformats.org/drawingml/2006/diagram" xmlns:o="urn:schemas-microsoft-com:office:office" xmlns:v="urn:schemas-microsoft-com:vml" xmlns:pvml="urn:schemas-microsoft-com:office:powerpoint" xmlns:com="http://schemas.openxmlformats.org/drawingml/2006/compatibility" xmlns:p14="http://schemas.microsoft.com/office/powerpoint/2010/main" xmlns:p15="http://schemas.microsoft.com/office/powerpoint/2012/main" xmlns:ahyp="http://schemas.microsoft.com/office/drawing/2018/hyperlinkcolor" showMasterPhAnim="0" showMasterSp="0">
-  <p:cSld>
-    <p:spTree>
-      <p:nvGrpSpPr>
-        <p:cNvPr id="135" name="Shape 135"/>
-        <p:cNvGrpSpPr/>
-        <p:nvPr/>
-      </p:nvGrpSpPr>
-      <p:grpSpPr>
-        <a:xfrm>
-          <a:off x="0" y="0"/>
-          <a:ext cx="0" cy="0"/>
-          <a:chOff x="0" y="0"/>
-          <a:chExt cx="0" cy="0"/>
-        </a:xfrm>
-      </p:grpSpPr>
-      <p:sp>
-        <p:nvSpPr>
-          <p:cNvPr id="136" name="Google Shape;136;g3cde4e978fb_0_45:notes"/>
-          <p:cNvSpPr/>
-          <p:nvPr>
-            <p:ph idx="2" type="sldImg"/>
-          </p:nvPr>
-        </p:nvSpPr>
-        <p:spPr>
-          <a:xfrm>
-            <a:off x="381300" y="685800"/>
-            <a:ext cx="6096000" cy="3429000"/>
-          </a:xfrm>
-          <a:custGeom>
-            <a:rect b="b" l="l" r="r" t="t"/>
-            <a:pathLst>
-              <a:path extrusionOk="0" h="120000" w="120000">
-                <a:moveTo>
-                  <a:pt x="0" y="0"/>
-                </a:moveTo>
-                <a:lnTo>
-                  <a:pt x="120000" y="0"/>
-                </a:lnTo>
-                <a:lnTo>
-                  <a:pt x="120000" y="120000"/>
-                </a:lnTo>
-                <a:lnTo>
-                  <a:pt x="0" y="120000"/>
-                </a:lnTo>
-                <a:close/>
-              </a:path>
-            </a:pathLst>
-          </a:custGeom>
-        </p:spPr>
-      </p:sp>
-      <p:sp>
-        <p:nvSpPr>
-          <p:cNvPr id="137" name="Google Shape;137;g3cde4e978fb_0_45:notes"/>
-          <p:cNvSpPr txBox="1"/>
-          <p:nvPr>
-            <p:ph idx="1" type="body"/>
-          </p:nvPr>
-        </p:nvSpPr>
-        <p:spPr>
-          <a:xfrm>
-            <a:off x="685800" y="4343400"/>
-            <a:ext cx="5486400" cy="4114800"/>
-          </a:xfrm>
-          <a:prstGeom prst="rect">
-            <a:avLst/>
-          </a:prstGeom>
-        </p:spPr>
-        <p:txBody>
-          <a:bodyPr anchorCtr="0" anchor="t" bIns="91425" lIns="91425" spcFirstLastPara="1" rIns="91425" wrap="square" tIns="91425">
-            <a:noAutofit/>
-          </a:bodyPr>
-          <a:lstStyle/>
-          <a:p>
-            <a:r>
-              <a:t>The structure: a list of observers, and notify calls each.</a:t>
-            </a:r>
-          </a:p>
-        </p:txBody>
-      </p:sp>
-    </p:spTree>
-  </p:cSld>
-  <p:clrMapOvr>
-    <a:masterClrMapping/>
-  </p:clrMapOvr>
-</p:notes>
-</file>
-
-<file path=ppt/notesSlides/notesSlide17.xml><?xml version="1.0" encoding="utf-8"?>
-<p:notes xmlns:a="http://schemas.openxmlformats.org/drawingml/2006/main" xmlns:r="http://schemas.openxmlformats.org/officeDocument/2006/relationships" xmlns:mc="http://schemas.openxmlformats.org/markup-compatibility/2006" xmlns:mv="urn:schemas-microsoft-com:mac:vml" xmlns:p="http://schemas.openxmlformats.org/presentationml/2006/main" xmlns:c="http://schemas.openxmlformats.org/drawingml/2006/chart" xmlns:dgm="http://schemas.openxmlformats.org/drawingml/2006/diagram" xmlns:o="urn:schemas-microsoft-com:office:office" xmlns:v="urn:schemas-microsoft-com:vml" xmlns:pvml="urn:schemas-microsoft-com:office:powerpoint" xmlns:com="http://schemas.openxmlformats.org/drawingml/2006/compatibility" xmlns:p14="http://schemas.microsoft.com/office/powerpoint/2010/main" xmlns:p15="http://schemas.microsoft.com/office/powerpoint/2012/main" xmlns:ahyp="http://schemas.microsoft.com/office/drawing/2018/hyperlinkcolor" showMasterPhAnim="0" showMasterSp="0">
-  <p:cSld>
-    <p:spTree>
-      <p:nvGrpSpPr>
-        <p:cNvPr id="141" name="Shape 141"/>
-        <p:cNvGrpSpPr/>
-        <p:nvPr/>
-      </p:nvGrpSpPr>
-      <p:grpSpPr>
-        <a:xfrm>
-          <a:off x="0" y="0"/>
-          <a:ext cx="0" cy="0"/>
-          <a:chOff x="0" y="0"/>
-          <a:chExt cx="0" cy="0"/>
-        </a:xfrm>
-      </p:grpSpPr>
-      <p:sp>
-        <p:nvSpPr>
-          <p:cNvPr id="142" name="Google Shape;142;g3d1261d8a3d_0_6:notes"/>
-          <p:cNvSpPr/>
-          <p:nvPr>
-            <p:ph idx="2" type="sldImg"/>
-          </p:nvPr>
-        </p:nvSpPr>
-        <p:spPr>
-          <a:xfrm>
-            <a:off x="381300" y="685800"/>
-            <a:ext cx="6096000" cy="3429000"/>
-          </a:xfrm>
-          <a:custGeom>
-            <a:rect b="b" l="l" r="r" t="t"/>
-            <a:pathLst>
-              <a:path extrusionOk="0" h="120000" w="120000">
-                <a:moveTo>
-                  <a:pt x="0" y="0"/>
-                </a:moveTo>
-                <a:lnTo>
-                  <a:pt x="120000" y="0"/>
-                </a:lnTo>
-                <a:lnTo>
-                  <a:pt x="120000" y="120000"/>
-                </a:lnTo>
-                <a:lnTo>
-                  <a:pt x="0" y="120000"/>
-                </a:lnTo>
-                <a:close/>
-              </a:path>
-            </a:pathLst>
-          </a:custGeom>
-        </p:spPr>
-      </p:sp>
-      <p:sp>
-        <p:nvSpPr>
-          <p:cNvPr id="143" name="Google Shape;143;g3d1261d8a3d_0_6:notes"/>
-          <p:cNvSpPr txBox="1"/>
-          <p:nvPr>
-            <p:ph idx="1" type="body"/>
-          </p:nvPr>
-        </p:nvSpPr>
-        <p:spPr>
-          <a:xfrm>
-            <a:off x="685800" y="4343400"/>
-            <a:ext cx="5486400" cy="4114800"/>
-          </a:xfrm>
-          <a:prstGeom prst="rect">
-            <a:avLst/>
-          </a:prstGeom>
-        </p:spPr>
-        <p:txBody>
-          <a:bodyPr anchorCtr="0" anchor="t" bIns="91425" lIns="91425" spcFirstLastPara="1" rIns="91425" wrap="square" tIns="91425">
-            <a:noAutofit/>
-          </a:bodyPr>
-          <a:lstStyle/>
-          <a:p>
-            <a:r>
-              <a:t>Two names for the same idea. Publisher-subscriber usually means there’s something in between.</a:t>
+          <a:p>
+            <a:r>
+              <a:t>Publisher and subscriber are other names for subject and observer.</a:t>
             </a:r>
           </a:p>
         </p:txBody>
@@ -8247,144 +7982,6 @@
   <p:cSld>
     <p:spTree>
       <p:nvGrpSpPr>
-        <p:cNvPr id="101" name="Shape 101"/>
-        <p:cNvGrpSpPr/>
-        <p:nvPr/>
-      </p:nvGrpSpPr>
-      <p:grpSpPr>
-        <a:xfrm>
-          <a:off x="0" y="0"/>
-          <a:ext cx="0" cy="0"/>
-          <a:chOff x="0" y="0"/>
-          <a:chExt cx="0" cy="0"/>
-        </a:xfrm>
-      </p:grpSpPr>
-      <p:sp>
-        <p:nvSpPr>
-          <p:cNvPr id="102" name="Google Shape;102;p19"/>
-          <p:cNvSpPr txBox="1"/>
-          <p:nvPr>
-            <p:ph type="title"/>
-          </p:nvPr>
-        </p:nvSpPr>
-        <p:spPr>
-          <a:xfrm>
-            <a:off x="311700" y="195615"/>
-            <a:ext cx="8520600" cy="572700"/>
-          </a:xfrm>
-          <a:prstGeom prst="rect">
-            <a:avLst/>
-          </a:prstGeom>
-        </p:spPr>
-        <p:txBody>
-          <a:bodyPr anchorCtr="0" anchor="t" bIns="91425" lIns="91425" spcFirstLastPara="1" rIns="91425" wrap="square" tIns="91425">
-            <a:normAutofit fontScale="90000"/>
-          </a:bodyPr>
-          <a:lstStyle/>
-          <a:p>
-            <a:pPr indent="0" lvl="0" marL="0" rtl="0" algn="l">
-              <a:spcBef>
-                <a:spcPts val="0"/>
-              </a:spcBef>
-              <a:spcAft>
-                <a:spcPts val="0"/>
-              </a:spcAft>
-              <a:buNone/>
-            </a:pPr>
-            <a:r>
-              <a:rPr lang="en"/>
-              <a:t>Dungeon Generation</a:t>
-            </a:r>
-            <a:endParaRPr/>
-          </a:p>
-        </p:txBody>
-      </p:sp>
-      <p:pic>
-        <p:nvPicPr>
-          <p:cNvPr id="103" name="Google Shape;103;p19"/>
-          <p:cNvPicPr preferRelativeResize="0"/>
-          <p:nvPr/>
-        </p:nvPicPr>
-        <p:blipFill>
-          <a:blip r:embed="rId3">
-            <a:alphaModFix/>
-          </a:blip>
-          <a:stretch>
-            <a:fillRect/>
-          </a:stretch>
-        </p:blipFill>
-        <p:spPr>
-          <a:xfrm>
-            <a:off x="1988337" y="1363350"/>
-            <a:ext cx="5167327" cy="3552550"/>
-          </a:xfrm>
-          <a:prstGeom prst="rect">
-            <a:avLst/>
-          </a:prstGeom>
-          <a:noFill/>
-          <a:ln>
-            <a:noFill/>
-          </a:ln>
-        </p:spPr>
-      </p:pic>
-      <p:sp>
-        <p:nvSpPr>
-          <p:cNvPr id="104" name="Google Shape;104;p19"/>
-          <p:cNvSpPr txBox="1"/>
-          <p:nvPr>
-            <p:ph idx="1" type="body"/>
-          </p:nvPr>
-        </p:nvSpPr>
-        <p:spPr>
-          <a:xfrm>
-            <a:off x="311700" y="885950"/>
-            <a:ext cx="8520600" cy="4023300"/>
-          </a:xfrm>
-          <a:prstGeom prst="rect">
-            <a:avLst/>
-          </a:prstGeom>
-        </p:spPr>
-        <p:txBody>
-          <a:bodyPr anchorCtr="0" anchor="t" bIns="91425" lIns="91425" spcFirstLastPara="1" rIns="91425" wrap="square" tIns="91425">
-            <a:normAutofit/>
-          </a:bodyPr>
-          <a:lstStyle/>
-          <a:p>
-            <a:pPr indent="0" lvl="0" marL="0" rtl="0" algn="l">
-              <a:spcBef>
-                <a:spcPts val="0"/>
-              </a:spcBef>
-              <a:spcAft>
-                <a:spcPts val="1200"/>
-              </a:spcAft>
-              <a:buNone/>
-            </a:pPr>
-            <a:r>
-              <a:rPr lang="en" u="sng">
-                <a:solidFill>
-                  <a:schemeClr val="hlink"/>
-                </a:solidFill>
-                <a:hlinkClick r:id="rId4"/>
-              </a:rPr>
-              <a:t>Dungeon Maps</a:t>
-            </a:r>
-            <a:endParaRPr/>
-          </a:p>
-        </p:txBody>
-      </p:sp>
-    </p:spTree>
-  </p:cSld>
-  <p:clrMapOvr>
-    <a:masterClrMapping/>
-  </p:clrMapOvr>
-</p:sld>
-</file>
-
-<file path=ppt/slides/slide13.xml><?xml version="1.0" encoding="utf-8"?>
-<p:sld xmlns:a="http://schemas.openxmlformats.org/drawingml/2006/main" xmlns:r="http://schemas.openxmlformats.org/officeDocument/2006/relationships" xmlns:mc="http://schemas.openxmlformats.org/markup-compatibility/2006" xmlns:mv="urn:schemas-microsoft-com:mac:vml" xmlns:p="http://schemas.openxmlformats.org/presentationml/2006/main" xmlns:c="http://schemas.openxmlformats.org/drawingml/2006/chart" xmlns:dgm="http://schemas.openxmlformats.org/drawingml/2006/diagram" xmlns:o="urn:schemas-microsoft-com:office:office" xmlns:v="urn:schemas-microsoft-com:vml" xmlns:pvml="urn:schemas-microsoft-com:office:powerpoint" xmlns:com="http://schemas.openxmlformats.org/drawingml/2006/compatibility" xmlns:p14="http://schemas.microsoft.com/office/powerpoint/2010/main" xmlns:p15="http://schemas.microsoft.com/office/powerpoint/2012/main" xmlns:ahyp="http://schemas.microsoft.com/office/drawing/2018/hyperlinkcolor">
-  <p:cSld>
-    <p:spTree>
-      <p:nvGrpSpPr>
         <p:cNvPr id="108" name="Shape 108"/>
         <p:cNvGrpSpPr/>
         <p:nvPr/>
@@ -8439,30 +8036,26 @@
       </p:sp>
       <p:pic>
         <p:nvPicPr>
-          <p:cNvPr id="110" name="Google Shape;110;p20"/>
-          <p:cNvPicPr preferRelativeResize="0"/>
+          <p:cNvPr id="110" name="Picture 109" descr="room.png"/>
+          <p:cNvPicPr>
+            <a:picLocks noChangeAspect="1"/>
+          </p:cNvPicPr>
           <p:nvPr/>
         </p:nvPicPr>
         <p:blipFill>
-          <a:blip r:embed="rId3">
-            <a:alphaModFix/>
-          </a:blip>
+          <a:blip r:embed="rId4"/>
           <a:stretch>
             <a:fillRect/>
           </a:stretch>
         </p:blipFill>
         <p:spPr>
           <a:xfrm>
-            <a:off x="957900" y="888915"/>
-            <a:ext cx="7228193" cy="4070385"/>
+            <a:off x="320039" y="1051560"/>
+            <a:ext cx="8503920" cy="3897630"/>
           </a:xfrm>
           <a:prstGeom prst="rect">
             <a:avLst/>
           </a:prstGeom>
-          <a:noFill/>
-          <a:ln>
-            <a:noFill/>
-          </a:ln>
         </p:spPr>
       </p:pic>
     </p:spTree>
@@ -8473,7 +8066,7 @@
 </p:sld>
 </file>
 
-<file path=ppt/slides/slide14.xml><?xml version="1.0" encoding="utf-8"?>
+<file path=ppt/slides/slide13.xml><?xml version="1.0" encoding="utf-8"?>
 <p:sld xmlns:a="http://schemas.openxmlformats.org/drawingml/2006/main" xmlns:r="http://schemas.openxmlformats.org/officeDocument/2006/relationships" xmlns:mc="http://schemas.openxmlformats.org/markup-compatibility/2006" xmlns:mv="urn:schemas-microsoft-com:mac:vml" xmlns:p="http://schemas.openxmlformats.org/presentationml/2006/main" xmlns:c="http://schemas.openxmlformats.org/drawingml/2006/chart" xmlns:dgm="http://schemas.openxmlformats.org/drawingml/2006/diagram" xmlns:o="urn:schemas-microsoft-com:office:office" xmlns:v="urn:schemas-microsoft-com:vml" xmlns:pvml="urn:schemas-microsoft-com:office:powerpoint" xmlns:com="http://schemas.openxmlformats.org/drawingml/2006/compatibility" xmlns:p14="http://schemas.microsoft.com/office/powerpoint/2010/main" xmlns:p15="http://schemas.microsoft.com/office/powerpoint/2012/main" xmlns:ahyp="http://schemas.microsoft.com/office/drawing/2018/hyperlinkcolor">
   <p:cSld>
     <p:spTree>
@@ -8562,7 +8155,7 @@
 </p:sld>
 </file>
 
-<file path=ppt/slides/slide15.xml><?xml version="1.0" encoding="utf-8"?>
+<file path=ppt/slides/slide14.xml><?xml version="1.0" encoding="utf-8"?>
 <p:sld xmlns:a="http://schemas.openxmlformats.org/drawingml/2006/main" xmlns:p="http://schemas.openxmlformats.org/presentationml/2006/main" xmlns:r="http://schemas.openxmlformats.org/officeDocument/2006/relationships">
   <p:cSld>
     <p:spTree>
@@ -8684,7 +8277,7 @@
 </p:sld>
 </file>
 
-<file path=ppt/slides/slide16.xml><?xml version="1.0" encoding="utf-8"?>
+<file path=ppt/slides/slide15.xml><?xml version="1.0" encoding="utf-8"?>
 <p:sld xmlns:a="http://schemas.openxmlformats.org/drawingml/2006/main" xmlns:r="http://schemas.openxmlformats.org/officeDocument/2006/relationships" xmlns:mc="http://schemas.openxmlformats.org/markup-compatibility/2006" xmlns:mv="urn:schemas-microsoft-com:mac:vml" xmlns:p="http://schemas.openxmlformats.org/presentationml/2006/main" xmlns:c="http://schemas.openxmlformats.org/drawingml/2006/chart" xmlns:dgm="http://schemas.openxmlformats.org/drawingml/2006/diagram" xmlns:o="urn:schemas-microsoft-com:office:office" xmlns:v="urn:schemas-microsoft-com:vml" xmlns:pvml="urn:schemas-microsoft-com:office:powerpoint" xmlns:com="http://schemas.openxmlformats.org/drawingml/2006/compatibility" xmlns:p14="http://schemas.microsoft.com/office/powerpoint/2010/main" xmlns:p15="http://schemas.microsoft.com/office/powerpoint/2012/main" xmlns:ahyp="http://schemas.microsoft.com/office/drawing/2018/hyperlinkcolor">
   <p:cSld>
     <p:spTree>
@@ -9074,7 +8667,7 @@
 </p:sld>
 </file>
 
-<file path=ppt/slides/slide17.xml><?xml version="1.0" encoding="utf-8"?>
+<file path=ppt/slides/slide16.xml><?xml version="1.0" encoding="utf-8"?>
 <p:sld xmlns:a="http://schemas.openxmlformats.org/drawingml/2006/main" xmlns:r="http://schemas.openxmlformats.org/officeDocument/2006/relationships" xmlns:mc="http://schemas.openxmlformats.org/markup-compatibility/2006" xmlns:mv="urn:schemas-microsoft-com:mac:vml" xmlns:p="http://schemas.openxmlformats.org/presentationml/2006/main" xmlns:c="http://schemas.openxmlformats.org/drawingml/2006/chart" xmlns:dgm="http://schemas.openxmlformats.org/drawingml/2006/diagram" xmlns:o="urn:schemas-microsoft-com:office:office" xmlns:v="urn:schemas-microsoft-com:vml" xmlns:pvml="urn:schemas-microsoft-com:office:powerpoint" xmlns:com="http://schemas.openxmlformats.org/drawingml/2006/compatibility" xmlns:p14="http://schemas.microsoft.com/office/powerpoint/2010/main" xmlns:p15="http://schemas.microsoft.com/office/powerpoint/2012/main" xmlns:ahyp="http://schemas.microsoft.com/office/drawing/2018/hyperlinkcolor">
   <p:cSld>
     <p:spTree>
@@ -9133,30 +8726,100 @@
       </p:sp>
       <p:pic>
         <p:nvPicPr>
-          <p:cNvPr id="134" name="Google Shape;134;p23"/>
-          <p:cNvPicPr preferRelativeResize="0"/>
+          <p:cNvPr id="134" name="Picture 133" descr="observer.png"/>
+          <p:cNvPicPr>
+            <a:picLocks noChangeAspect="1"/>
+          </p:cNvPicPr>
           <p:nvPr/>
         </p:nvPicPr>
         <p:blipFill>
-          <a:blip r:embed="rId3">
-            <a:alphaModFix/>
-          </a:blip>
+          <a:blip r:embed="rId3"/>
           <a:stretch>
             <a:fillRect/>
           </a:stretch>
         </p:blipFill>
         <p:spPr>
           <a:xfrm>
-            <a:off x="2247900" y="1280598"/>
-            <a:ext cx="4648200" cy="2905125"/>
+            <a:off x="320039" y="1051560"/>
+            <a:ext cx="8503920" cy="3897630"/>
           </a:xfrm>
           <a:prstGeom prst="rect">
             <a:avLst/>
           </a:prstGeom>
-          <a:noFill/>
-          <a:ln>
-            <a:noFill/>
-          </a:ln>
+        </p:spPr>
+      </p:pic>
+    </p:spTree>
+  </p:cSld>
+  <p:clrMapOvr>
+    <a:masterClrMapping/>
+  </p:clrMapOvr>
+</p:sld>
+</file>
+
+<file path=ppt/slides/slide17.xml><?xml version="1.0" encoding="utf-8"?>
+<p:sld xmlns:a="http://schemas.openxmlformats.org/drawingml/2006/main" xmlns:p="http://schemas.openxmlformats.org/presentationml/2006/main" xmlns:r="http://schemas.openxmlformats.org/officeDocument/2006/relationships">
+  <p:cSld>
+    <p:spTree>
+      <p:nvGrpSpPr>
+        <p:cNvPr id="1" name=""/>
+        <p:cNvGrpSpPr/>
+        <p:nvPr/>
+      </p:nvGrpSpPr>
+      <p:grpSpPr/>
+      <p:sp>
+        <p:nvSpPr>
+          <p:cNvPr id="2" name="Title 1"/>
+          <p:cNvSpPr>
+            <a:spLocks noGrp="1"/>
+          </p:cNvSpPr>
+          <p:nvPr>
+            <p:ph type="title"/>
+          </p:nvPr>
+        </p:nvSpPr>
+        <p:spPr/>
+        <p:txBody>
+          <a:bodyPr/>
+          <a:lstStyle/>
+          <a:p>
+            <a:pPr indent="0" lvl="0" marL="0" rtl="0" algn="l">
+              <a:spcBef>
+                <a:spcPts val="0"/>
+              </a:spcBef>
+              <a:spcAft>
+                <a:spcPts val="0"/>
+              </a:spcAft>
+              <a:buNone/>
+            </a:pPr>
+            <a:r>
+              <a:rPr lang="en"/>
+              <a:t>The Event Travels Up</a:t>
+            </a:r>
+            <a:endParaRPr/>
+          </a:p>
+        </p:txBody>
+      </p:sp>
+      <p:pic>
+        <p:nvPicPr>
+          <p:cNvPr id="3" name="Picture 2" descr="event-flow.png"/>
+          <p:cNvPicPr>
+            <a:picLocks noChangeAspect="1"/>
+          </p:cNvPicPr>
+          <p:nvPr/>
+        </p:nvPicPr>
+        <p:blipFill>
+          <a:blip r:embed="rId2"/>
+          <a:stretch>
+            <a:fillRect/>
+          </a:stretch>
+        </p:blipFill>
+        <p:spPr>
+          <a:xfrm>
+            <a:off x="320039" y="1051560"/>
+            <a:ext cx="8503920" cy="3897630"/>
+          </a:xfrm>
+          <a:prstGeom prst="rect">
+            <a:avLst/>
+          </a:prstGeom>
         </p:spPr>
       </p:pic>
     </p:spTree>
@@ -9168,467 +8831,6 @@
 </file>
 
 <file path=ppt/slides/slide18.xml><?xml version="1.0" encoding="utf-8"?>
-<p:sld xmlns:a="http://schemas.openxmlformats.org/drawingml/2006/main" xmlns:r="http://schemas.openxmlformats.org/officeDocument/2006/relationships" xmlns:mc="http://schemas.openxmlformats.org/markup-compatibility/2006" xmlns:mv="urn:schemas-microsoft-com:mac:vml" xmlns:p="http://schemas.openxmlformats.org/presentationml/2006/main" xmlns:c="http://schemas.openxmlformats.org/drawingml/2006/chart" xmlns:dgm="http://schemas.openxmlformats.org/drawingml/2006/diagram" xmlns:o="urn:schemas-microsoft-com:office:office" xmlns:v="urn:schemas-microsoft-com:vml" xmlns:pvml="urn:schemas-microsoft-com:office:powerpoint" xmlns:com="http://schemas.openxmlformats.org/drawingml/2006/compatibility" xmlns:p14="http://schemas.microsoft.com/office/powerpoint/2010/main" xmlns:p15="http://schemas.microsoft.com/office/powerpoint/2012/main" xmlns:ahyp="http://schemas.microsoft.com/office/drawing/2018/hyperlinkcolor">
-  <p:cSld>
-    <p:spTree>
-      <p:nvGrpSpPr>
-        <p:cNvPr id="138" name="Shape 138"/>
-        <p:cNvGrpSpPr/>
-        <p:nvPr/>
-      </p:nvGrpSpPr>
-      <p:grpSpPr>
-        <a:xfrm>
-          <a:off x="0" y="0"/>
-          <a:ext cx="0" cy="0"/>
-          <a:chOff x="0" y="0"/>
-          <a:chExt cx="0" cy="0"/>
-        </a:xfrm>
-      </p:grpSpPr>
-      <p:sp>
-        <p:nvSpPr>
-          <p:cNvPr id="139" name="Google Shape;139;p24"/>
-          <p:cNvSpPr txBox="1"/>
-          <p:nvPr>
-            <p:ph type="title"/>
-          </p:nvPr>
-        </p:nvSpPr>
-        <p:spPr>
-          <a:xfrm>
-            <a:off x="311700" y="195615"/>
-            <a:ext cx="8520600" cy="572700"/>
-          </a:xfrm>
-          <a:prstGeom prst="rect">
-            <a:avLst/>
-          </a:prstGeom>
-        </p:spPr>
-        <p:txBody>
-          <a:bodyPr anchorCtr="0" anchor="t" bIns="91425" lIns="91425" spcFirstLastPara="1" rIns="91425" wrap="square" tIns="91425">
-            <a:normAutofit fontScale="90000"/>
-          </a:bodyPr>
-          <a:lstStyle/>
-          <a:p>
-            <a:pPr indent="0" lvl="0" marL="0" rtl="0" algn="l">
-              <a:spcBef>
-                <a:spcPts val="0"/>
-              </a:spcBef>
-              <a:spcAft>
-                <a:spcPts val="0"/>
-              </a:spcAft>
-              <a:buNone/>
-            </a:pPr>
-            <a:r>
-              <a:rPr lang="en"/>
-              <a:t>Observer Pattern</a:t>
-            </a:r>
-            <a:endParaRPr/>
-          </a:p>
-        </p:txBody>
-      </p:sp>
-      <p:pic>
-        <p:nvPicPr>
-          <p:cNvPr id="140" name="Google Shape;140;p24"/>
-          <p:cNvPicPr preferRelativeResize="0"/>
-          <p:nvPr/>
-        </p:nvPicPr>
-        <p:blipFill>
-          <a:blip r:embed="rId3">
-            <a:alphaModFix/>
-          </a:blip>
-          <a:stretch>
-            <a:fillRect/>
-          </a:stretch>
-        </p:blipFill>
-        <p:spPr>
-          <a:xfrm>
-            <a:off x="1017138" y="1498598"/>
-            <a:ext cx="7109724" cy="2936950"/>
-          </a:xfrm>
-          <a:prstGeom prst="rect">
-            <a:avLst/>
-          </a:prstGeom>
-          <a:noFill/>
-          <a:ln>
-            <a:noFill/>
-          </a:ln>
-        </p:spPr>
-      </p:pic>
-    </p:spTree>
-  </p:cSld>
-  <p:clrMapOvr>
-    <a:masterClrMapping/>
-  </p:clrMapOvr>
-</p:sld>
-</file>
-
-<file path=ppt/slides/slide19.xml><?xml version="1.0" encoding="utf-8"?>
-<p:sld xmlns:a="http://schemas.openxmlformats.org/drawingml/2006/main" xmlns:r="http://schemas.openxmlformats.org/officeDocument/2006/relationships" xmlns:mc="http://schemas.openxmlformats.org/markup-compatibility/2006" xmlns:mv="urn:schemas-microsoft-com:mac:vml" xmlns:p="http://schemas.openxmlformats.org/presentationml/2006/main" xmlns:c="http://schemas.openxmlformats.org/drawingml/2006/chart" xmlns:dgm="http://schemas.openxmlformats.org/drawingml/2006/diagram" xmlns:o="urn:schemas-microsoft-com:office:office" xmlns:v="urn:schemas-microsoft-com:vml" xmlns:pvml="urn:schemas-microsoft-com:office:powerpoint" xmlns:com="http://schemas.openxmlformats.org/drawingml/2006/compatibility" xmlns:p14="http://schemas.microsoft.com/office/powerpoint/2010/main" xmlns:p15="http://schemas.microsoft.com/office/powerpoint/2012/main" xmlns:ahyp="http://schemas.microsoft.com/office/drawing/2018/hyperlinkcolor">
-  <p:cSld>
-    <p:spTree>
-      <p:nvGrpSpPr>
-        <p:cNvPr id="144" name="Shape 144"/>
-        <p:cNvGrpSpPr/>
-        <p:nvPr/>
-      </p:nvGrpSpPr>
-      <p:grpSpPr>
-        <a:xfrm>
-          <a:off x="0" y="0"/>
-          <a:ext cx="0" cy="0"/>
-          <a:chOff x="0" y="0"/>
-          <a:chExt cx="0" cy="0"/>
-        </a:xfrm>
-      </p:grpSpPr>
-      <p:sp>
-        <p:nvSpPr>
-          <p:cNvPr id="145" name="Google Shape;145;p25"/>
-          <p:cNvSpPr txBox="1"/>
-          <p:nvPr>
-            <p:ph type="title"/>
-          </p:nvPr>
-        </p:nvSpPr>
-        <p:spPr>
-          <a:xfrm>
-            <a:off x="311700" y="195615"/>
-            <a:ext cx="8520600" cy="572700"/>
-          </a:xfrm>
-          <a:prstGeom prst="rect">
-            <a:avLst/>
-          </a:prstGeom>
-        </p:spPr>
-        <p:txBody>
-          <a:bodyPr anchorCtr="0" anchor="t" bIns="91425" lIns="91425" spcFirstLastPara="1" rIns="91425" wrap="square" tIns="91425">
-            <a:normAutofit fontScale="90000"/>
-          </a:bodyPr>
-          <a:lstStyle/>
-          <a:p>
-            <a:pPr indent="0" lvl="0" marL="0" rtl="0" algn="l">
-              <a:spcBef>
-                <a:spcPts val="0"/>
-              </a:spcBef>
-              <a:spcAft>
-                <a:spcPts val="0"/>
-              </a:spcAft>
-              <a:buNone/>
-            </a:pPr>
-            <a:r>
-              <a:rPr lang="en"/>
-              <a:t>Publisher-Subscriber / Subject-Observer</a:t>
-            </a:r>
-            <a:endParaRPr/>
-          </a:p>
-        </p:txBody>
-      </p:sp>
-      <p:pic>
-        <p:nvPicPr>
-          <p:cNvPr id="146" name="Google Shape;146;p25"/>
-          <p:cNvPicPr preferRelativeResize="0"/>
-          <p:nvPr/>
-        </p:nvPicPr>
-        <p:blipFill>
-          <a:blip r:embed="rId3">
-            <a:alphaModFix/>
-          </a:blip>
-          <a:stretch>
-            <a:fillRect/>
-          </a:stretch>
-        </p:blipFill>
-        <p:spPr>
-          <a:xfrm>
-            <a:off x="4250600" y="2017251"/>
-            <a:ext cx="4487800" cy="1734700"/>
-          </a:xfrm>
-          <a:prstGeom prst="rect">
-            <a:avLst/>
-          </a:prstGeom>
-          <a:noFill/>
-          <a:ln>
-            <a:noFill/>
-          </a:ln>
-        </p:spPr>
-      </p:pic>
-      <p:pic>
-        <p:nvPicPr>
-          <p:cNvPr id="147" name="Google Shape;147;p25"/>
-          <p:cNvPicPr preferRelativeResize="0"/>
-          <p:nvPr/>
-        </p:nvPicPr>
-        <p:blipFill>
-          <a:blip r:embed="rId4">
-            <a:alphaModFix/>
-          </a:blip>
-          <a:stretch>
-            <a:fillRect/>
-          </a:stretch>
-        </p:blipFill>
-        <p:spPr>
-          <a:xfrm>
-            <a:off x="152400" y="1233567"/>
-            <a:ext cx="3901575" cy="3138223"/>
-          </a:xfrm>
-          <a:prstGeom prst="rect">
-            <a:avLst/>
-          </a:prstGeom>
-          <a:noFill/>
-          <a:ln>
-            <a:noFill/>
-          </a:ln>
-        </p:spPr>
-      </p:pic>
-    </p:spTree>
-  </p:cSld>
-  <p:clrMapOvr>
-    <a:masterClrMapping/>
-  </p:clrMapOvr>
-  <p:timing>
-    <p:tnLst>
-      <p:par>
-        <p:cTn dur="indefinite" nodeType="tmRoot" restart="never">
-          <p:childTnLst>
-            <p:seq concurrent="1" nextAc="seek">
-              <p:cTn dur="indefinite" id="2" nodeType="mainSeq">
-                <p:childTnLst>
-                  <p:par>
-                    <p:cTn fill="hold">
-                      <p:stCondLst>
-                        <p:cond delay="indefinite"/>
-                      </p:stCondLst>
-                      <p:childTnLst>
-                        <p:par>
-                          <p:cTn fill="hold">
-                            <p:stCondLst>
-                              <p:cond delay="0"/>
-                            </p:stCondLst>
-                            <p:childTnLst>
-                              <p:par>
-                                <p:cTn fill="hold" nodeType="clickEffect" presetClass="entr" presetID="1" presetSubtype="0">
-                                  <p:stCondLst>
-                                    <p:cond delay="0"/>
-                                  </p:stCondLst>
-                                  <p:childTnLst>
-                                    <p:set>
-                                      <p:cBhvr>
-                                        <p:cTn dur="1" fill="hold">
-                                          <p:stCondLst>
-                                            <p:cond delay="0"/>
-                                          </p:stCondLst>
-                                        </p:cTn>
-                                        <p:tgtEl>
-                                          <p:spTgt spid="147"/>
-                                        </p:tgtEl>
-                                        <p:attrNameLst>
-                                          <p:attrName>style.visibility</p:attrName>
-                                        </p:attrNameLst>
-                                      </p:cBhvr>
-                                      <p:to>
-                                        <p:strVal val="visible"/>
-                                      </p:to>
-                                    </p:set>
-                                  </p:childTnLst>
-                                </p:cTn>
-                              </p:par>
-                            </p:childTnLst>
-                          </p:cTn>
-                        </p:par>
-                      </p:childTnLst>
-                    </p:cTn>
-                  </p:par>
-                  <p:par>
-                    <p:cTn fill="hold">
-                      <p:stCondLst>
-                        <p:cond delay="indefinite"/>
-                      </p:stCondLst>
-                      <p:childTnLst>
-                        <p:par>
-                          <p:cTn fill="hold">
-                            <p:stCondLst>
-                              <p:cond delay="0"/>
-                            </p:stCondLst>
-                            <p:childTnLst>
-                              <p:par>
-                                <p:cTn fill="hold" nodeType="clickEffect" presetClass="entr" presetID="1" presetSubtype="0">
-                                  <p:stCondLst>
-                                    <p:cond delay="0"/>
-                                  </p:stCondLst>
-                                  <p:childTnLst>
-                                    <p:set>
-                                      <p:cBhvr>
-                                        <p:cTn dur="1" fill="hold">
-                                          <p:stCondLst>
-                                            <p:cond delay="0"/>
-                                          </p:stCondLst>
-                                        </p:cTn>
-                                        <p:tgtEl>
-                                          <p:spTgt spid="146"/>
-                                        </p:tgtEl>
-                                        <p:attrNameLst>
-                                          <p:attrName>style.visibility</p:attrName>
-                                        </p:attrNameLst>
-                                      </p:cBhvr>
-                                      <p:to>
-                                        <p:strVal val="visible"/>
-                                      </p:to>
-                                    </p:set>
-                                  </p:childTnLst>
-                                </p:cTn>
-                              </p:par>
-                            </p:childTnLst>
-                          </p:cTn>
-                        </p:par>
-                      </p:childTnLst>
-                    </p:cTn>
-                  </p:par>
-                </p:childTnLst>
-              </p:cTn>
-              <p:prevCondLst>
-                <p:cond evt="onPrev">
-                  <p:tgtEl>
-                    <p:sldTgt/>
-                  </p:tgtEl>
-                </p:cond>
-              </p:prevCondLst>
-              <p:nextCondLst>
-                <p:cond evt="onNext">
-                  <p:tgtEl>
-                    <p:sldTgt/>
-                  </p:tgtEl>
-                </p:cond>
-              </p:nextCondLst>
-            </p:seq>
-          </p:childTnLst>
-        </p:cTn>
-      </p:par>
-    </p:tnLst>
-  </p:timing>
-</p:sld>
-</file>
-
-<file path=ppt/slides/slide2.xml><?xml version="1.0" encoding="utf-8"?>
-<p:sld xmlns:a="http://schemas.openxmlformats.org/drawingml/2006/main" xmlns:r="http://schemas.openxmlformats.org/officeDocument/2006/relationships" xmlns:mc="http://schemas.openxmlformats.org/markup-compatibility/2006" xmlns:mv="urn:schemas-microsoft-com:mac:vml" xmlns:p="http://schemas.openxmlformats.org/presentationml/2006/main" xmlns:c="http://schemas.openxmlformats.org/drawingml/2006/chart" xmlns:dgm="http://schemas.openxmlformats.org/drawingml/2006/diagram" xmlns:o="urn:schemas-microsoft-com:office:office" xmlns:v="urn:schemas-microsoft-com:vml" xmlns:pvml="urn:schemas-microsoft-com:office:powerpoint" xmlns:com="http://schemas.openxmlformats.org/drawingml/2006/compatibility" xmlns:p14="http://schemas.microsoft.com/office/powerpoint/2010/main" xmlns:p15="http://schemas.microsoft.com/office/powerpoint/2012/main" xmlns:ahyp="http://schemas.microsoft.com/office/drawing/2018/hyperlinkcolor">
-  <p:cSld>
-    <p:spTree>
-      <p:nvGrpSpPr>
-        <p:cNvPr id="44" name="Shape 44"/>
-        <p:cNvGrpSpPr/>
-        <p:nvPr/>
-      </p:nvGrpSpPr>
-      <p:grpSpPr>
-        <a:xfrm>
-          <a:off x="0" y="0"/>
-          <a:ext cx="0" cy="0"/>
-          <a:chOff x="0" y="0"/>
-          <a:chExt cx="0" cy="0"/>
-        </a:xfrm>
-      </p:grpSpPr>
-      <p:sp>
-        <p:nvSpPr>
-          <p:cNvPr id="45" name="Google Shape;45;p10"/>
-          <p:cNvSpPr txBox="1"/>
-          <p:nvPr>
-            <p:ph type="title"/>
-          </p:nvPr>
-        </p:nvSpPr>
-        <p:spPr>
-          <a:xfrm>
-            <a:off x="311700" y="195615"/>
-            <a:ext cx="8520600" cy="572700"/>
-          </a:xfrm>
-          <a:prstGeom prst="rect">
-            <a:avLst/>
-          </a:prstGeom>
-        </p:spPr>
-        <p:txBody>
-          <a:bodyPr anchorCtr="0" anchor="t" bIns="91425" lIns="91425" spcFirstLastPara="1" rIns="91425" wrap="square" tIns="91425">
-            <a:normAutofit fontScale="90000"/>
-          </a:bodyPr>
-          <a:lstStyle/>
-          <a:p>
-            <a:pPr indent="0" lvl="0" marL="0" rtl="0" algn="l">
-              <a:spcBef>
-                <a:spcPts val="0"/>
-              </a:spcBef>
-              <a:spcAft>
-                <a:spcPts val="0"/>
-              </a:spcAft>
-              <a:buNone/>
-            </a:pPr>
-            <a:r>
-              <a:rPr lang="en"/>
-              <a:t>The Legend of Zelda</a:t>
-            </a:r>
-            <a:endParaRPr/>
-          </a:p>
-        </p:txBody>
-      </p:sp>
-      <p:pic>
-        <p:nvPicPr>
-          <p:cNvPr id="46" name="Google Shape;46;p10"/>
-          <p:cNvPicPr preferRelativeResize="0"/>
-          <p:nvPr/>
-        </p:nvPicPr>
-        <p:blipFill>
-          <a:blip r:embed="rId3">
-            <a:alphaModFix/>
-          </a:blip>
-          <a:stretch>
-            <a:fillRect/>
-          </a:stretch>
-        </p:blipFill>
-        <p:spPr>
-          <a:xfrm>
-            <a:off x="1866587" y="960120"/>
-            <a:ext cx="5410826" cy="3554650"/>
-          </a:xfrm>
-          <a:prstGeom prst="rect">
-            <a:avLst/>
-          </a:prstGeom>
-          <a:noFill/>
-          <a:ln>
-            <a:noFill/>
-          </a:ln>
-        </p:spPr>
-      </p:pic>
-      <p:sp>
-        <p:nvSpPr>
-          <p:cNvPr id="47" name="TextBox 46"/>
-          <p:cNvSpPr txBox="1"/>
-          <p:nvPr/>
-        </p:nvSpPr>
-        <p:spPr>
-          <a:xfrm>
-            <a:off x="457200" y="4736592"/>
-            <a:ext cx="8229600" cy="274320"/>
-          </a:xfrm>
-          <a:prstGeom prst="rect">
-            <a:avLst/>
-          </a:prstGeom>
-          <a:noFill/>
-        </p:spPr>
-        <p:txBody>
-          <a:bodyPr wrap="square">
-            <a:spAutoFit/>
-          </a:bodyPr>
-          <a:lstStyle/>
-          <a:p>
-            <a:pPr algn="ctr"/>
-            <a:r>
-              <a:rPr sz="900" b="0" i="0">
-                <a:solidFill>
-                  <a:srgbClr val="9AA3AB"/>
-                </a:solidFill>
-              </a:rPr>
-              <a:t>The Legend of Zelda (Nintendo, 1986). Screenshot © Nintendo.</a:t>
-            </a:r>
-          </a:p>
-        </p:txBody>
-      </p:sp>
-    </p:spTree>
-  </p:cSld>
-  <p:clrMapOvr>
-    <a:masterClrMapping/>
-  </p:clrMapOvr>
-</p:sld>
-</file>
-
-<file path=ppt/slides/slide20.xml><?xml version="1.0" encoding="utf-8"?>
 <p:sld xmlns:a="http://schemas.openxmlformats.org/drawingml/2006/main" xmlns:r="http://schemas.openxmlformats.org/officeDocument/2006/relationships" xmlns:mc="http://schemas.openxmlformats.org/markup-compatibility/2006" xmlns:mv="urn:schemas-microsoft-com:mac:vml" xmlns:p="http://schemas.openxmlformats.org/presentationml/2006/main" xmlns:c="http://schemas.openxmlformats.org/drawingml/2006/chart" xmlns:dgm="http://schemas.openxmlformats.org/drawingml/2006/diagram" xmlns:o="urn:schemas-microsoft-com:office:office" xmlns:v="urn:schemas-microsoft-com:vml" xmlns:pvml="urn:schemas-microsoft-com:office:powerpoint" xmlns:com="http://schemas.openxmlformats.org/drawingml/2006/compatibility" xmlns:p14="http://schemas.microsoft.com/office/powerpoint/2010/main" xmlns:p15="http://schemas.microsoft.com/office/powerpoint/2012/main" xmlns:ahyp="http://schemas.microsoft.com/office/drawing/2018/hyperlinkcolor">
   <p:cSld>
     <p:spTree>
@@ -9808,7 +9010,7 @@
 </p:sld>
 </file>
 
-<file path=ppt/slides/slide21.xml><?xml version="1.0" encoding="utf-8"?>
+<file path=ppt/slides/slide19.xml><?xml version="1.0" encoding="utf-8"?>
 <p:sld xmlns:a="http://schemas.openxmlformats.org/drawingml/2006/main" xmlns:r="http://schemas.openxmlformats.org/officeDocument/2006/relationships" xmlns:mc="http://schemas.openxmlformats.org/markup-compatibility/2006" xmlns:mv="urn:schemas-microsoft-com:mac:vml" xmlns:p="http://schemas.openxmlformats.org/presentationml/2006/main" xmlns:c="http://schemas.openxmlformats.org/drawingml/2006/chart" xmlns:dgm="http://schemas.openxmlformats.org/drawingml/2006/diagram" xmlns:o="urn:schemas-microsoft-com:office:office" xmlns:v="urn:schemas-microsoft-com:vml" xmlns:pvml="urn:schemas-microsoft-com:office:powerpoint" xmlns:com="http://schemas.openxmlformats.org/drawingml/2006/compatibility" xmlns:p14="http://schemas.microsoft.com/office/powerpoint/2010/main" xmlns:p15="http://schemas.microsoft.com/office/powerpoint/2012/main" xmlns:ahyp="http://schemas.microsoft.com/office/drawing/2018/hyperlinkcolor">
   <p:cSld>
     <p:spTree>
@@ -10049,7 +9251,134 @@
 </p:sld>
 </file>
 
-<file path=ppt/slides/slide22.xml><?xml version="1.0" encoding="utf-8"?>
+<file path=ppt/slides/slide2.xml><?xml version="1.0" encoding="utf-8"?>
+<p:sld xmlns:a="http://schemas.openxmlformats.org/drawingml/2006/main" xmlns:r="http://schemas.openxmlformats.org/officeDocument/2006/relationships" xmlns:mc="http://schemas.openxmlformats.org/markup-compatibility/2006" xmlns:mv="urn:schemas-microsoft-com:mac:vml" xmlns:p="http://schemas.openxmlformats.org/presentationml/2006/main" xmlns:c="http://schemas.openxmlformats.org/drawingml/2006/chart" xmlns:dgm="http://schemas.openxmlformats.org/drawingml/2006/diagram" xmlns:o="urn:schemas-microsoft-com:office:office" xmlns:v="urn:schemas-microsoft-com:vml" xmlns:pvml="urn:schemas-microsoft-com:office:powerpoint" xmlns:com="http://schemas.openxmlformats.org/drawingml/2006/compatibility" xmlns:p14="http://schemas.microsoft.com/office/powerpoint/2010/main" xmlns:p15="http://schemas.microsoft.com/office/powerpoint/2012/main" xmlns:ahyp="http://schemas.microsoft.com/office/drawing/2018/hyperlinkcolor">
+  <p:cSld>
+    <p:spTree>
+      <p:nvGrpSpPr>
+        <p:cNvPr id="44" name="Shape 44"/>
+        <p:cNvGrpSpPr/>
+        <p:nvPr/>
+      </p:nvGrpSpPr>
+      <p:grpSpPr>
+        <a:xfrm>
+          <a:off x="0" y="0"/>
+          <a:ext cx="0" cy="0"/>
+          <a:chOff x="0" y="0"/>
+          <a:chExt cx="0" cy="0"/>
+        </a:xfrm>
+      </p:grpSpPr>
+      <p:sp>
+        <p:nvSpPr>
+          <p:cNvPr id="45" name="Google Shape;45;p10"/>
+          <p:cNvSpPr txBox="1"/>
+          <p:nvPr>
+            <p:ph type="title"/>
+          </p:nvPr>
+        </p:nvSpPr>
+        <p:spPr>
+          <a:xfrm>
+            <a:off x="311700" y="195615"/>
+            <a:ext cx="8520600" cy="572700"/>
+          </a:xfrm>
+          <a:prstGeom prst="rect">
+            <a:avLst/>
+          </a:prstGeom>
+        </p:spPr>
+        <p:txBody>
+          <a:bodyPr anchorCtr="0" anchor="t" bIns="91425" lIns="91425" spcFirstLastPara="1" rIns="91425" wrap="square" tIns="91425">
+            <a:normAutofit fontScale="90000"/>
+          </a:bodyPr>
+          <a:lstStyle/>
+          <a:p>
+            <a:pPr indent="0" lvl="0" marL="0" rtl="0" algn="l">
+              <a:spcBef>
+                <a:spcPts val="0"/>
+              </a:spcBef>
+              <a:spcAft>
+                <a:spcPts val="0"/>
+              </a:spcAft>
+              <a:buNone/>
+            </a:pPr>
+            <a:r>
+              <a:rPr lang="en"/>
+              <a:t>The Legend of Zelda</a:t>
+            </a:r>
+            <a:endParaRPr/>
+          </a:p>
+        </p:txBody>
+      </p:sp>
+      <p:pic>
+        <p:nvPicPr>
+          <p:cNvPr id="46" name="Google Shape;46;p10"/>
+          <p:cNvPicPr preferRelativeResize="0"/>
+          <p:nvPr/>
+        </p:nvPicPr>
+        <p:blipFill>
+          <a:blip r:embed="rId3">
+            <a:alphaModFix/>
+          </a:blip>
+          <a:stretch>
+            <a:fillRect/>
+          </a:stretch>
+        </p:blipFill>
+        <p:spPr>
+          <a:xfrm>
+            <a:off x="1866587" y="960120"/>
+            <a:ext cx="5410826" cy="3554650"/>
+          </a:xfrm>
+          <a:prstGeom prst="rect">
+            <a:avLst/>
+          </a:prstGeom>
+          <a:noFill/>
+          <a:ln>
+            <a:noFill/>
+          </a:ln>
+        </p:spPr>
+      </p:pic>
+      <p:sp>
+        <p:nvSpPr>
+          <p:cNvPr id="47" name="TextBox 46"/>
+          <p:cNvSpPr txBox="1"/>
+          <p:nvPr/>
+        </p:nvSpPr>
+        <p:spPr>
+          <a:xfrm>
+            <a:off x="457200" y="4736592"/>
+            <a:ext cx="8229600" cy="274320"/>
+          </a:xfrm>
+          <a:prstGeom prst="rect">
+            <a:avLst/>
+          </a:prstGeom>
+          <a:noFill/>
+        </p:spPr>
+        <p:txBody>
+          <a:bodyPr wrap="square">
+            <a:spAutoFit/>
+          </a:bodyPr>
+          <a:lstStyle/>
+          <a:p>
+            <a:pPr algn="ctr"/>
+            <a:r>
+              <a:rPr sz="900" b="0" i="0">
+                <a:solidFill>
+                  <a:srgbClr val="9AA3AB"/>
+                </a:solidFill>
+              </a:rPr>
+              <a:t>The Legend of Zelda (Nintendo, 1986). Screenshot © Nintendo.</a:t>
+            </a:r>
+          </a:p>
+        </p:txBody>
+      </p:sp>
+    </p:spTree>
+  </p:cSld>
+  <p:clrMapOvr>
+    <a:masterClrMapping/>
+  </p:clrMapOvr>
+</p:sld>
+</file>
+
+<file path=ppt/slides/slide20.xml><?xml version="1.0" encoding="utf-8"?>
 <p:sld xmlns:a="http://schemas.openxmlformats.org/drawingml/2006/main" xmlns:r="http://schemas.openxmlformats.org/officeDocument/2006/relationships" xmlns:mc="http://schemas.openxmlformats.org/markup-compatibility/2006" xmlns:mv="urn:schemas-microsoft-com:mac:vml" xmlns:p="http://schemas.openxmlformats.org/presentationml/2006/main" xmlns:c="http://schemas.openxmlformats.org/drawingml/2006/chart" xmlns:dgm="http://schemas.openxmlformats.org/drawingml/2006/diagram" xmlns:o="urn:schemas-microsoft-com:office:office" xmlns:v="urn:schemas-microsoft-com:vml" xmlns:pvml="urn:schemas-microsoft-com:office:powerpoint" xmlns:com="http://schemas.openxmlformats.org/drawingml/2006/compatibility" xmlns:p14="http://schemas.microsoft.com/office/powerpoint/2010/main" xmlns:p15="http://schemas.microsoft.com/office/powerpoint/2012/main" xmlns:ahyp="http://schemas.microsoft.com/office/drawing/2018/hyperlinkcolor">
   <p:cSld>
     <p:spTree>
@@ -12618,7 +11947,7 @@
 </p:sld>
 </file>
 
-<file path=ppt/slides/slide23.xml><?xml version="1.0" encoding="utf-8"?>
+<file path=ppt/slides/slide21.xml><?xml version="1.0" encoding="utf-8"?>
 <p:sld xmlns:a="http://schemas.openxmlformats.org/drawingml/2006/main" xmlns:r="http://schemas.openxmlformats.org/officeDocument/2006/relationships" xmlns:mc="http://schemas.openxmlformats.org/markup-compatibility/2006" xmlns:mv="urn:schemas-microsoft-com:mac:vml" xmlns:p="http://schemas.openxmlformats.org/presentationml/2006/main" xmlns:c="http://schemas.openxmlformats.org/drawingml/2006/chart" xmlns:dgm="http://schemas.openxmlformats.org/drawingml/2006/diagram" xmlns:o="urn:schemas-microsoft-com:office:office" xmlns:v="urn:schemas-microsoft-com:vml" xmlns:pvml="urn:schemas-microsoft-com:office:powerpoint" xmlns:com="http://schemas.openxmlformats.org/drawingml/2006/compatibility" xmlns:p14="http://schemas.microsoft.com/office/powerpoint/2010/main" xmlns:p15="http://schemas.microsoft.com/office/powerpoint/2012/main" xmlns:ahyp="http://schemas.microsoft.com/office/drawing/2018/hyperlinkcolor">
   <p:cSld>
     <p:spTree>
@@ -12950,7 +12279,7 @@
 </p:sld>
 </file>
 
-<file path=ppt/slides/slide24.xml><?xml version="1.0" encoding="utf-8"?>
+<file path=ppt/slides/slide22.xml><?xml version="1.0" encoding="utf-8"?>
 <p:sld xmlns:a="http://schemas.openxmlformats.org/drawingml/2006/main" xmlns:r="http://schemas.openxmlformats.org/officeDocument/2006/relationships" xmlns:mc="http://schemas.openxmlformats.org/markup-compatibility/2006" xmlns:mv="urn:schemas-microsoft-com:mac:vml" xmlns:p="http://schemas.openxmlformats.org/presentationml/2006/main" xmlns:c="http://schemas.openxmlformats.org/drawingml/2006/chart" xmlns:dgm="http://schemas.openxmlformats.org/drawingml/2006/diagram" xmlns:o="urn:schemas-microsoft-com:office:office" xmlns:v="urn:schemas-microsoft-com:vml" xmlns:pvml="urn:schemas-microsoft-com:office:powerpoint" xmlns:com="http://schemas.openxmlformats.org/drawingml/2006/compatibility" xmlns:p14="http://schemas.microsoft.com/office/powerpoint/2010/main" xmlns:p15="http://schemas.microsoft.com/office/powerpoint/2012/main" xmlns:ahyp="http://schemas.microsoft.com/office/drawing/2018/hyperlinkcolor">
   <p:cSld>
     <p:spTree>
@@ -14161,7 +13490,7 @@
 </p:sld>
 </file>
 
-<file path=ppt/slides/slide25.xml><?xml version="1.0" encoding="utf-8"?>
+<file path=ppt/slides/slide23.xml><?xml version="1.0" encoding="utf-8"?>
 <p:sld xmlns:a="http://schemas.openxmlformats.org/drawingml/2006/main" xmlns:r="http://schemas.openxmlformats.org/officeDocument/2006/relationships" xmlns:mc="http://schemas.openxmlformats.org/markup-compatibility/2006" xmlns:mv="urn:schemas-microsoft-com:mac:vml" xmlns:p="http://schemas.openxmlformats.org/presentationml/2006/main" xmlns:c="http://schemas.openxmlformats.org/drawingml/2006/chart" xmlns:dgm="http://schemas.openxmlformats.org/drawingml/2006/diagram" xmlns:o="urn:schemas-microsoft-com:office:office" xmlns:v="urn:schemas-microsoft-com:vml" xmlns:pvml="urn:schemas-microsoft-com:office:powerpoint" xmlns:com="http://schemas.openxmlformats.org/drawingml/2006/compatibility" xmlns:p14="http://schemas.microsoft.com/office/powerpoint/2010/main" xmlns:p15="http://schemas.microsoft.com/office/powerpoint/2012/main" xmlns:ahyp="http://schemas.microsoft.com/office/drawing/2018/hyperlinkcolor">
   <p:cSld>
     <p:spTree>
@@ -15549,7 +14878,7 @@
 </p:sld>
 </file>
 
-<file path=ppt/slides/slide26.xml><?xml version="1.0" encoding="utf-8"?>
+<file path=ppt/slides/slide24.xml><?xml version="1.0" encoding="utf-8"?>
 <p:sld xmlns:a="http://schemas.openxmlformats.org/drawingml/2006/main" xmlns:p="http://schemas.openxmlformats.org/presentationml/2006/main" xmlns:r="http://schemas.openxmlformats.org/officeDocument/2006/relationships">
   <p:cSld>
     <p:spTree>
@@ -15585,6 +14914,80 @@
             </a:pPr>
             <a:r>
               <a:rPr lang="en"/>
+              <a:t>Event Queue</a:t>
+            </a:r>
+            <a:endParaRPr/>
+          </a:p>
+        </p:txBody>
+      </p:sp>
+      <p:pic>
+        <p:nvPicPr>
+          <p:cNvPr id="3" name="Picture 2" descr="event-queue.png"/>
+          <p:cNvPicPr>
+            <a:picLocks noChangeAspect="1"/>
+          </p:cNvPicPr>
+          <p:nvPr/>
+        </p:nvPicPr>
+        <p:blipFill>
+          <a:blip r:embed="rId2"/>
+          <a:stretch>
+            <a:fillRect/>
+          </a:stretch>
+        </p:blipFill>
+        <p:spPr>
+          <a:xfrm>
+            <a:off x="320039" y="1051560"/>
+            <a:ext cx="8503920" cy="3897630"/>
+          </a:xfrm>
+          <a:prstGeom prst="rect">
+            <a:avLst/>
+          </a:prstGeom>
+        </p:spPr>
+      </p:pic>
+    </p:spTree>
+  </p:cSld>
+  <p:clrMapOvr>
+    <a:masterClrMapping/>
+  </p:clrMapOvr>
+</p:sld>
+</file>
+
+<file path=ppt/slides/slide25.xml><?xml version="1.0" encoding="utf-8"?>
+<p:sld xmlns:a="http://schemas.openxmlformats.org/drawingml/2006/main" xmlns:p="http://schemas.openxmlformats.org/presentationml/2006/main" xmlns:r="http://schemas.openxmlformats.org/officeDocument/2006/relationships">
+  <p:cSld>
+    <p:spTree>
+      <p:nvGrpSpPr>
+        <p:cNvPr id="1" name=""/>
+        <p:cNvGrpSpPr/>
+        <p:nvPr/>
+      </p:nvGrpSpPr>
+      <p:grpSpPr/>
+      <p:sp>
+        <p:nvSpPr>
+          <p:cNvPr id="2" name="Title 1"/>
+          <p:cNvSpPr>
+            <a:spLocks noGrp="1"/>
+          </p:cNvSpPr>
+          <p:nvPr>
+            <p:ph type="title"/>
+          </p:nvPr>
+        </p:nvSpPr>
+        <p:spPr/>
+        <p:txBody>
+          <a:bodyPr/>
+          <a:lstStyle/>
+          <a:p>
+            <a:pPr indent="0" lvl="0" marL="0" rtl="0" algn="l">
+              <a:spcBef>
+                <a:spcPts val="0"/>
+              </a:spcBef>
+              <a:spcAft>
+                <a:spcPts val="0"/>
+              </a:spcAft>
+              <a:buNone/>
+            </a:pPr>
+            <a:r>
+              <a:rPr lang="en"/>
               <a:t>Try It: A Second Listener</a:t>
             </a:r>
             <a:endParaRPr/>
@@ -15671,7 +15074,7 @@
 </p:sld>
 </file>
 
-<file path=ppt/slides/slide27.xml><?xml version="1.0" encoding="utf-8"?>
+<file path=ppt/slides/slide26.xml><?xml version="1.0" encoding="utf-8"?>
 <p:sld xmlns:a="http://schemas.openxmlformats.org/drawingml/2006/main" xmlns:r="http://schemas.openxmlformats.org/officeDocument/2006/relationships" xmlns:mc="http://schemas.openxmlformats.org/markup-compatibility/2006" xmlns:mv="urn:schemas-microsoft-com:mac:vml" xmlns:p="http://schemas.openxmlformats.org/presentationml/2006/main" xmlns:c="http://schemas.openxmlformats.org/drawingml/2006/chart" xmlns:dgm="http://schemas.openxmlformats.org/drawingml/2006/diagram" xmlns:o="urn:schemas-microsoft-com:office:office" xmlns:v="urn:schemas-microsoft-com:vml" xmlns:pvml="urn:schemas-microsoft-com:office:powerpoint" xmlns:com="http://schemas.openxmlformats.org/drawingml/2006/compatibility" xmlns:p14="http://schemas.microsoft.com/office/powerpoint/2010/main" xmlns:p15="http://schemas.microsoft.com/office/powerpoint/2012/main" xmlns:ahyp="http://schemas.microsoft.com/office/drawing/2018/hyperlinkcolor">
   <p:cSld>
     <p:spTree>
@@ -16307,7 +15710,7 @@
 </p:sld>
 </file>
 
-<file path=ppt/slides/slide28.xml><?xml version="1.0" encoding="utf-8"?>
+<file path=ppt/slides/slide27.xml><?xml version="1.0" encoding="utf-8"?>
 <p:sld xmlns:a="http://schemas.openxmlformats.org/drawingml/2006/main" xmlns:r="http://schemas.openxmlformats.org/officeDocument/2006/relationships" xmlns:mc="http://schemas.openxmlformats.org/markup-compatibility/2006" xmlns:mv="urn:schemas-microsoft-com:mac:vml" xmlns:p="http://schemas.openxmlformats.org/presentationml/2006/main" xmlns:c="http://schemas.openxmlformats.org/drawingml/2006/chart" xmlns:dgm="http://schemas.openxmlformats.org/drawingml/2006/diagram" xmlns:o="urn:schemas-microsoft-com:office:office" xmlns:v="urn:schemas-microsoft-com:vml" xmlns:pvml="urn:schemas-microsoft-com:office:powerpoint" xmlns:com="http://schemas.openxmlformats.org/drawingml/2006/compatibility" xmlns:p14="http://schemas.microsoft.com/office/powerpoint/2010/main" xmlns:p15="http://schemas.microsoft.com/office/powerpoint/2012/main" xmlns:ahyp="http://schemas.microsoft.com/office/drawing/2018/hyperlinkcolor">
   <p:cSld>
     <p:spTree>
@@ -16396,7 +15799,7 @@
 </p:sld>
 </file>
 
-<file path=ppt/slides/slide29.xml><?xml version="1.0" encoding="utf-8"?>
+<file path=ppt/slides/slide28.xml><?xml version="1.0" encoding="utf-8"?>
 <p:sld xmlns:a="http://schemas.openxmlformats.org/drawingml/2006/main" xmlns:r="http://schemas.openxmlformats.org/officeDocument/2006/relationships" xmlns:mc="http://schemas.openxmlformats.org/markup-compatibility/2006" xmlns:mv="urn:schemas-microsoft-com:mac:vml" xmlns:p="http://schemas.openxmlformats.org/presentationml/2006/main" xmlns:c="http://schemas.openxmlformats.org/drawingml/2006/chart" xmlns:dgm="http://schemas.openxmlformats.org/drawingml/2006/diagram" xmlns:o="urn:schemas-microsoft-com:office:office" xmlns:v="urn:schemas-microsoft-com:vml" xmlns:pvml="urn:schemas-microsoft-com:office:powerpoint" xmlns:com="http://schemas.openxmlformats.org/drawingml/2006/compatibility" xmlns:p14="http://schemas.microsoft.com/office/powerpoint/2010/main" xmlns:p15="http://schemas.microsoft.com/office/powerpoint/2012/main" xmlns:ahyp="http://schemas.microsoft.com/office/drawing/2018/hyperlinkcolor">
   <p:cSld>
     <p:spTree>
@@ -18071,96 +17474,7 @@
 </p:sld>
 </file>
 
-<file path=ppt/slides/slide3.xml><?xml version="1.0" encoding="utf-8"?>
-<p:sld xmlns:a="http://schemas.openxmlformats.org/drawingml/2006/main" xmlns:r="http://schemas.openxmlformats.org/officeDocument/2006/relationships" xmlns:mc="http://schemas.openxmlformats.org/markup-compatibility/2006" xmlns:mv="urn:schemas-microsoft-com:mac:vml" xmlns:p="http://schemas.openxmlformats.org/presentationml/2006/main" xmlns:c="http://schemas.openxmlformats.org/drawingml/2006/chart" xmlns:dgm="http://schemas.openxmlformats.org/drawingml/2006/diagram" xmlns:o="urn:schemas-microsoft-com:office:office" xmlns:v="urn:schemas-microsoft-com:vml" xmlns:pvml="urn:schemas-microsoft-com:office:powerpoint" xmlns:com="http://schemas.openxmlformats.org/drawingml/2006/compatibility" xmlns:p14="http://schemas.microsoft.com/office/powerpoint/2010/main" xmlns:p15="http://schemas.microsoft.com/office/powerpoint/2012/main" xmlns:ahyp="http://schemas.microsoft.com/office/drawing/2018/hyperlinkcolor">
-  <p:cSld>
-    <p:spTree>
-      <p:nvGrpSpPr>
-        <p:cNvPr id="50" name="Shape 50"/>
-        <p:cNvGrpSpPr/>
-        <p:nvPr/>
-      </p:nvGrpSpPr>
-      <p:grpSpPr>
-        <a:xfrm>
-          <a:off x="0" y="0"/>
-          <a:ext cx="0" cy="0"/>
-          <a:chOff x="0" y="0"/>
-          <a:chExt cx="0" cy="0"/>
-        </a:xfrm>
-      </p:grpSpPr>
-      <p:sp>
-        <p:nvSpPr>
-          <p:cNvPr id="51" name="Google Shape;51;p11"/>
-          <p:cNvSpPr txBox="1"/>
-          <p:nvPr>
-            <p:ph type="title"/>
-          </p:nvPr>
-        </p:nvSpPr>
-        <p:spPr>
-          <a:xfrm>
-            <a:off x="311700" y="195615"/>
-            <a:ext cx="8520600" cy="572700"/>
-          </a:xfrm>
-          <a:prstGeom prst="rect">
-            <a:avLst/>
-          </a:prstGeom>
-        </p:spPr>
-        <p:txBody>
-          <a:bodyPr anchorCtr="0" anchor="t" bIns="91425" lIns="91425" spcFirstLastPara="1" rIns="91425" wrap="square" tIns="91425">
-            <a:normAutofit fontScale="90000"/>
-          </a:bodyPr>
-          <a:lstStyle/>
-          <a:p>
-            <a:pPr indent="0" lvl="0" marL="0" rtl="0" algn="l">
-              <a:spcBef>
-                <a:spcPts val="0"/>
-              </a:spcBef>
-              <a:spcAft>
-                <a:spcPts val="0"/>
-              </a:spcAft>
-              <a:buNone/>
-            </a:pPr>
-            <a:r>
-              <a:rPr lang="en"/>
-              <a:t>Today’s Goal</a:t>
-            </a:r>
-            <a:endParaRPr/>
-          </a:p>
-        </p:txBody>
-      </p:sp>
-      <p:pic>
-        <p:nvPicPr>
-          <p:cNvPr id="52" name="Picture 52" descr="the-legend-of-zelda.gif"/>
-          <p:cNvPicPr>
-            <a:picLocks noChangeAspect="1"/>
-          </p:cNvPicPr>
-          <p:nvPr/>
-        </p:nvPicPr>
-        <p:blipFill>
-          <a:blip r:embed="rId4"/>
-          <a:stretch>
-            <a:fillRect/>
-          </a:stretch>
-        </p:blipFill>
-        <p:spPr>
-          <a:xfrm>
-            <a:off x="1412779" y="1203675"/>
-            <a:ext cx="6318440" cy="3554123"/>
-          </a:xfrm>
-          <a:prstGeom prst="rect">
-            <a:avLst/>
-          </a:prstGeom>
-        </p:spPr>
-      </p:pic>
-    </p:spTree>
-  </p:cSld>
-  <p:clrMapOvr>
-    <a:masterClrMapping/>
-  </p:clrMapOvr>
-</p:sld>
-</file>
-
-<file path=ppt/slides/slide30.xml><?xml version="1.0" encoding="utf-8"?>
+<file path=ppt/slides/slide29.xml><?xml version="1.0" encoding="utf-8"?>
 <p:sld xmlns:a="http://schemas.openxmlformats.org/drawingml/2006/main" xmlns:r="http://schemas.openxmlformats.org/officeDocument/2006/relationships" xmlns:mc="http://schemas.openxmlformats.org/markup-compatibility/2006" xmlns:mv="urn:schemas-microsoft-com:mac:vml" xmlns:p="http://schemas.openxmlformats.org/presentationml/2006/main" xmlns:c="http://schemas.openxmlformats.org/drawingml/2006/chart" xmlns:dgm="http://schemas.openxmlformats.org/drawingml/2006/diagram" xmlns:o="urn:schemas-microsoft-com:office:office" xmlns:v="urn:schemas-microsoft-com:vml" xmlns:pvml="urn:schemas-microsoft-com:office:powerpoint" xmlns:com="http://schemas.openxmlformats.org/drawingml/2006/compatibility" xmlns:p14="http://schemas.microsoft.com/office/powerpoint/2010/main" xmlns:p15="http://schemas.microsoft.com/office/powerpoint/2012/main" xmlns:ahyp="http://schemas.microsoft.com/office/drawing/2018/hyperlinkcolor">
   <p:cSld>
     <p:spTree>
@@ -19076,7 +18390,96 @@
 </p:sld>
 </file>
 
-<file path=ppt/slides/slide31.xml><?xml version="1.0" encoding="utf-8"?>
+<file path=ppt/slides/slide3.xml><?xml version="1.0" encoding="utf-8"?>
+<p:sld xmlns:a="http://schemas.openxmlformats.org/drawingml/2006/main" xmlns:r="http://schemas.openxmlformats.org/officeDocument/2006/relationships" xmlns:mc="http://schemas.openxmlformats.org/markup-compatibility/2006" xmlns:mv="urn:schemas-microsoft-com:mac:vml" xmlns:p="http://schemas.openxmlformats.org/presentationml/2006/main" xmlns:c="http://schemas.openxmlformats.org/drawingml/2006/chart" xmlns:dgm="http://schemas.openxmlformats.org/drawingml/2006/diagram" xmlns:o="urn:schemas-microsoft-com:office:office" xmlns:v="urn:schemas-microsoft-com:vml" xmlns:pvml="urn:schemas-microsoft-com:office:powerpoint" xmlns:com="http://schemas.openxmlformats.org/drawingml/2006/compatibility" xmlns:p14="http://schemas.microsoft.com/office/powerpoint/2010/main" xmlns:p15="http://schemas.microsoft.com/office/powerpoint/2012/main" xmlns:ahyp="http://schemas.microsoft.com/office/drawing/2018/hyperlinkcolor">
+  <p:cSld>
+    <p:spTree>
+      <p:nvGrpSpPr>
+        <p:cNvPr id="50" name="Shape 50"/>
+        <p:cNvGrpSpPr/>
+        <p:nvPr/>
+      </p:nvGrpSpPr>
+      <p:grpSpPr>
+        <a:xfrm>
+          <a:off x="0" y="0"/>
+          <a:ext cx="0" cy="0"/>
+          <a:chOff x="0" y="0"/>
+          <a:chExt cx="0" cy="0"/>
+        </a:xfrm>
+      </p:grpSpPr>
+      <p:sp>
+        <p:nvSpPr>
+          <p:cNvPr id="51" name="Google Shape;51;p11"/>
+          <p:cNvSpPr txBox="1"/>
+          <p:nvPr>
+            <p:ph type="title"/>
+          </p:nvPr>
+        </p:nvSpPr>
+        <p:spPr>
+          <a:xfrm>
+            <a:off x="311700" y="195615"/>
+            <a:ext cx="8520600" cy="572700"/>
+          </a:xfrm>
+          <a:prstGeom prst="rect">
+            <a:avLst/>
+          </a:prstGeom>
+        </p:spPr>
+        <p:txBody>
+          <a:bodyPr anchorCtr="0" anchor="t" bIns="91425" lIns="91425" spcFirstLastPara="1" rIns="91425" wrap="square" tIns="91425">
+            <a:normAutofit fontScale="90000"/>
+          </a:bodyPr>
+          <a:lstStyle/>
+          <a:p>
+            <a:pPr indent="0" lvl="0" marL="0" rtl="0" algn="l">
+              <a:spcBef>
+                <a:spcPts val="0"/>
+              </a:spcBef>
+              <a:spcAft>
+                <a:spcPts val="0"/>
+              </a:spcAft>
+              <a:buNone/>
+            </a:pPr>
+            <a:r>
+              <a:rPr lang="en"/>
+              <a:t>Today’s Goal</a:t>
+            </a:r>
+            <a:endParaRPr/>
+          </a:p>
+        </p:txBody>
+      </p:sp>
+      <p:pic>
+        <p:nvPicPr>
+          <p:cNvPr id="52" name="Picture 52" descr="the-legend-of-zelda.gif"/>
+          <p:cNvPicPr>
+            <a:picLocks noChangeAspect="1"/>
+          </p:cNvPicPr>
+          <p:nvPr/>
+        </p:nvPicPr>
+        <p:blipFill>
+          <a:blip r:embed="rId4"/>
+          <a:stretch>
+            <a:fillRect/>
+          </a:stretch>
+        </p:blipFill>
+        <p:spPr>
+          <a:xfrm>
+            <a:off x="1412779" y="1203675"/>
+            <a:ext cx="6318440" cy="3554123"/>
+          </a:xfrm>
+          <a:prstGeom prst="rect">
+            <a:avLst/>
+          </a:prstGeom>
+        </p:spPr>
+      </p:pic>
+    </p:spTree>
+  </p:cSld>
+  <p:clrMapOvr>
+    <a:masterClrMapping/>
+  </p:clrMapOvr>
+</p:sld>
+</file>
+
+<file path=ppt/slides/slide30.xml><?xml version="1.0" encoding="utf-8"?>
 <p:sld xmlns:a="http://schemas.openxmlformats.org/drawingml/2006/main" xmlns:r="http://schemas.openxmlformats.org/officeDocument/2006/relationships" xmlns:mc="http://schemas.openxmlformats.org/markup-compatibility/2006" xmlns:mv="urn:schemas-microsoft-com:mac:vml" xmlns:p="http://schemas.openxmlformats.org/presentationml/2006/main" xmlns:c="http://schemas.openxmlformats.org/drawingml/2006/chart" xmlns:dgm="http://schemas.openxmlformats.org/drawingml/2006/diagram" xmlns:o="urn:schemas-microsoft-com:office:office" xmlns:v="urn:schemas-microsoft-com:vml" xmlns:pvml="urn:schemas-microsoft-com:office:powerpoint" xmlns:com="http://schemas.openxmlformats.org/drawingml/2006/compatibility" xmlns:p14="http://schemas.microsoft.com/office/powerpoint/2010/main" xmlns:p15="http://schemas.microsoft.com/office/powerpoint/2012/main" xmlns:ahyp="http://schemas.microsoft.com/office/drawing/2018/hyperlinkcolor">
   <p:cSld>
     <p:spTree>
@@ -20080,7 +19483,7 @@
 </p:sld>
 </file>
 
-<file path=ppt/slides/slide32.xml><?xml version="1.0" encoding="utf-8"?>
+<file path=ppt/slides/slide31.xml><?xml version="1.0" encoding="utf-8"?>
 <p:sld xmlns:a="http://schemas.openxmlformats.org/drawingml/2006/main" xmlns:p="http://schemas.openxmlformats.org/presentationml/2006/main" xmlns:r="http://schemas.openxmlformats.org/officeDocument/2006/relationships">
   <p:cSld>
     <p:spTree>
@@ -20775,7 +20178,7 @@
 </p:sld>
 </file>
 
-<file path=ppt/slides/slide33.xml><?xml version="1.0" encoding="utf-8"?>
+<file path=ppt/slides/slide32.xml><?xml version="1.0" encoding="utf-8"?>
 <p:sld xmlns:a="http://schemas.openxmlformats.org/drawingml/2006/main" xmlns:p="http://schemas.openxmlformats.org/presentationml/2006/main" xmlns:r="http://schemas.openxmlformats.org/officeDocument/2006/relationships">
   <p:cSld>
     <p:spTree>
@@ -20914,7 +20317,7 @@
 </p:sld>
 </file>
 
-<file path=ppt/slides/slide34.xml><?xml version="1.0" encoding="utf-8"?>
+<file path=ppt/slides/slide33.xml><?xml version="1.0" encoding="utf-8"?>
 <p:sld xmlns:a="http://schemas.openxmlformats.org/drawingml/2006/main" xmlns:r="http://schemas.openxmlformats.org/officeDocument/2006/relationships" xmlns:mc="http://schemas.openxmlformats.org/markup-compatibility/2006" xmlns:mv="urn:schemas-microsoft-com:mac:vml" xmlns:p="http://schemas.openxmlformats.org/presentationml/2006/main" xmlns:c="http://schemas.openxmlformats.org/drawingml/2006/chart" xmlns:dgm="http://schemas.openxmlformats.org/drawingml/2006/diagram" xmlns:o="urn:schemas-microsoft-com:office:office" xmlns:v="urn:schemas-microsoft-com:vml" xmlns:pvml="urn:schemas-microsoft-com:office:powerpoint" xmlns:com="http://schemas.openxmlformats.org/drawingml/2006/compatibility" xmlns:p14="http://schemas.microsoft.com/office/powerpoint/2010/main" xmlns:p15="http://schemas.microsoft.com/office/powerpoint/2012/main" xmlns:ahyp="http://schemas.microsoft.com/office/drawing/2018/hyperlinkcolor">
   <p:cSld>
     <p:spTree>
@@ -21044,7 +20447,7 @@
 </p:sld>
 </file>
 
-<file path=ppt/slides/slide35.xml><?xml version="1.0" encoding="utf-8"?>
+<file path=ppt/slides/slide34.xml><?xml version="1.0" encoding="utf-8"?>
 <p:sld xmlns:a="http://schemas.openxmlformats.org/drawingml/2006/main" xmlns:r="http://schemas.openxmlformats.org/officeDocument/2006/relationships" xmlns:mc="http://schemas.openxmlformats.org/markup-compatibility/2006" xmlns:mv="urn:schemas-microsoft-com:mac:vml" xmlns:p="http://schemas.openxmlformats.org/presentationml/2006/main" xmlns:c="http://schemas.openxmlformats.org/drawingml/2006/chart" xmlns:dgm="http://schemas.openxmlformats.org/drawingml/2006/diagram" xmlns:o="urn:schemas-microsoft-com:office:office" xmlns:v="urn:schemas-microsoft-com:vml" xmlns:pvml="urn:schemas-microsoft-com:office:powerpoint" xmlns:com="http://schemas.openxmlformats.org/drawingml/2006/compatibility" xmlns:p14="http://schemas.microsoft.com/office/powerpoint/2010/main" xmlns:p15="http://schemas.microsoft.com/office/powerpoint/2012/main" xmlns:ahyp="http://schemas.microsoft.com/office/drawing/2018/hyperlinkcolor">
   <p:cSld>
     <p:spTree>
@@ -21838,7 +21241,7 @@
 </p:sld>
 </file>
 
-<file path=ppt/slides/slide36.xml><?xml version="1.0" encoding="utf-8"?>
+<file path=ppt/slides/slide35.xml><?xml version="1.0" encoding="utf-8"?>
 <p:sld xmlns:a="http://schemas.openxmlformats.org/drawingml/2006/main" xmlns:p="http://schemas.openxmlformats.org/presentationml/2006/main" xmlns:r="http://schemas.openxmlformats.org/officeDocument/2006/relationships">
   <p:cSld>
     <p:spTree>
@@ -22449,7 +21852,7 @@
 </p:sld>
 </file>
 
-<file path=ppt/slides/slide37.xml><?xml version="1.0" encoding="utf-8"?>
+<file path=ppt/slides/slide36.xml><?xml version="1.0" encoding="utf-8"?>
 <p:sld xmlns:a="http://schemas.openxmlformats.org/drawingml/2006/main" xmlns:p="http://schemas.openxmlformats.org/presentationml/2006/main" xmlns:r="http://schemas.openxmlformats.org/officeDocument/2006/relationships">
   <p:cSld>
     <p:spTree>
@@ -22818,7 +22221,7 @@
 </p:sld>
 </file>
 
-<file path=ppt/slides/slide38.xml><?xml version="1.0" encoding="utf-8"?>
+<file path=ppt/slides/slide37.xml><?xml version="1.0" encoding="utf-8"?>
 <p:sld xmlns:a="http://schemas.openxmlformats.org/drawingml/2006/main" xmlns:r="http://schemas.openxmlformats.org/officeDocument/2006/relationships" xmlns:mc="http://schemas.openxmlformats.org/markup-compatibility/2006" xmlns:mv="urn:schemas-microsoft-com:mac:vml" xmlns:p="http://schemas.openxmlformats.org/presentationml/2006/main" xmlns:c="http://schemas.openxmlformats.org/drawingml/2006/chart" xmlns:dgm="http://schemas.openxmlformats.org/drawingml/2006/diagram" xmlns:o="urn:schemas-microsoft-com:office:office" xmlns:v="urn:schemas-microsoft-com:vml" xmlns:pvml="urn:schemas-microsoft-com:office:powerpoint" xmlns:com="http://schemas.openxmlformats.org/drawingml/2006/compatibility" xmlns:p14="http://schemas.microsoft.com/office/powerpoint/2010/main" xmlns:p15="http://schemas.microsoft.com/office/powerpoint/2012/main" xmlns:ahyp="http://schemas.microsoft.com/office/drawing/2018/hyperlinkcolor">
   <p:cSld>
     <p:spTree>
@@ -23405,7 +22808,7 @@
 </p:sld>
 </file>
 
-<file path=ppt/slides/slide39.xml><?xml version="1.0" encoding="utf-8"?>
+<file path=ppt/slides/slide38.xml><?xml version="1.0" encoding="utf-8"?>
 <p:sld xmlns:a="http://schemas.openxmlformats.org/drawingml/2006/main" xmlns:p="http://schemas.openxmlformats.org/presentationml/2006/main" xmlns:r="http://schemas.openxmlformats.org/officeDocument/2006/relationships">
   <p:cSld>
     <p:spTree>
@@ -23552,6 +22955,179 @@
               <a:t>E.g. a shooting behaviour that any enemy can be given</a:t>
             </a:r>
             <a:endParaRPr/>
+          </a:p>
+        </p:txBody>
+      </p:sp>
+    </p:spTree>
+  </p:cSld>
+  <p:clrMapOvr>
+    <a:masterClrMapping/>
+  </p:clrMapOvr>
+</p:sld>
+</file>
+
+<file path=ppt/slides/slide39.xml><?xml version="1.0" encoding="utf-8"?>
+<p:sld xmlns:a="http://schemas.openxmlformats.org/drawingml/2006/main" xmlns:p="http://schemas.openxmlformats.org/presentationml/2006/main" xmlns:r="http://schemas.openxmlformats.org/officeDocument/2006/relationships">
+  <p:cSld>
+    <p:spTree>
+      <p:nvGrpSpPr>
+        <p:cNvPr id="1" name=""/>
+        <p:cNvGrpSpPr/>
+        <p:nvPr/>
+      </p:nvGrpSpPr>
+      <p:grpSpPr/>
+      <p:sp>
+        <p:nvSpPr>
+          <p:cNvPr id="2" name="Title 1"/>
+          <p:cNvSpPr>
+            <a:spLocks noGrp="1"/>
+          </p:cNvSpPr>
+          <p:nvPr>
+            <p:ph type="title"/>
+          </p:nvPr>
+        </p:nvSpPr>
+        <p:spPr/>
+        <p:txBody>
+          <a:bodyPr/>
+          <a:lstStyle/>
+          <a:p>
+            <a:pPr indent="0" lvl="0" marL="0" rtl="0" algn="l">
+              <a:spcBef>
+                <a:spcPts val="0"/>
+              </a:spcBef>
+              <a:spcAft>
+                <a:spcPts val="0"/>
+              </a:spcAft>
+              <a:buNone/>
+            </a:pPr>
+            <a:r>
+              <a:rPr lang="en"/>
+              <a:t>Check Yourself</a:t>
+            </a:r>
+            <a:endParaRPr/>
+          </a:p>
+        </p:txBody>
+      </p:sp>
+      <p:sp>
+        <p:nvSpPr>
+          <p:cNvPr id="3" name="Text Placeholder 2"/>
+          <p:cNvSpPr>
+            <a:spLocks noGrp="1"/>
+          </p:cNvSpPr>
+          <p:nvPr>
+            <p:ph type="body" idx="1"/>
+          </p:nvPr>
+        </p:nvSpPr>
+        <p:spPr>
+          <a:xfrm>
+            <a:off x="311700" y="885950"/>
+            <a:ext cx="8520600" cy="1719072"/>
+          </a:xfrm>
+        </p:spPr>
+        <p:txBody>
+          <a:bodyPr/>
+          <a:lstStyle/>
+          <a:p>
+            <a:pPr indent="-330200" lvl="0" marL="457200" rtl="0" algn="l">
+              <a:spcBef>
+                <a:spcPts val="0"/>
+              </a:spcBef>
+              <a:spcAft>
+                <a:spcPts val="0"/>
+              </a:spcAft>
+              <a:buSzPts val="1600"/>
+              <a:buChar char="●"/>
+            </a:pPr>
+            <a:r>
+              <a:rPr lang="en"/>
+              <a:t>When does inheritance fit, and when is composition better?</a:t>
+            </a:r>
+            <a:endParaRPr/>
+          </a:p>
+          <a:p>
+            <a:pPr indent="-330200" lvl="0" marL="457200" rtl="0" algn="l">
+              <a:spcBef>
+                <a:spcPts val="0"/>
+              </a:spcBef>
+              <a:spcAft>
+                <a:spcPts val="0"/>
+              </a:spcAft>
+              <a:buSzPts val="1600"/>
+              <a:buChar char="●"/>
+            </a:pPr>
+            <a:r>
+              <a:rPr lang="en"/>
+              <a:t>Why does Observer suit UI code particularly well?</a:t>
+            </a:r>
+            <a:endParaRPr/>
+          </a:p>
+          <a:p>
+            <a:pPr indent="-330200" lvl="0" marL="457200" rtl="0" algn="l">
+              <a:spcBef>
+                <a:spcPts val="0"/>
+              </a:spcBef>
+              <a:spcAft>
+                <a:spcPts val="0"/>
+              </a:spcAft>
+              <a:buSzPts val="1600"/>
+              <a:buChar char="●"/>
+            </a:pPr>
+            <a:r>
+              <a:rPr lang="en"/>
+              <a:t>What is the difference between a delegate and an event in C#?</a:t>
+            </a:r>
+            <a:endParaRPr/>
+          </a:p>
+          <a:p>
+            <a:pPr indent="-330200" lvl="0" marL="457200" rtl="0" algn="l">
+              <a:spcBef>
+                <a:spcPts val="0"/>
+              </a:spcBef>
+              <a:spcAft>
+                <a:spcPts val="0"/>
+              </a:spcAft>
+              <a:buSzPts val="1600"/>
+              <a:buChar char="●"/>
+            </a:pPr>
+            <a:r>
+              <a:rPr lang="en"/>
+              <a:t>What is the cost of data-driven design?</a:t>
+            </a:r>
+            <a:endParaRPr/>
+          </a:p>
+        </p:txBody>
+      </p:sp>
+      <p:sp>
+        <p:nvSpPr>
+          <p:cNvPr id="4" name="TextBox 3"/>
+          <p:cNvSpPr txBox="1"/>
+          <p:nvPr/>
+        </p:nvSpPr>
+        <p:spPr>
+          <a:xfrm>
+            <a:off x="457200" y="3182112"/>
+            <a:ext cx="8229600" cy="457200"/>
+          </a:xfrm>
+          <a:prstGeom prst="rect">
+            <a:avLst/>
+          </a:prstGeom>
+          <a:noFill/>
+        </p:spPr>
+        <p:txBody>
+          <a:bodyPr wrap="square">
+            <a:spAutoFit/>
+          </a:bodyPr>
+          <a:lstStyle/>
+          <a:p>
+            <a:pPr algn="ctr"/>
+            <a:r>
+              <a:rPr sz="1400" b="0" i="0">
+                <a:solidFill>
+                  <a:srgbClr val="9AA3AB"/>
+                </a:solidFill>
+              </a:rPr>
+              <a:t>The answers, and more questions, are on the course site.</a:t>
+            </a:r>
           </a:p>
         </p:txBody>
       </p:sp>
@@ -24096,179 +23672,6 @@
 </file>
 
 <file path=ppt/slides/slide40.xml><?xml version="1.0" encoding="utf-8"?>
-<p:sld xmlns:a="http://schemas.openxmlformats.org/drawingml/2006/main" xmlns:p="http://schemas.openxmlformats.org/presentationml/2006/main" xmlns:r="http://schemas.openxmlformats.org/officeDocument/2006/relationships">
-  <p:cSld>
-    <p:spTree>
-      <p:nvGrpSpPr>
-        <p:cNvPr id="1" name=""/>
-        <p:cNvGrpSpPr/>
-        <p:nvPr/>
-      </p:nvGrpSpPr>
-      <p:grpSpPr/>
-      <p:sp>
-        <p:nvSpPr>
-          <p:cNvPr id="2" name="Title 1"/>
-          <p:cNvSpPr>
-            <a:spLocks noGrp="1"/>
-          </p:cNvSpPr>
-          <p:nvPr>
-            <p:ph type="title"/>
-          </p:nvPr>
-        </p:nvSpPr>
-        <p:spPr/>
-        <p:txBody>
-          <a:bodyPr/>
-          <a:lstStyle/>
-          <a:p>
-            <a:pPr indent="0" lvl="0" marL="0" rtl="0" algn="l">
-              <a:spcBef>
-                <a:spcPts val="0"/>
-              </a:spcBef>
-              <a:spcAft>
-                <a:spcPts val="0"/>
-              </a:spcAft>
-              <a:buNone/>
-            </a:pPr>
-            <a:r>
-              <a:rPr lang="en"/>
-              <a:t>Check Yourself</a:t>
-            </a:r>
-            <a:endParaRPr/>
-          </a:p>
-        </p:txBody>
-      </p:sp>
-      <p:sp>
-        <p:nvSpPr>
-          <p:cNvPr id="3" name="Text Placeholder 2"/>
-          <p:cNvSpPr>
-            <a:spLocks noGrp="1"/>
-          </p:cNvSpPr>
-          <p:nvPr>
-            <p:ph type="body" idx="1"/>
-          </p:nvPr>
-        </p:nvSpPr>
-        <p:spPr>
-          <a:xfrm>
-            <a:off x="311700" y="885950"/>
-            <a:ext cx="8520600" cy="1719072"/>
-          </a:xfrm>
-        </p:spPr>
-        <p:txBody>
-          <a:bodyPr/>
-          <a:lstStyle/>
-          <a:p>
-            <a:pPr indent="-330200" lvl="0" marL="457200" rtl="0" algn="l">
-              <a:spcBef>
-                <a:spcPts val="0"/>
-              </a:spcBef>
-              <a:spcAft>
-                <a:spcPts val="0"/>
-              </a:spcAft>
-              <a:buSzPts val="1600"/>
-              <a:buChar char="●"/>
-            </a:pPr>
-            <a:r>
-              <a:rPr lang="en"/>
-              <a:t>When does inheritance fit, and when is composition better?</a:t>
-            </a:r>
-            <a:endParaRPr/>
-          </a:p>
-          <a:p>
-            <a:pPr indent="-330200" lvl="0" marL="457200" rtl="0" algn="l">
-              <a:spcBef>
-                <a:spcPts val="0"/>
-              </a:spcBef>
-              <a:spcAft>
-                <a:spcPts val="0"/>
-              </a:spcAft>
-              <a:buSzPts val="1600"/>
-              <a:buChar char="●"/>
-            </a:pPr>
-            <a:r>
-              <a:rPr lang="en"/>
-              <a:t>Why does Observer suit UI code particularly well?</a:t>
-            </a:r>
-            <a:endParaRPr/>
-          </a:p>
-          <a:p>
-            <a:pPr indent="-330200" lvl="0" marL="457200" rtl="0" algn="l">
-              <a:spcBef>
-                <a:spcPts val="0"/>
-              </a:spcBef>
-              <a:spcAft>
-                <a:spcPts val="0"/>
-              </a:spcAft>
-              <a:buSzPts val="1600"/>
-              <a:buChar char="●"/>
-            </a:pPr>
-            <a:r>
-              <a:rPr lang="en"/>
-              <a:t>What is the difference between a delegate and an event in C#?</a:t>
-            </a:r>
-            <a:endParaRPr/>
-          </a:p>
-          <a:p>
-            <a:pPr indent="-330200" lvl="0" marL="457200" rtl="0" algn="l">
-              <a:spcBef>
-                <a:spcPts val="0"/>
-              </a:spcBef>
-              <a:spcAft>
-                <a:spcPts val="0"/>
-              </a:spcAft>
-              <a:buSzPts val="1600"/>
-              <a:buChar char="●"/>
-            </a:pPr>
-            <a:r>
-              <a:rPr lang="en"/>
-              <a:t>What is the cost of data-driven design?</a:t>
-            </a:r>
-            <a:endParaRPr/>
-          </a:p>
-        </p:txBody>
-      </p:sp>
-      <p:sp>
-        <p:nvSpPr>
-          <p:cNvPr id="4" name="TextBox 3"/>
-          <p:cNvSpPr txBox="1"/>
-          <p:nvPr/>
-        </p:nvSpPr>
-        <p:spPr>
-          <a:xfrm>
-            <a:off x="457200" y="3182112"/>
-            <a:ext cx="8229600" cy="457200"/>
-          </a:xfrm>
-          <a:prstGeom prst="rect">
-            <a:avLst/>
-          </a:prstGeom>
-          <a:noFill/>
-        </p:spPr>
-        <p:txBody>
-          <a:bodyPr wrap="square">
-            <a:spAutoFit/>
-          </a:bodyPr>
-          <a:lstStyle/>
-          <a:p>
-            <a:pPr algn="ctr"/>
-            <a:r>
-              <a:rPr sz="1400" b="0" i="0">
-                <a:solidFill>
-                  <a:srgbClr val="9AA3AB"/>
-                </a:solidFill>
-              </a:rPr>
-              <a:t>The answers, and more questions, are on the course site.</a:t>
-            </a:r>
-          </a:p>
-        </p:txBody>
-      </p:sp>
-    </p:spTree>
-  </p:cSld>
-  <p:clrMapOvr>
-    <a:masterClrMapping/>
-  </p:clrMapOvr>
-</p:sld>
-</file>
-
-<file path=ppt/slides/slide41.xml><?xml version="1.0" encoding="utf-8"?>
 <p:sld xmlns:a="http://schemas.openxmlformats.org/drawingml/2006/main" xmlns:r="http://schemas.openxmlformats.org/officeDocument/2006/relationships" xmlns:mc="http://schemas.openxmlformats.org/markup-compatibility/2006" xmlns:mv="urn:schemas-microsoft-com:mac:vml" xmlns:p="http://schemas.openxmlformats.org/presentationml/2006/main" xmlns:c="http://schemas.openxmlformats.org/drawingml/2006/chart" xmlns:dgm="http://schemas.openxmlformats.org/drawingml/2006/diagram" xmlns:o="urn:schemas-microsoft-com:office:office" xmlns:v="urn:schemas-microsoft-com:vml" xmlns:pvml="urn:schemas-microsoft-com:office:powerpoint" xmlns:com="http://schemas.openxmlformats.org/drawingml/2006/compatibility" xmlns:p14="http://schemas.microsoft.com/office/powerpoint/2010/main" xmlns:p15="http://schemas.microsoft.com/office/powerpoint/2012/main" xmlns:ahyp="http://schemas.microsoft.com/office/drawing/2018/hyperlinkcolor">
   <p:cSld>
     <p:spTree>
@@ -24493,604 +23896,6 @@
           </a:p>
         </p:txBody>
       </p:sp>
-      <p:pic>
-        <p:nvPicPr>
-          <p:cNvPr id="251" name="Google Shape;251;p40"/>
-          <p:cNvPicPr preferRelativeResize="0"/>
-          <p:nvPr/>
-        </p:nvPicPr>
-        <p:blipFill>
-          <a:blip r:embed="rId3">
-            <a:alphaModFix/>
-          </a:blip>
-          <a:stretch>
-            <a:fillRect/>
-          </a:stretch>
-        </p:blipFill>
-        <p:spPr>
-          <a:xfrm>
-            <a:off x="3451113" y="3209325"/>
-            <a:ext cx="2241775" cy="1699924"/>
-          </a:xfrm>
-          <a:prstGeom prst="rect">
-            <a:avLst/>
-          </a:prstGeom>
-          <a:noFill/>
-          <a:ln>
-            <a:noFill/>
-          </a:ln>
-        </p:spPr>
-      </p:pic>
-    </p:spTree>
-  </p:cSld>
-  <p:clrMapOvr>
-    <a:masterClrMapping/>
-  </p:clrMapOvr>
-  <p:timing>
-    <p:tnLst>
-      <p:par>
-        <p:cTn dur="indefinite" nodeType="tmRoot" restart="never">
-          <p:childTnLst>
-            <p:seq concurrent="1" nextAc="seek">
-              <p:cTn dur="indefinite" id="2" nodeType="mainSeq">
-                <p:childTnLst>
-                  <p:par>
-                    <p:cTn fill="hold">
-                      <p:stCondLst>
-                        <p:cond delay="indefinite"/>
-                      </p:stCondLst>
-                      <p:childTnLst>
-                        <p:par>
-                          <p:cTn fill="hold">
-                            <p:stCondLst>
-                              <p:cond delay="0"/>
-                            </p:stCondLst>
-                            <p:childTnLst>
-                              <p:par>
-                                <p:cTn fill="hold" nodeType="clickEffect" presetClass="entr" presetID="1" presetSubtype="0">
-                                  <p:stCondLst>
-                                    <p:cond delay="0"/>
-                                  </p:stCondLst>
-                                  <p:childTnLst>
-                                    <p:set>
-                                      <p:cBhvr>
-                                        <p:cTn dur="1" fill="hold">
-                                          <p:stCondLst>
-                                            <p:cond delay="0"/>
-                                          </p:stCondLst>
-                                        </p:cTn>
-                                        <p:tgtEl>
-                                          <p:spTgt spid="250">
-                                            <p:txEl>
-                                              <p:pRg end="0" st="0"/>
-                                            </p:txEl>
-                                          </p:spTgt>
-                                        </p:tgtEl>
-                                        <p:attrNameLst>
-                                          <p:attrName>style.visibility</p:attrName>
-                                        </p:attrNameLst>
-                                      </p:cBhvr>
-                                      <p:to>
-                                        <p:strVal val="visible"/>
-                                      </p:to>
-                                    </p:set>
-                                  </p:childTnLst>
-                                </p:cTn>
-                              </p:par>
-                            </p:childTnLst>
-                          </p:cTn>
-                        </p:par>
-                      </p:childTnLst>
-                    </p:cTn>
-                  </p:par>
-                  <p:par>
-                    <p:cTn fill="hold">
-                      <p:stCondLst>
-                        <p:cond delay="indefinite"/>
-                      </p:stCondLst>
-                      <p:childTnLst>
-                        <p:par>
-                          <p:cTn fill="hold">
-                            <p:stCondLst>
-                              <p:cond delay="0"/>
-                            </p:stCondLst>
-                            <p:childTnLst>
-                              <p:par>
-                                <p:cTn fill="hold" nodeType="clickEffect" presetClass="entr" presetID="1" presetSubtype="0">
-                                  <p:stCondLst>
-                                    <p:cond delay="0"/>
-                                  </p:stCondLst>
-                                  <p:childTnLst>
-                                    <p:set>
-                                      <p:cBhvr>
-                                        <p:cTn dur="1" fill="hold">
-                                          <p:stCondLst>
-                                            <p:cond delay="0"/>
-                                          </p:stCondLst>
-                                        </p:cTn>
-                                        <p:tgtEl>
-                                          <p:spTgt spid="250">
-                                            <p:txEl>
-                                              <p:pRg end="1" st="1"/>
-                                            </p:txEl>
-                                          </p:spTgt>
-                                        </p:tgtEl>
-                                        <p:attrNameLst>
-                                          <p:attrName>style.visibility</p:attrName>
-                                        </p:attrNameLst>
-                                      </p:cBhvr>
-                                      <p:to>
-                                        <p:strVal val="visible"/>
-                                      </p:to>
-                                    </p:set>
-                                  </p:childTnLst>
-                                </p:cTn>
-                              </p:par>
-                            </p:childTnLst>
-                          </p:cTn>
-                        </p:par>
-                      </p:childTnLst>
-                    </p:cTn>
-                  </p:par>
-                  <p:par>
-                    <p:cTn fill="hold">
-                      <p:stCondLst>
-                        <p:cond delay="indefinite"/>
-                      </p:stCondLst>
-                      <p:childTnLst>
-                        <p:par>
-                          <p:cTn fill="hold">
-                            <p:stCondLst>
-                              <p:cond delay="0"/>
-                            </p:stCondLst>
-                            <p:childTnLst>
-                              <p:par>
-                                <p:cTn fill="hold" nodeType="clickEffect" presetClass="entr" presetID="1" presetSubtype="0">
-                                  <p:stCondLst>
-                                    <p:cond delay="0"/>
-                                  </p:stCondLst>
-                                  <p:childTnLst>
-                                    <p:set>
-                                      <p:cBhvr>
-                                        <p:cTn dur="1" fill="hold">
-                                          <p:stCondLst>
-                                            <p:cond delay="0"/>
-                                          </p:stCondLst>
-                                        </p:cTn>
-                                        <p:tgtEl>
-                                          <p:spTgt spid="250">
-                                            <p:txEl>
-                                              <p:pRg end="2" st="2"/>
-                                            </p:txEl>
-                                          </p:spTgt>
-                                        </p:tgtEl>
-                                        <p:attrNameLst>
-                                          <p:attrName>style.visibility</p:attrName>
-                                        </p:attrNameLst>
-                                      </p:cBhvr>
-                                      <p:to>
-                                        <p:strVal val="visible"/>
-                                      </p:to>
-                                    </p:set>
-                                  </p:childTnLst>
-                                </p:cTn>
-                              </p:par>
-                            </p:childTnLst>
-                          </p:cTn>
-                        </p:par>
-                      </p:childTnLst>
-                    </p:cTn>
-                  </p:par>
-                  <p:par>
-                    <p:cTn fill="hold">
-                      <p:stCondLst>
-                        <p:cond delay="indefinite"/>
-                      </p:stCondLst>
-                      <p:childTnLst>
-                        <p:par>
-                          <p:cTn fill="hold">
-                            <p:stCondLst>
-                              <p:cond delay="0"/>
-                            </p:stCondLst>
-                            <p:childTnLst>
-                              <p:par>
-                                <p:cTn fill="hold" nodeType="clickEffect" presetClass="entr" presetID="1" presetSubtype="0">
-                                  <p:stCondLst>
-                                    <p:cond delay="0"/>
-                                  </p:stCondLst>
-                                  <p:childTnLst>
-                                    <p:set>
-                                      <p:cBhvr>
-                                        <p:cTn dur="1" fill="hold">
-                                          <p:stCondLst>
-                                            <p:cond delay="0"/>
-                                          </p:stCondLst>
-                                        </p:cTn>
-                                        <p:tgtEl>
-                                          <p:spTgt spid="250">
-                                            <p:txEl>
-                                              <p:pRg end="3" st="3"/>
-                                            </p:txEl>
-                                          </p:spTgt>
-                                        </p:tgtEl>
-                                        <p:attrNameLst>
-                                          <p:attrName>style.visibility</p:attrName>
-                                        </p:attrNameLst>
-                                      </p:cBhvr>
-                                      <p:to>
-                                        <p:strVal val="visible"/>
-                                      </p:to>
-                                    </p:set>
-                                  </p:childTnLst>
-                                </p:cTn>
-                              </p:par>
-                            </p:childTnLst>
-                          </p:cTn>
-                        </p:par>
-                      </p:childTnLst>
-                    </p:cTn>
-                  </p:par>
-                  <p:par>
-                    <p:cTn fill="hold">
-                      <p:stCondLst>
-                        <p:cond delay="indefinite"/>
-                      </p:stCondLst>
-                      <p:childTnLst>
-                        <p:par>
-                          <p:cTn fill="hold">
-                            <p:stCondLst>
-                              <p:cond delay="0"/>
-                            </p:stCondLst>
-                            <p:childTnLst>
-                              <p:par>
-                                <p:cTn fill="hold" nodeType="clickEffect" presetClass="entr" presetID="1" presetSubtype="0">
-                                  <p:stCondLst>
-                                    <p:cond delay="0"/>
-                                  </p:stCondLst>
-                                  <p:childTnLst>
-                                    <p:set>
-                                      <p:cBhvr>
-                                        <p:cTn dur="1" fill="hold">
-                                          <p:stCondLst>
-                                            <p:cond delay="0"/>
-                                          </p:stCondLst>
-                                        </p:cTn>
-                                        <p:tgtEl>
-                                          <p:spTgt spid="250">
-                                            <p:txEl>
-                                              <p:pRg end="4" st="4"/>
-                                            </p:txEl>
-                                          </p:spTgt>
-                                        </p:tgtEl>
-                                        <p:attrNameLst>
-                                          <p:attrName>style.visibility</p:attrName>
-                                        </p:attrNameLst>
-                                      </p:cBhvr>
-                                      <p:to>
-                                        <p:strVal val="visible"/>
-                                      </p:to>
-                                    </p:set>
-                                  </p:childTnLst>
-                                </p:cTn>
-                              </p:par>
-                            </p:childTnLst>
-                          </p:cTn>
-                        </p:par>
-                      </p:childTnLst>
-                    </p:cTn>
-                  </p:par>
-                  <p:par>
-                    <p:cTn fill="hold">
-                      <p:stCondLst>
-                        <p:cond delay="indefinite"/>
-                      </p:stCondLst>
-                      <p:childTnLst>
-                        <p:par>
-                          <p:cTn fill="hold">
-                            <p:stCondLst>
-                              <p:cond delay="0"/>
-                            </p:stCondLst>
-                            <p:childTnLst>
-                              <p:par>
-                                <p:cTn fill="hold" nodeType="clickEffect" presetClass="entr" presetID="1" presetSubtype="0">
-                                  <p:stCondLst>
-                                    <p:cond delay="0"/>
-                                  </p:stCondLst>
-                                  <p:childTnLst>
-                                    <p:set>
-                                      <p:cBhvr>
-                                        <p:cTn dur="1" fill="hold">
-                                          <p:stCondLst>
-                                            <p:cond delay="0"/>
-                                          </p:stCondLst>
-                                        </p:cTn>
-                                        <p:tgtEl>
-                                          <p:spTgt spid="250">
-                                            <p:txEl>
-                                              <p:pRg end="5" st="5"/>
-                                            </p:txEl>
-                                          </p:spTgt>
-                                        </p:tgtEl>
-                                        <p:attrNameLst>
-                                          <p:attrName>style.visibility</p:attrName>
-                                        </p:attrNameLst>
-                                      </p:cBhvr>
-                                      <p:to>
-                                        <p:strVal val="visible"/>
-                                      </p:to>
-                                    </p:set>
-                                  </p:childTnLst>
-                                </p:cTn>
-                              </p:par>
-                            </p:childTnLst>
-                          </p:cTn>
-                        </p:par>
-                      </p:childTnLst>
-                    </p:cTn>
-                  </p:par>
-                  <p:par>
-                    <p:cTn fill="hold">
-                      <p:stCondLst>
-                        <p:cond delay="indefinite"/>
-                      </p:stCondLst>
-                      <p:childTnLst>
-                        <p:par>
-                          <p:cTn fill="hold">
-                            <p:stCondLst>
-                              <p:cond delay="0"/>
-                            </p:stCondLst>
-                            <p:childTnLst>
-                              <p:par>
-                                <p:cTn fill="hold" nodeType="clickEffect" presetClass="entr" presetID="1" presetSubtype="0">
-                                  <p:stCondLst>
-                                    <p:cond delay="0"/>
-                                  </p:stCondLst>
-                                  <p:childTnLst>
-                                    <p:set>
-                                      <p:cBhvr>
-                                        <p:cTn dur="1" fill="hold">
-                                          <p:stCondLst>
-                                            <p:cond delay="0"/>
-                                          </p:stCondLst>
-                                        </p:cTn>
-                                        <p:tgtEl>
-                                          <p:spTgt spid="250">
-                                            <p:txEl>
-                                              <p:pRg end="6" st="6"/>
-                                            </p:txEl>
-                                          </p:spTgt>
-                                        </p:tgtEl>
-                                        <p:attrNameLst>
-                                          <p:attrName>style.visibility</p:attrName>
-                                        </p:attrNameLst>
-                                      </p:cBhvr>
-                                      <p:to>
-                                        <p:strVal val="visible"/>
-                                      </p:to>
-                                    </p:set>
-                                  </p:childTnLst>
-                                </p:cTn>
-                              </p:par>
-                            </p:childTnLst>
-                          </p:cTn>
-                        </p:par>
-                      </p:childTnLst>
-                    </p:cTn>
-                  </p:par>
-                  <p:par>
-                    <p:cTn fill="hold">
-                      <p:stCondLst>
-                        <p:cond delay="indefinite"/>
-                      </p:stCondLst>
-                      <p:childTnLst>
-                        <p:par>
-                          <p:cTn fill="hold">
-                            <p:stCondLst>
-                              <p:cond delay="0"/>
-                            </p:stCondLst>
-                            <p:childTnLst>
-                              <p:par>
-                                <p:cTn fill="hold" nodeType="clickEffect" presetClass="entr" presetID="1" presetSubtype="0">
-                                  <p:stCondLst>
-                                    <p:cond delay="0"/>
-                                  </p:stCondLst>
-                                  <p:childTnLst>
-                                    <p:set>
-                                      <p:cBhvr>
-                                        <p:cTn dur="1" fill="hold">
-                                          <p:stCondLst>
-                                            <p:cond delay="0"/>
-                                          </p:stCondLst>
-                                        </p:cTn>
-                                        <p:tgtEl>
-                                          <p:spTgt spid="250">
-                                            <p:txEl>
-                                              <p:pRg end="7" st="7"/>
-                                            </p:txEl>
-                                          </p:spTgt>
-                                        </p:tgtEl>
-                                        <p:attrNameLst>
-                                          <p:attrName>style.visibility</p:attrName>
-                                        </p:attrNameLst>
-                                      </p:cBhvr>
-                                      <p:to>
-                                        <p:strVal val="visible"/>
-                                      </p:to>
-                                    </p:set>
-                                  </p:childTnLst>
-                                </p:cTn>
-                              </p:par>
-                            </p:childTnLst>
-                          </p:cTn>
-                        </p:par>
-                      </p:childTnLst>
-                    </p:cTn>
-                  </p:par>
-                </p:childTnLst>
-              </p:cTn>
-              <p:prevCondLst>
-                <p:cond evt="onPrev">
-                  <p:tgtEl>
-                    <p:sldTgt/>
-                  </p:tgtEl>
-                </p:cond>
-              </p:prevCondLst>
-              <p:nextCondLst>
-                <p:cond evt="onNext">
-                  <p:tgtEl>
-                    <p:sldTgt/>
-                  </p:tgtEl>
-                </p:cond>
-              </p:nextCondLst>
-            </p:seq>
-          </p:childTnLst>
-        </p:cTn>
-      </p:par>
-    </p:tnLst>
-  </p:timing>
-</p:sld>
-</file>
-
-<file path=ppt/slides/slide42.xml><?xml version="1.0" encoding="utf-8"?>
-<p:sld xmlns:a="http://schemas.openxmlformats.org/drawingml/2006/main" xmlns:p="http://schemas.openxmlformats.org/presentationml/2006/main" xmlns:r="http://schemas.openxmlformats.org/officeDocument/2006/relationships">
-  <p:cSld>
-    <p:spTree>
-      <p:nvGrpSpPr>
-        <p:cNvPr id="1" name=""/>
-        <p:cNvGrpSpPr/>
-        <p:nvPr/>
-      </p:nvGrpSpPr>
-      <p:grpSpPr/>
-      <p:sp>
-        <p:nvSpPr>
-          <p:cNvPr id="2" name="Title 1"/>
-          <p:cNvSpPr>
-            <a:spLocks noGrp="1"/>
-          </p:cNvSpPr>
-          <p:nvPr>
-            <p:ph type="title"/>
-          </p:nvPr>
-        </p:nvSpPr>
-        <p:spPr/>
-        <p:txBody>
-          <a:bodyPr/>
-          <a:lstStyle/>
-          <a:p>
-            <a:pPr indent="0" lvl="0" marL="0" rtl="0" algn="l">
-              <a:spcBef>
-                <a:spcPts val="0"/>
-              </a:spcBef>
-              <a:spcAft>
-                <a:spcPts val="0"/>
-              </a:spcAft>
-              <a:buNone/>
-            </a:pPr>
-            <a:r>
-              <a:rPr lang="en"/>
-              <a:t>Event Queue</a:t>
-            </a:r>
-            <a:endParaRPr/>
-          </a:p>
-        </p:txBody>
-      </p:sp>
-      <p:pic>
-        <p:nvPicPr>
-          <p:cNvPr id="3" name="Picture 2" descr="event-queue.png"/>
-          <p:cNvPicPr>
-            <a:picLocks noChangeAspect="1"/>
-          </p:cNvPicPr>
-          <p:nvPr/>
-        </p:nvPicPr>
-        <p:blipFill>
-          <a:blip r:embed="rId2"/>
-          <a:stretch>
-            <a:fillRect/>
-          </a:stretch>
-        </p:blipFill>
-        <p:spPr>
-          <a:xfrm>
-            <a:off x="320039" y="1051560"/>
-            <a:ext cx="8503920" cy="3897630"/>
-          </a:xfrm>
-          <a:prstGeom prst="rect">
-            <a:avLst/>
-          </a:prstGeom>
-        </p:spPr>
-      </p:pic>
-    </p:spTree>
-  </p:cSld>
-  <p:clrMapOvr>
-    <a:masterClrMapping/>
-  </p:clrMapOvr>
-</p:sld>
-</file>
-
-<file path=ppt/slides/slide43.xml><?xml version="1.0" encoding="utf-8"?>
-<p:sld xmlns:a="http://schemas.openxmlformats.org/drawingml/2006/main" xmlns:p="http://schemas.openxmlformats.org/presentationml/2006/main" xmlns:r="http://schemas.openxmlformats.org/officeDocument/2006/relationships">
-  <p:cSld>
-    <p:spTree>
-      <p:nvGrpSpPr>
-        <p:cNvPr id="1" name=""/>
-        <p:cNvGrpSpPr/>
-        <p:nvPr/>
-      </p:nvGrpSpPr>
-      <p:grpSpPr/>
-      <p:sp>
-        <p:nvSpPr>
-          <p:cNvPr id="2" name="Title 1"/>
-          <p:cNvSpPr>
-            <a:spLocks noGrp="1"/>
-          </p:cNvSpPr>
-          <p:nvPr>
-            <p:ph type="title"/>
-          </p:nvPr>
-        </p:nvSpPr>
-        <p:spPr/>
-        <p:txBody>
-          <a:bodyPr/>
-          <a:lstStyle/>
-          <a:p>
-            <a:pPr indent="0" lvl="0" marL="0" rtl="0" algn="l">
-              <a:spcBef>
-                <a:spcPts val="0"/>
-              </a:spcBef>
-              <a:spcAft>
-                <a:spcPts val="0"/>
-              </a:spcAft>
-              <a:buNone/>
-            </a:pPr>
-            <a:r>
-              <a:rPr lang="en"/>
-              <a:t>The Event Travels Up</a:t>
-            </a:r>
-            <a:endParaRPr/>
-          </a:p>
-        </p:txBody>
-      </p:sp>
-      <p:pic>
-        <p:nvPicPr>
-          <p:cNvPr id="3" name="Picture 2" descr="event-flow.png"/>
-          <p:cNvPicPr>
-            <a:picLocks noChangeAspect="1"/>
-          </p:cNvPicPr>
-          <p:nvPr/>
-        </p:nvPicPr>
-        <p:blipFill>
-          <a:blip r:embed="rId2"/>
-          <a:stretch>
-            <a:fillRect/>
-          </a:stretch>
-        </p:blipFill>
-        <p:spPr>
-          <a:xfrm>
-            <a:off x="320039" y="1051560"/>
-            <a:ext cx="8503920" cy="3897630"/>
-          </a:xfrm>
-          <a:prstGeom prst="rect">
-            <a:avLst/>
-          </a:prstGeom>
-        </p:spPr>
-      </p:pic>
     </p:spTree>
   </p:cSld>
   <p:clrMapOvr>

--- a/slides/07 The Legend of Zelda.pptx
+++ b/slides/07 The Legend of Zelda.pptx
@@ -8132,7 +8132,7 @@
           <p:nvPr/>
         </p:nvPicPr>
         <p:blipFill>
-          <a:blip r:embed="rId5"/>
+          <a:blip r:embed="rId4"/>
           <a:stretch>
             <a:fillRect/>
           </a:stretch>

--- a/slides/07 The Legend of Zelda.pptx
+++ b/slides/07 The Legend of Zelda.pptx
@@ -44,6 +44,8 @@
     <p:sldId id="285" r:id="rId35"/>
     <p:sldId id="289" r:id="rId48"/>
     <p:sldId id="290" r:id="rId49"/>
+    <p:sldId id="300" r:id="rId22"/>
+    <p:sldId id="301" r:id="rId21"/>
     <p:sldId id="286" r:id="rId36"/>
     <p:sldId id="292" r:id="rId51"/>
     <p:sldId id="294" r:id="rId53"/>
@@ -1287,6 +1289,127 @@
           <a:p>
             <a:r>
               <a:t>Publisher and subscriber are other names for subject and observer.</a:t>
+            </a:r>
+          </a:p>
+        </p:txBody>
+      </p:sp>
+    </p:spTree>
+  </p:cSld>
+  <p:clrMapOvr>
+    <a:masterClrMapping/>
+  </p:clrMapOvr>
+</p:notes>
+</file>
+
+<file path=ppt/notesSlides/notesSlide16.xml><?xml version="1.0" encoding="utf-8"?>
+<p:notes xmlns:a="http://schemas.openxmlformats.org/drawingml/2006/main" xmlns:p="http://schemas.openxmlformats.org/presentationml/2006/main" xmlns:r="http://schemas.openxmlformats.org/officeDocument/2006/relationships">
+  <p:cSld>
+    <p:spTree>
+      <p:nvGrpSpPr>
+        <p:cNvPr id="1" name=""/>
+        <p:cNvGrpSpPr/>
+        <p:nvPr/>
+      </p:nvGrpSpPr>
+      <p:grpSpPr>
+        <a:xfrm>
+          <a:off x="0" y="0"/>
+          <a:ext cx="0" cy="0"/>
+          <a:chOff x="0" y="0"/>
+          <a:chExt cx="0" cy="0"/>
+        </a:xfrm>
+      </p:grpSpPr>
+      <p:sp>
+        <p:nvSpPr>
+          <p:cNvPr id="2" name="Slide Image Placeholder 1"/>
+          <p:cNvSpPr>
+            <a:spLocks noGrp="1"/>
+          </p:cNvSpPr>
+          <p:nvPr>
+            <p:ph type="sldImg" idx="2"/>
+          </p:nvPr>
+        </p:nvSpPr>
+        <p:spPr/>
+      </p:sp>
+      <p:sp>
+        <p:nvSpPr>
+          <p:cNvPr id="3" name="Notes Placeholder 2"/>
+          <p:cNvSpPr>
+            <a:spLocks noGrp="1"/>
+          </p:cNvSpPr>
+          <p:nvPr>
+            <p:ph type="body" idx="1"/>
+          </p:nvPr>
+        </p:nvSpPr>
+        <p:spPr/>
+        <p:txBody>
+          <a:bodyPr/>
+          <a:lstStyle/>
+          <a:p>
+            <a:r>
+              <a:t>The session in one slide. Read each concern aloud and let the class give the answer before pointing at it.</a:t>
+            </a:r>
+          </a:p>
+        </p:txBody>
+      </p:sp>
+    </p:spTree>
+  </p:cSld>
+  <p:clrMapOvr>
+    <a:masterClrMapping/>
+  </p:clrMapOvr>
+</p:notes>
+</file>
+
+<file path=ppt/notesSlides/notesSlide17.xml><?xml version="1.0" encoding="utf-8"?>
+<p:notes xmlns:a="http://schemas.openxmlformats.org/drawingml/2006/main" xmlns:p="http://schemas.openxmlformats.org/presentationml/2006/main" xmlns:r="http://schemas.openxmlformats.org/officeDocument/2006/relationships">
+  <p:cSld>
+    <p:spTree>
+      <p:nvGrpSpPr>
+        <p:cNvPr id="1" name=""/>
+        <p:cNvGrpSpPr/>
+        <p:nvPr/>
+      </p:nvGrpSpPr>
+      <p:grpSpPr>
+        <a:xfrm>
+          <a:off x="0" y="0"/>
+          <a:ext cx="0" cy="0"/>
+          <a:chOff x="0" y="0"/>
+          <a:chExt cx="0" cy="0"/>
+        </a:xfrm>
+      </p:grpSpPr>
+      <p:sp>
+        <p:nvSpPr>
+          <p:cNvPr id="2" name="Slide Image Placeholder 1"/>
+          <p:cNvSpPr>
+            <a:spLocks noGrp="1"/>
+          </p:cNvSpPr>
+          <p:nvPr>
+            <p:ph type="sldImg" idx="2"/>
+          </p:nvPr>
+        </p:nvSpPr>
+        <p:spPr/>
+      </p:sp>
+      <p:sp>
+        <p:nvSpPr>
+          <p:cNvPr id="3" name="Notes Placeholder 2"/>
+          <p:cNvSpPr>
+            <a:spLocks noGrp="1"/>
+          </p:cNvSpPr>
+          <p:nvPr>
+            <p:ph type="body" idx="1"/>
+          </p:nvPr>
+        </p:nvSpPr>
+        <p:spPr/>
+        <p:txBody>
+          <a:bodyPr/>
+          <a:lstStyle/>
+          <a:p>
+            <a:r>
+              <a:t>Who holds what in the finished Zelda. Each class knows the one below it only.</a:t>
+            </a:r>
+          </a:p>
+          <a:p>
+            <a:r>
+              <a:t>Trace OnPlayerDied upwards with a finger: room, dungeon, play state. No arrow points that way.</a:t>
             </a:r>
           </a:p>
         </p:txBody>
@@ -23904,6 +24027,1538 @@
 </p:sld>
 </file>
 
+<file path=ppt/slides/slide41.xml><?xml version="1.0" encoding="utf-8"?>
+<p:sld xmlns:a="http://schemas.openxmlformats.org/drawingml/2006/main" xmlns:p="http://schemas.openxmlformats.org/presentationml/2006/main" xmlns:r="http://schemas.openxmlformats.org/officeDocument/2006/relationships">
+  <p:cSld>
+    <p:spTree>
+      <p:nvGrpSpPr>
+        <p:cNvPr id="1" name=""/>
+        <p:cNvGrpSpPr/>
+        <p:nvPr/>
+      </p:nvGrpSpPr>
+      <p:grpSpPr/>
+      <p:sp>
+        <p:nvSpPr>
+          <p:cNvPr id="2" name="Title 1"/>
+          <p:cNvSpPr>
+            <a:spLocks noGrp="1"/>
+          </p:cNvSpPr>
+          <p:nvPr>
+            <p:ph type="title"/>
+          </p:nvPr>
+        </p:nvSpPr>
+        <p:spPr/>
+        <p:txBody>
+          <a:bodyPr/>
+          <a:lstStyle/>
+          <a:p>
+            <a:pPr indent="0" lvl="0" marL="0" rtl="0" algn="l">
+              <a:spcBef>
+                <a:spcPts val="0"/>
+              </a:spcBef>
+              <a:spcAft>
+                <a:spcPts val="0"/>
+              </a:spcAft>
+              <a:buNone/>
+            </a:pPr>
+            <a:r>
+              <a:rPr lang="en"/>
+              <a:t>The Whole Game</a:t>
+            </a:r>
+            <a:endParaRPr/>
+          </a:p>
+        </p:txBody>
+      </p:sp>
+      <p:sp>
+        <p:nvSpPr>
+          <p:cNvPr id="3" name="Text Placeholder 2"/>
+          <p:cNvSpPr>
+            <a:spLocks noGrp="1"/>
+          </p:cNvSpPr>
+          <p:nvPr>
+            <p:ph type="body" idx="1"/>
+          </p:nvPr>
+        </p:nvSpPr>
+        <p:spPr>
+          <a:xfrm>
+            <a:off x="311700" y="885950"/>
+            <a:ext cx="8520600" cy="521208"/>
+          </a:xfrm>
+        </p:spPr>
+        <p:txBody>
+          <a:bodyPr/>
+          <a:lstStyle/>
+          <a:p>
+            <a:pPr indent="-330200" lvl="0" marL="457200" rtl="0" algn="l">
+              <a:spcBef>
+                <a:spcPts val="0"/>
+              </a:spcBef>
+              <a:spcAft>
+                <a:spcPts val="0"/>
+              </a:spcAft>
+              <a:buSzPts val="1600"/>
+              <a:buChar char="●"/>
+            </a:pPr>
+            <a:r>
+              <a:rPr lang="en" b="1"/>
+              <a:t>Zelda7 adds music and sounds. Arrows point down, and events travel up.</a:t>
+            </a:r>
+            <a:endParaRPr/>
+          </a:p>
+        </p:txBody>
+      </p:sp>
+      <p:sp>
+        <p:nvSpPr>
+          <p:cNvPr id="4" name="Rounded Rectangle 3"/>
+          <p:cNvSpPr/>
+          <p:nvPr/>
+        </p:nvSpPr>
+        <p:spPr>
+          <a:xfrm>
+            <a:off x="3429000" y="1481328"/>
+            <a:ext cx="2286000" cy="457200"/>
+          </a:xfrm>
+          <a:prstGeom prst="roundRect">
+            <a:avLst>
+              <a:gd name="adj" fmla="val 12000"/>
+            </a:avLst>
+          </a:prstGeom>
+          <a:solidFill>
+            <a:srgbClr val="2E3338"/>
+          </a:solidFill>
+          <a:ln w="25400">
+            <a:solidFill>
+              <a:srgbClr val="D45D35"/>
+            </a:solidFill>
+          </a:ln>
+          <a:effectLst/>
+        </p:spPr>
+        <p:style>
+          <a:lnRef idx="1">
+            <a:schemeClr val="accent1"/>
+          </a:lnRef>
+          <a:fillRef idx="3">
+            <a:schemeClr val="accent1"/>
+          </a:fillRef>
+          <a:effectRef idx="2">
+            <a:schemeClr val="accent1"/>
+          </a:effectRef>
+          <a:fontRef idx="minor">
+            <a:schemeClr val="lt1"/>
+          </a:fontRef>
+        </p:style>
+        <p:txBody>
+          <a:bodyPr rtlCol="0" anchor="ctr" wrap="square" lIns="73152" rIns="73152"/>
+          <a:lstStyle/>
+          <a:p>
+            <a:pPr algn="ctr"/>
+            <a:r>
+              <a:rPr sz="1300" b="1">
+                <a:solidFill>
+                  <a:srgbClr val="DEE2E6"/>
+                </a:solidFill>
+              </a:rPr>
+              <a:t>Game1 : Core</a:t>
+            </a:r>
+          </a:p>
+          <a:p>
+            <a:pPr algn="ctr"/>
+            <a:r>
+              <a:rPr sz="1100" b="0">
+                <a:solidFill>
+                  <a:srgbClr val="9AA3AB"/>
+                </a:solidFill>
+              </a:rPr>
+              <a:t>the current game state</a:t>
+            </a:r>
+          </a:p>
+        </p:txBody>
+      </p:sp>
+      <p:sp>
+        <p:nvSpPr>
+          <p:cNvPr id="5" name="Rounded Rectangle 4"/>
+          <p:cNvSpPr/>
+          <p:nvPr/>
+        </p:nvSpPr>
+        <p:spPr>
+          <a:xfrm>
+            <a:off x="2720339" y="2082545"/>
+            <a:ext cx="2286000" cy="457200"/>
+          </a:xfrm>
+          <a:prstGeom prst="roundRect">
+            <a:avLst>
+              <a:gd name="adj" fmla="val 12000"/>
+            </a:avLst>
+          </a:prstGeom>
+          <a:solidFill>
+            <a:srgbClr val="2E3338"/>
+          </a:solidFill>
+          <a:ln>
+            <a:noFill/>
+          </a:ln>
+          <a:effectLst/>
+        </p:spPr>
+        <p:style>
+          <a:lnRef idx="1">
+            <a:schemeClr val="accent1"/>
+          </a:lnRef>
+          <a:fillRef idx="3">
+            <a:schemeClr val="accent1"/>
+          </a:fillRef>
+          <a:effectRef idx="2">
+            <a:schemeClr val="accent1"/>
+          </a:effectRef>
+          <a:fontRef idx="minor">
+            <a:schemeClr val="lt1"/>
+          </a:fontRef>
+        </p:style>
+        <p:txBody>
+          <a:bodyPr rtlCol="0" anchor="ctr" wrap="square" lIns="73152" rIns="73152"/>
+          <a:lstStyle/>
+          <a:p>
+            <a:pPr algn="ctr"/>
+            <a:r>
+              <a:rPr sz="1300" b="1">
+                <a:solidFill>
+                  <a:srgbClr val="DEE2E6"/>
+                </a:solidFill>
+              </a:rPr>
+              <a:t>PlayState</a:t>
+            </a:r>
+          </a:p>
+        </p:txBody>
+      </p:sp>
+      <p:sp>
+        <p:nvSpPr>
+          <p:cNvPr id="6" name="Rounded Rectangle 5"/>
+          <p:cNvSpPr/>
+          <p:nvPr/>
+        </p:nvSpPr>
+        <p:spPr>
+          <a:xfrm>
+            <a:off x="374903" y="2683764"/>
+            <a:ext cx="1307592" cy="457200"/>
+          </a:xfrm>
+          <a:prstGeom prst="roundRect">
+            <a:avLst>
+              <a:gd name="adj" fmla="val 12000"/>
+            </a:avLst>
+          </a:prstGeom>
+          <a:solidFill>
+            <a:srgbClr val="2E3338"/>
+          </a:solidFill>
+          <a:ln>
+            <a:noFill/>
+          </a:ln>
+          <a:effectLst/>
+        </p:spPr>
+        <p:style>
+          <a:lnRef idx="1">
+            <a:schemeClr val="accent1"/>
+          </a:lnRef>
+          <a:fillRef idx="3">
+            <a:schemeClr val="accent1"/>
+          </a:fillRef>
+          <a:effectRef idx="2">
+            <a:schemeClr val="accent1"/>
+          </a:effectRef>
+          <a:fontRef idx="minor">
+            <a:schemeClr val="lt1"/>
+          </a:fontRef>
+        </p:style>
+        <p:txBody>
+          <a:bodyPr rtlCol="0" anchor="ctr" wrap="square" lIns="73152" rIns="73152"/>
+          <a:lstStyle/>
+          <a:p>
+            <a:pPr algn="ctr"/>
+            <a:r>
+              <a:rPr sz="1200" b="1">
+                <a:solidFill>
+                  <a:srgbClr val="DEE2E6"/>
+                </a:solidFill>
+              </a:rPr>
+              <a:t>Player</a:t>
+            </a:r>
+          </a:p>
+        </p:txBody>
+      </p:sp>
+      <p:cxnSp>
+        <p:nvCxnSpPr>
+          <p:cNvPr id="7" name="Connector 6"/>
+          <p:cNvCxnSpPr/>
+          <p:nvPr/>
+        </p:nvCxnSpPr>
+        <p:spPr>
+          <a:xfrm flipH="1">
+            <a:off x="1028700" y="2558034"/>
+            <a:ext cx="2834639" cy="107441"/>
+          </a:xfrm>
+          <a:prstGeom prst="line">
+            <a:avLst/>
+          </a:prstGeom>
+          <a:ln w="25400">
+            <a:solidFill>
+              <a:srgbClr val="9AA3AB"/>
+            </a:solidFill>
+            <a:tailEnd type="triangle"/>
+          </a:ln>
+        </p:spPr>
+        <p:style>
+          <a:lnRef idx="2">
+            <a:schemeClr val="accent1"/>
+          </a:lnRef>
+          <a:fillRef idx="0">
+            <a:schemeClr val="accent1"/>
+          </a:fillRef>
+          <a:effectRef idx="1">
+            <a:schemeClr val="accent1"/>
+          </a:effectRef>
+          <a:fontRef idx="minor">
+            <a:schemeClr val="tx1"/>
+          </a:fontRef>
+        </p:style>
+      </p:cxnSp>
+      <p:sp>
+        <p:nvSpPr>
+          <p:cNvPr id="8" name="Rounded Rectangle 7"/>
+          <p:cNvSpPr/>
+          <p:nvPr/>
+        </p:nvSpPr>
+        <p:spPr>
+          <a:xfrm>
+            <a:off x="3429000" y="2683764"/>
+            <a:ext cx="2286000" cy="457200"/>
+          </a:xfrm>
+          <a:prstGeom prst="roundRect">
+            <a:avLst>
+              <a:gd name="adj" fmla="val 12000"/>
+            </a:avLst>
+          </a:prstGeom>
+          <a:solidFill>
+            <a:srgbClr val="2E3338"/>
+          </a:solidFill>
+          <a:ln>
+            <a:noFill/>
+          </a:ln>
+          <a:effectLst/>
+        </p:spPr>
+        <p:style>
+          <a:lnRef idx="1">
+            <a:schemeClr val="accent1"/>
+          </a:lnRef>
+          <a:fillRef idx="3">
+            <a:schemeClr val="accent1"/>
+          </a:fillRef>
+          <a:effectRef idx="2">
+            <a:schemeClr val="accent1"/>
+          </a:effectRef>
+          <a:fontRef idx="minor">
+            <a:schemeClr val="lt1"/>
+          </a:fontRef>
+        </p:style>
+        <p:txBody>
+          <a:bodyPr rtlCol="0" anchor="ctr" wrap="square" lIns="73152" rIns="73152"/>
+          <a:lstStyle/>
+          <a:p>
+            <a:pPr algn="ctr"/>
+            <a:r>
+              <a:rPr sz="1300" b="1">
+                <a:solidFill>
+                  <a:srgbClr val="DEE2E6"/>
+                </a:solidFill>
+              </a:rPr>
+              <a:t>Dungeon</a:t>
+            </a:r>
+          </a:p>
+        </p:txBody>
+      </p:sp>
+      <p:sp>
+        <p:nvSpPr>
+          <p:cNvPr id="9" name="Rounded Rectangle 8"/>
+          <p:cNvSpPr/>
+          <p:nvPr/>
+        </p:nvSpPr>
+        <p:spPr>
+          <a:xfrm>
+            <a:off x="2720339" y="3284982"/>
+            <a:ext cx="2286000" cy="457200"/>
+          </a:xfrm>
+          <a:prstGeom prst="roundRect">
+            <a:avLst>
+              <a:gd name="adj" fmla="val 12000"/>
+            </a:avLst>
+          </a:prstGeom>
+          <a:solidFill>
+            <a:srgbClr val="2E3338"/>
+          </a:solidFill>
+          <a:ln>
+            <a:noFill/>
+          </a:ln>
+          <a:effectLst/>
+        </p:spPr>
+        <p:style>
+          <a:lnRef idx="1">
+            <a:schemeClr val="accent1"/>
+          </a:lnRef>
+          <a:fillRef idx="3">
+            <a:schemeClr val="accent1"/>
+          </a:fillRef>
+          <a:effectRef idx="2">
+            <a:schemeClr val="accent1"/>
+          </a:effectRef>
+          <a:fontRef idx="minor">
+            <a:schemeClr val="lt1"/>
+          </a:fontRef>
+        </p:style>
+        <p:txBody>
+          <a:bodyPr rtlCol="0" anchor="ctr" wrap="square" lIns="73152" rIns="73152"/>
+          <a:lstStyle/>
+          <a:p>
+            <a:pPr algn="ctr"/>
+            <a:r>
+              <a:rPr sz="1300" b="1">
+                <a:solidFill>
+                  <a:srgbClr val="DEE2E6"/>
+                </a:solidFill>
+              </a:rPr>
+              <a:t>Room</a:t>
+            </a:r>
+          </a:p>
+          <a:p>
+            <a:pPr algn="ctr"/>
+            <a:r>
+              <a:rPr sz="1100" b="0">
+                <a:solidFill>
+                  <a:srgbClr val="9AA3AB"/>
+                </a:solidFill>
+              </a:rPr>
+              <a:t>current and next</a:t>
+            </a:r>
+          </a:p>
+        </p:txBody>
+      </p:sp>
+      <p:sp>
+        <p:nvSpPr>
+          <p:cNvPr id="10" name="Rounded Rectangle 9"/>
+          <p:cNvSpPr/>
+          <p:nvPr/>
+        </p:nvSpPr>
+        <p:spPr>
+          <a:xfrm>
+            <a:off x="1792223" y="3886200"/>
+            <a:ext cx="1307592" cy="457200"/>
+          </a:xfrm>
+          <a:prstGeom prst="roundRect">
+            <a:avLst>
+              <a:gd name="adj" fmla="val 12000"/>
+            </a:avLst>
+          </a:prstGeom>
+          <a:solidFill>
+            <a:srgbClr val="2E3338"/>
+          </a:solidFill>
+          <a:ln>
+            <a:noFill/>
+          </a:ln>
+          <a:effectLst/>
+        </p:spPr>
+        <p:style>
+          <a:lnRef idx="1">
+            <a:schemeClr val="accent1"/>
+          </a:lnRef>
+          <a:fillRef idx="3">
+            <a:schemeClr val="accent1"/>
+          </a:fillRef>
+          <a:effectRef idx="2">
+            <a:schemeClr val="accent1"/>
+          </a:effectRef>
+          <a:fontRef idx="minor">
+            <a:schemeClr val="lt1"/>
+          </a:fontRef>
+        </p:style>
+        <p:txBody>
+          <a:bodyPr rtlCol="0" anchor="ctr" wrap="square" lIns="73152" rIns="73152"/>
+          <a:lstStyle/>
+          <a:p>
+            <a:pPr algn="ctr"/>
+            <a:r>
+              <a:rPr sz="1200" b="1">
+                <a:solidFill>
+                  <a:srgbClr val="DEE2E6"/>
+                </a:solidFill>
+              </a:rPr>
+              <a:t>Enemy</a:t>
+            </a:r>
+          </a:p>
+          <a:p>
+            <a:pPr algn="ctr"/>
+            <a:r>
+              <a:rPr sz="1000" b="0">
+                <a:solidFill>
+                  <a:srgbClr val="9AA3AB"/>
+                </a:solidFill>
+              </a:rPr>
+              <a:t>many</a:t>
+            </a:r>
+          </a:p>
+        </p:txBody>
+      </p:sp>
+      <p:cxnSp>
+        <p:nvCxnSpPr>
+          <p:cNvPr id="11" name="Connector 10"/>
+          <p:cNvCxnSpPr/>
+          <p:nvPr/>
+        </p:nvCxnSpPr>
+        <p:spPr>
+          <a:xfrm flipH="1">
+            <a:off x="2446020" y="3760470"/>
+            <a:ext cx="1417319" cy="107442"/>
+          </a:xfrm>
+          <a:prstGeom prst="line">
+            <a:avLst/>
+          </a:prstGeom>
+          <a:ln w="25400">
+            <a:solidFill>
+              <a:srgbClr val="9AA3AB"/>
+            </a:solidFill>
+            <a:tailEnd type="triangle"/>
+          </a:ln>
+        </p:spPr>
+        <p:style>
+          <a:lnRef idx="2">
+            <a:schemeClr val="accent1"/>
+          </a:lnRef>
+          <a:fillRef idx="0">
+            <a:schemeClr val="accent1"/>
+          </a:fillRef>
+          <a:effectRef idx="1">
+            <a:schemeClr val="accent1"/>
+          </a:effectRef>
+          <a:fontRef idx="minor">
+            <a:schemeClr val="tx1"/>
+          </a:fontRef>
+        </p:style>
+      </p:cxnSp>
+      <p:sp>
+        <p:nvSpPr>
+          <p:cNvPr id="12" name="Rounded Rectangle 11"/>
+          <p:cNvSpPr/>
+          <p:nvPr/>
+        </p:nvSpPr>
+        <p:spPr>
+          <a:xfrm>
+            <a:off x="3209544" y="3886200"/>
+            <a:ext cx="1307592" cy="457200"/>
+          </a:xfrm>
+          <a:prstGeom prst="roundRect">
+            <a:avLst>
+              <a:gd name="adj" fmla="val 12000"/>
+            </a:avLst>
+          </a:prstGeom>
+          <a:solidFill>
+            <a:srgbClr val="2E3338"/>
+          </a:solidFill>
+          <a:ln>
+            <a:noFill/>
+          </a:ln>
+          <a:effectLst/>
+        </p:spPr>
+        <p:style>
+          <a:lnRef idx="1">
+            <a:schemeClr val="accent1"/>
+          </a:lnRef>
+          <a:fillRef idx="3">
+            <a:schemeClr val="accent1"/>
+          </a:fillRef>
+          <a:effectRef idx="2">
+            <a:schemeClr val="accent1"/>
+          </a:effectRef>
+          <a:fontRef idx="minor">
+            <a:schemeClr val="lt1"/>
+          </a:fontRef>
+        </p:style>
+        <p:txBody>
+          <a:bodyPr rtlCol="0" anchor="ctr" wrap="square" lIns="73152" rIns="73152"/>
+          <a:lstStyle/>
+          <a:p>
+            <a:pPr algn="ctr"/>
+            <a:r>
+              <a:rPr sz="1200" b="1">
+                <a:solidFill>
+                  <a:srgbClr val="DEE2E6"/>
+                </a:solidFill>
+              </a:rPr>
+              <a:t>GameObject</a:t>
+            </a:r>
+          </a:p>
+          <a:p>
+            <a:pPr algn="ctr"/>
+            <a:r>
+              <a:rPr sz="1000" b="0">
+                <a:solidFill>
+                  <a:srgbClr val="9AA3AB"/>
+                </a:solidFill>
+              </a:rPr>
+              <a:t>many</a:t>
+            </a:r>
+          </a:p>
+        </p:txBody>
+      </p:sp>
+      <p:cxnSp>
+        <p:nvCxnSpPr>
+          <p:cNvPr id="13" name="Connector 12"/>
+          <p:cNvCxnSpPr/>
+          <p:nvPr/>
+        </p:nvCxnSpPr>
+        <p:spPr>
+          <a:xfrm>
+            <a:off x="3863339" y="3760470"/>
+            <a:ext cx="1" cy="107442"/>
+          </a:xfrm>
+          <a:prstGeom prst="line">
+            <a:avLst/>
+          </a:prstGeom>
+          <a:ln w="25400">
+            <a:solidFill>
+              <a:srgbClr val="9AA3AB"/>
+            </a:solidFill>
+            <a:tailEnd type="triangle"/>
+          </a:ln>
+        </p:spPr>
+        <p:style>
+          <a:lnRef idx="2">
+            <a:schemeClr val="accent1"/>
+          </a:lnRef>
+          <a:fillRef idx="0">
+            <a:schemeClr val="accent1"/>
+          </a:fillRef>
+          <a:effectRef idx="1">
+            <a:schemeClr val="accent1"/>
+          </a:effectRef>
+          <a:fontRef idx="minor">
+            <a:schemeClr val="tx1"/>
+          </a:fontRef>
+        </p:style>
+      </p:cxnSp>
+      <p:sp>
+        <p:nvSpPr>
+          <p:cNvPr id="14" name="Rounded Rectangle 13"/>
+          <p:cNvSpPr/>
+          <p:nvPr/>
+        </p:nvSpPr>
+        <p:spPr>
+          <a:xfrm>
+            <a:off x="4626864" y="3886200"/>
+            <a:ext cx="1307592" cy="457200"/>
+          </a:xfrm>
+          <a:prstGeom prst="roundRect">
+            <a:avLst>
+              <a:gd name="adj" fmla="val 12000"/>
+            </a:avLst>
+          </a:prstGeom>
+          <a:solidFill>
+            <a:srgbClr val="2E3338"/>
+          </a:solidFill>
+          <a:ln>
+            <a:noFill/>
+          </a:ln>
+          <a:effectLst/>
+        </p:spPr>
+        <p:style>
+          <a:lnRef idx="1">
+            <a:schemeClr val="accent1"/>
+          </a:lnRef>
+          <a:fillRef idx="3">
+            <a:schemeClr val="accent1"/>
+          </a:fillRef>
+          <a:effectRef idx="2">
+            <a:schemeClr val="accent1"/>
+          </a:effectRef>
+          <a:fontRef idx="minor">
+            <a:schemeClr val="lt1"/>
+          </a:fontRef>
+        </p:style>
+        <p:txBody>
+          <a:bodyPr rtlCol="0" anchor="ctr" wrap="square" lIns="73152" rIns="73152"/>
+          <a:lstStyle/>
+          <a:p>
+            <a:pPr algn="ctr"/>
+            <a:r>
+              <a:rPr sz="1200" b="1">
+                <a:solidFill>
+                  <a:srgbClr val="DEE2E6"/>
+                </a:solidFill>
+              </a:rPr>
+              <a:t>Doorway</a:t>
+            </a:r>
+          </a:p>
+          <a:p>
+            <a:pPr algn="ctr"/>
+            <a:r>
+              <a:rPr sz="1000" b="0">
+                <a:solidFill>
+                  <a:srgbClr val="9AA3AB"/>
+                </a:solidFill>
+              </a:rPr>
+              <a:t>many</a:t>
+            </a:r>
+          </a:p>
+        </p:txBody>
+      </p:sp>
+      <p:cxnSp>
+        <p:nvCxnSpPr>
+          <p:cNvPr id="15" name="Connector 14"/>
+          <p:cNvCxnSpPr/>
+          <p:nvPr/>
+        </p:nvCxnSpPr>
+        <p:spPr>
+          <a:xfrm>
+            <a:off x="3863339" y="3760470"/>
+            <a:ext cx="1417321" cy="107442"/>
+          </a:xfrm>
+          <a:prstGeom prst="line">
+            <a:avLst/>
+          </a:prstGeom>
+          <a:ln w="25400">
+            <a:solidFill>
+              <a:srgbClr val="9AA3AB"/>
+            </a:solidFill>
+            <a:tailEnd type="triangle"/>
+          </a:ln>
+        </p:spPr>
+        <p:style>
+          <a:lnRef idx="2">
+            <a:schemeClr val="accent1"/>
+          </a:lnRef>
+          <a:fillRef idx="0">
+            <a:schemeClr val="accent1"/>
+          </a:fillRef>
+          <a:effectRef idx="1">
+            <a:schemeClr val="accent1"/>
+          </a:effectRef>
+          <a:fontRef idx="minor">
+            <a:schemeClr val="tx1"/>
+          </a:fontRef>
+        </p:style>
+      </p:cxnSp>
+      <p:cxnSp>
+        <p:nvCxnSpPr>
+          <p:cNvPr id="16" name="Connector 15"/>
+          <p:cNvCxnSpPr/>
+          <p:nvPr/>
+        </p:nvCxnSpPr>
+        <p:spPr>
+          <a:xfrm flipH="1">
+            <a:off x="3863339" y="3159252"/>
+            <a:ext cx="708661" cy="107442"/>
+          </a:xfrm>
+          <a:prstGeom prst="line">
+            <a:avLst/>
+          </a:prstGeom>
+          <a:ln w="25400">
+            <a:solidFill>
+              <a:srgbClr val="9AA3AB"/>
+            </a:solidFill>
+            <a:tailEnd type="triangle"/>
+          </a:ln>
+        </p:spPr>
+        <p:style>
+          <a:lnRef idx="2">
+            <a:schemeClr val="accent1"/>
+          </a:lnRef>
+          <a:fillRef idx="0">
+            <a:schemeClr val="accent1"/>
+          </a:fillRef>
+          <a:effectRef idx="1">
+            <a:schemeClr val="accent1"/>
+          </a:effectRef>
+          <a:fontRef idx="minor">
+            <a:schemeClr val="tx1"/>
+          </a:fontRef>
+        </p:style>
+      </p:cxnSp>
+      <p:sp>
+        <p:nvSpPr>
+          <p:cNvPr id="17" name="Rounded Rectangle 16"/>
+          <p:cNvSpPr/>
+          <p:nvPr/>
+        </p:nvSpPr>
+        <p:spPr>
+          <a:xfrm>
+            <a:off x="6044184" y="3284982"/>
+            <a:ext cx="1307592" cy="457200"/>
+          </a:xfrm>
+          <a:prstGeom prst="roundRect">
+            <a:avLst>
+              <a:gd name="adj" fmla="val 12000"/>
+            </a:avLst>
+          </a:prstGeom>
+          <a:solidFill>
+            <a:srgbClr val="2E3338"/>
+          </a:solidFill>
+          <a:ln>
+            <a:noFill/>
+          </a:ln>
+          <a:effectLst/>
+        </p:spPr>
+        <p:style>
+          <a:lnRef idx="1">
+            <a:schemeClr val="accent1"/>
+          </a:lnRef>
+          <a:fillRef idx="3">
+            <a:schemeClr val="accent1"/>
+          </a:fillRef>
+          <a:effectRef idx="2">
+            <a:schemeClr val="accent1"/>
+          </a:effectRef>
+          <a:fontRef idx="minor">
+            <a:schemeClr val="lt1"/>
+          </a:fontRef>
+        </p:style>
+        <p:txBody>
+          <a:bodyPr rtlCol="0" anchor="ctr" wrap="square" lIns="73152" rIns="73152"/>
+          <a:lstStyle/>
+          <a:p>
+            <a:pPr algn="ctr"/>
+            <a:r>
+              <a:rPr sz="1200" b="1">
+                <a:solidFill>
+                  <a:srgbClr val="DEE2E6"/>
+                </a:solidFill>
+              </a:rPr>
+              <a:t>Camera</a:t>
+            </a:r>
+          </a:p>
+        </p:txBody>
+      </p:sp>
+      <p:cxnSp>
+        <p:nvCxnSpPr>
+          <p:cNvPr id="18" name="Connector 17"/>
+          <p:cNvCxnSpPr/>
+          <p:nvPr/>
+        </p:nvCxnSpPr>
+        <p:spPr>
+          <a:xfrm>
+            <a:off x="4572000" y="3159252"/>
+            <a:ext cx="2125980" cy="107442"/>
+          </a:xfrm>
+          <a:prstGeom prst="line">
+            <a:avLst/>
+          </a:prstGeom>
+          <a:ln w="25400">
+            <a:solidFill>
+              <a:srgbClr val="9AA3AB"/>
+            </a:solidFill>
+            <a:tailEnd type="triangle"/>
+          </a:ln>
+        </p:spPr>
+        <p:style>
+          <a:lnRef idx="2">
+            <a:schemeClr val="accent1"/>
+          </a:lnRef>
+          <a:fillRef idx="0">
+            <a:schemeClr val="accent1"/>
+          </a:fillRef>
+          <a:effectRef idx="1">
+            <a:schemeClr val="accent1"/>
+          </a:effectRef>
+          <a:fontRef idx="minor">
+            <a:schemeClr val="tx1"/>
+          </a:fontRef>
+        </p:style>
+      </p:cxnSp>
+      <p:cxnSp>
+        <p:nvCxnSpPr>
+          <p:cNvPr id="19" name="Connector 18"/>
+          <p:cNvCxnSpPr/>
+          <p:nvPr/>
+        </p:nvCxnSpPr>
+        <p:spPr>
+          <a:xfrm>
+            <a:off x="3863339" y="2558034"/>
+            <a:ext cx="708661" cy="107441"/>
+          </a:xfrm>
+          <a:prstGeom prst="line">
+            <a:avLst/>
+          </a:prstGeom>
+          <a:ln w="25400">
+            <a:solidFill>
+              <a:srgbClr val="9AA3AB"/>
+            </a:solidFill>
+            <a:tailEnd type="triangle"/>
+          </a:ln>
+        </p:spPr>
+        <p:style>
+          <a:lnRef idx="2">
+            <a:schemeClr val="accent1"/>
+          </a:lnRef>
+          <a:fillRef idx="0">
+            <a:schemeClr val="accent1"/>
+          </a:fillRef>
+          <a:effectRef idx="1">
+            <a:schemeClr val="accent1"/>
+          </a:effectRef>
+          <a:fontRef idx="minor">
+            <a:schemeClr val="tx1"/>
+          </a:fontRef>
+        </p:style>
+      </p:cxnSp>
+      <p:cxnSp>
+        <p:nvCxnSpPr>
+          <p:cNvPr id="20" name="Connector 19"/>
+          <p:cNvCxnSpPr/>
+          <p:nvPr/>
+        </p:nvCxnSpPr>
+        <p:spPr>
+          <a:xfrm flipH="1">
+            <a:off x="3863339" y="1956816"/>
+            <a:ext cx="708661" cy="107441"/>
+          </a:xfrm>
+          <a:prstGeom prst="line">
+            <a:avLst/>
+          </a:prstGeom>
+          <a:ln w="25400">
+            <a:solidFill>
+              <a:srgbClr val="9AA3AB"/>
+            </a:solidFill>
+            <a:tailEnd type="triangle"/>
+          </a:ln>
+        </p:spPr>
+        <p:style>
+          <a:lnRef idx="2">
+            <a:schemeClr val="accent1"/>
+          </a:lnRef>
+          <a:fillRef idx="0">
+            <a:schemeClr val="accent1"/>
+          </a:fillRef>
+          <a:effectRef idx="1">
+            <a:schemeClr val="accent1"/>
+          </a:effectRef>
+          <a:fontRef idx="minor">
+            <a:schemeClr val="tx1"/>
+          </a:fontRef>
+        </p:style>
+      </p:cxnSp>
+      <p:sp>
+        <p:nvSpPr>
+          <p:cNvPr id="21" name="Rounded Rectangle 20"/>
+          <p:cNvSpPr/>
+          <p:nvPr/>
+        </p:nvSpPr>
+        <p:spPr>
+          <a:xfrm>
+            <a:off x="7461504" y="2082545"/>
+            <a:ext cx="1307592" cy="457200"/>
+          </a:xfrm>
+          <a:prstGeom prst="roundRect">
+            <a:avLst>
+              <a:gd name="adj" fmla="val 12000"/>
+            </a:avLst>
+          </a:prstGeom>
+          <a:solidFill>
+            <a:srgbClr val="2E3338"/>
+          </a:solidFill>
+          <a:ln>
+            <a:noFill/>
+          </a:ln>
+          <a:effectLst/>
+        </p:spPr>
+        <p:style>
+          <a:lnRef idx="1">
+            <a:schemeClr val="accent1"/>
+          </a:lnRef>
+          <a:fillRef idx="3">
+            <a:schemeClr val="accent1"/>
+          </a:fillRef>
+          <a:effectRef idx="2">
+            <a:schemeClr val="accent1"/>
+          </a:effectRef>
+          <a:fontRef idx="minor">
+            <a:schemeClr val="lt1"/>
+          </a:fontRef>
+        </p:style>
+        <p:txBody>
+          <a:bodyPr rtlCol="0" anchor="ctr" wrap="square" lIns="73152" rIns="73152"/>
+          <a:lstStyle/>
+          <a:p>
+            <a:pPr algn="ctr"/>
+            <a:r>
+              <a:rPr sz="1200" b="1">
+                <a:solidFill>
+                  <a:srgbClr val="DEE2E6"/>
+                </a:solidFill>
+              </a:rPr>
+              <a:t>The other states</a:t>
+            </a:r>
+          </a:p>
+          <a:p>
+            <a:pPr algn="ctr"/>
+            <a:r>
+              <a:rPr sz="1000" b="0">
+                <a:solidFill>
+                  <a:srgbClr val="9AA3AB"/>
+                </a:solidFill>
+              </a:rPr>
+              <a:t>start, game over</a:t>
+            </a:r>
+          </a:p>
+        </p:txBody>
+      </p:sp>
+      <p:cxnSp>
+        <p:nvCxnSpPr>
+          <p:cNvPr id="22" name="Connector 21"/>
+          <p:cNvCxnSpPr/>
+          <p:nvPr/>
+        </p:nvCxnSpPr>
+        <p:spPr>
+          <a:xfrm>
+            <a:off x="4572000" y="1956816"/>
+            <a:ext cx="3543300" cy="107441"/>
+          </a:xfrm>
+          <a:prstGeom prst="line">
+            <a:avLst/>
+          </a:prstGeom>
+          <a:ln w="25400">
+            <a:solidFill>
+              <a:srgbClr val="9AA3AB"/>
+            </a:solidFill>
+            <a:tailEnd type="triangle"/>
+          </a:ln>
+        </p:spPr>
+        <p:style>
+          <a:lnRef idx="2">
+            <a:schemeClr val="accent1"/>
+          </a:lnRef>
+          <a:fillRef idx="0">
+            <a:schemeClr val="accent1"/>
+          </a:fillRef>
+          <a:effectRef idx="1">
+            <a:schemeClr val="accent1"/>
+          </a:effectRef>
+          <a:fontRef idx="minor">
+            <a:schemeClr val="tx1"/>
+          </a:fontRef>
+        </p:style>
+      </p:cxnSp>
+      <p:sp>
+        <p:nvSpPr>
+          <p:cNvPr id="23" name="TextBox 22"/>
+          <p:cNvSpPr txBox="1"/>
+          <p:nvPr/>
+        </p:nvSpPr>
+        <p:spPr>
+          <a:xfrm>
+            <a:off x="457200" y="4462272"/>
+            <a:ext cx="8229600" cy="365760"/>
+          </a:xfrm>
+          <a:prstGeom prst="rect">
+            <a:avLst/>
+          </a:prstGeom>
+          <a:noFill/>
+        </p:spPr>
+        <p:txBody>
+          <a:bodyPr wrap="square">
+            <a:spAutoFit/>
+          </a:bodyPr>
+          <a:lstStyle/>
+          <a:p>
+            <a:pPr algn="ctr"/>
+            <a:r>
+              <a:rPr sz="1300" b="0" i="0">
+                <a:solidFill>
+                  <a:srgbClr val="9AA3AB"/>
+                </a:solidFill>
+              </a:rPr>
+              <a:t>A room announces the player’s death without knowing the play state.</a:t>
+            </a:r>
+          </a:p>
+        </p:txBody>
+      </p:sp>
+    </p:spTree>
+  </p:cSld>
+  <p:clrMapOvr>
+    <a:masterClrMapping/>
+  </p:clrMapOvr>
+</p:sld>
+</file>
+
+<file path=ppt/slides/slide42.xml><?xml version="1.0" encoding="utf-8"?>
+<p:sld xmlns:a="http://schemas.openxmlformats.org/drawingml/2006/main" xmlns:p="http://schemas.openxmlformats.org/presentationml/2006/main" xmlns:r="http://schemas.openxmlformats.org/officeDocument/2006/relationships">
+  <p:cSld>
+    <p:spTree>
+      <p:nvGrpSpPr>
+        <p:cNvPr id="1" name=""/>
+        <p:cNvGrpSpPr/>
+        <p:nvPr/>
+      </p:nvGrpSpPr>
+      <p:grpSpPr/>
+      <p:sp>
+        <p:nvSpPr>
+          <p:cNvPr id="2" name="Title 1"/>
+          <p:cNvSpPr>
+            <a:spLocks noGrp="1"/>
+          </p:cNvSpPr>
+          <p:nvPr>
+            <p:ph type="title"/>
+          </p:nvPr>
+        </p:nvSpPr>
+        <p:spPr/>
+        <p:txBody>
+          <a:bodyPr/>
+          <a:lstStyle/>
+          <a:p>
+            <a:pPr indent="0" lvl="0" marL="0" rtl="0" algn="l">
+              <a:spcBef>
+                <a:spcPts val="0"/>
+              </a:spcBef>
+              <a:spcAft>
+                <a:spcPts val="0"/>
+              </a:spcAft>
+              <a:buNone/>
+            </a:pPr>
+            <a:r>
+              <a:rPr lang="en"/>
+              <a:t>Summary</a:t>
+            </a:r>
+            <a:endParaRPr/>
+          </a:p>
+        </p:txBody>
+      </p:sp>
+      <p:sp>
+        <p:nvSpPr>
+          <p:cNvPr id="3" name="Text Placeholder 2"/>
+          <p:cNvSpPr>
+            <a:spLocks noGrp="1"/>
+          </p:cNvSpPr>
+          <p:nvPr>
+            <p:ph type="body" idx="1"/>
+          </p:nvPr>
+        </p:nvSpPr>
+        <p:spPr>
+          <a:xfrm>
+            <a:off x="311700" y="885950"/>
+            <a:ext cx="8520600" cy="521208"/>
+          </a:xfrm>
+        </p:spPr>
+        <p:txBody>
+          <a:bodyPr/>
+          <a:lstStyle/>
+          <a:p>
+            <a:pPr indent="-330200" lvl="0" marL="457200" rtl="0" algn="l">
+              <a:spcBef>
+                <a:spcPts val="0"/>
+              </a:spcBef>
+              <a:spcAft>
+                <a:spcPts val="0"/>
+              </a:spcAft>
+              <a:buSzPts val="1600"/>
+              <a:buChar char="●"/>
+            </a:pPr>
+            <a:r>
+              <a:rPr lang="en" b="1"/>
+              <a:t>Six concerns, and this session’s answer to each.</a:t>
+            </a:r>
+            <a:endParaRPr/>
+          </a:p>
+        </p:txBody>
+      </p:sp>
+      <p:sp>
+        <p:nvSpPr>
+          <p:cNvPr id="4" name="Rounded Rectangle 3"/>
+          <p:cNvSpPr/>
+          <p:nvPr/>
+        </p:nvSpPr>
+        <p:spPr>
+          <a:xfrm>
+            <a:off x="548640" y="1417320"/>
+            <a:ext cx="2560320" cy="914400"/>
+          </a:xfrm>
+          <a:prstGeom prst="roundRect">
+            <a:avLst>
+              <a:gd name="adj" fmla="val 12000"/>
+            </a:avLst>
+          </a:prstGeom>
+          <a:solidFill>
+            <a:srgbClr val="2E3338"/>
+          </a:solidFill>
+          <a:ln>
+            <a:noFill/>
+          </a:ln>
+          <a:effectLst/>
+        </p:spPr>
+        <p:style>
+          <a:lnRef idx="1">
+            <a:schemeClr val="accent1"/>
+          </a:lnRef>
+          <a:fillRef idx="3">
+            <a:schemeClr val="accent1"/>
+          </a:fillRef>
+          <a:effectRef idx="2">
+            <a:schemeClr val="accent1"/>
+          </a:effectRef>
+          <a:fontRef idx="minor">
+            <a:schemeClr val="lt1"/>
+          </a:fontRef>
+        </p:style>
+        <p:txBody>
+          <a:bodyPr rtlCol="0" anchor="ctr" wrap="square" lIns="73152" rIns="73152"/>
+          <a:lstStyle/>
+          <a:p>
+            <a:pPr algn="ctr"/>
+            <a:r>
+              <a:rPr sz="1500" b="1">
+                <a:solidFill>
+                  <a:srgbClr val="DEE2E6"/>
+                </a:solidFill>
+              </a:rPr>
+              <a:t>Reacting to what happened elsewhere</a:t>
+            </a:r>
+          </a:p>
+          <a:p>
+            <a:pPr algn="ctr"/>
+            <a:r>
+              <a:rPr sz="1300" b="0">
+                <a:solidFill>
+                  <a:srgbClr val="9AA3AB"/>
+                </a:solidFill>
+              </a:rPr>
+              <a:t>Observer, as C# events</a:t>
+            </a:r>
+          </a:p>
+        </p:txBody>
+      </p:sp>
+      <p:sp>
+        <p:nvSpPr>
+          <p:cNvPr id="5" name="Rounded Rectangle 4"/>
+          <p:cNvSpPr/>
+          <p:nvPr/>
+        </p:nvSpPr>
+        <p:spPr>
+          <a:xfrm>
+            <a:off x="3291840" y="1417320"/>
+            <a:ext cx="2560320" cy="914400"/>
+          </a:xfrm>
+          <a:prstGeom prst="roundRect">
+            <a:avLst>
+              <a:gd name="adj" fmla="val 12000"/>
+            </a:avLst>
+          </a:prstGeom>
+          <a:solidFill>
+            <a:srgbClr val="2E3338"/>
+          </a:solidFill>
+          <a:ln>
+            <a:noFill/>
+          </a:ln>
+          <a:effectLst/>
+        </p:spPr>
+        <p:style>
+          <a:lnRef idx="1">
+            <a:schemeClr val="accent1"/>
+          </a:lnRef>
+          <a:fillRef idx="3">
+            <a:schemeClr val="accent1"/>
+          </a:fillRef>
+          <a:effectRef idx="2">
+            <a:schemeClr val="accent1"/>
+          </a:effectRef>
+          <a:fontRef idx="minor">
+            <a:schemeClr val="lt1"/>
+          </a:fontRef>
+        </p:style>
+        <p:txBody>
+          <a:bodyPr rtlCol="0" anchor="ctr" wrap="square" lIns="73152" rIns="73152"/>
+          <a:lstStyle/>
+          <a:p>
+            <a:pPr algn="ctr"/>
+            <a:r>
+              <a:rPr sz="1500" b="1">
+                <a:solidFill>
+                  <a:srgbClr val="DEE2E6"/>
+                </a:solidFill>
+              </a:rPr>
+              <a:t>Reacting later, at a safe point</a:t>
+            </a:r>
+          </a:p>
+          <a:p>
+            <a:pPr algn="ctr"/>
+            <a:r>
+              <a:rPr sz="1300" b="0">
+                <a:solidFill>
+                  <a:srgbClr val="9AA3AB"/>
+                </a:solidFill>
+              </a:rPr>
+              <a:t>An event queue</a:t>
+            </a:r>
+          </a:p>
+        </p:txBody>
+      </p:sp>
+      <p:sp>
+        <p:nvSpPr>
+          <p:cNvPr id="6" name="Rounded Rectangle 5"/>
+          <p:cNvSpPr/>
+          <p:nvPr/>
+        </p:nvSpPr>
+        <p:spPr>
+          <a:xfrm>
+            <a:off x="6035040" y="1417320"/>
+            <a:ext cx="2560320" cy="914400"/>
+          </a:xfrm>
+          <a:prstGeom prst="roundRect">
+            <a:avLst>
+              <a:gd name="adj" fmla="val 12000"/>
+            </a:avLst>
+          </a:prstGeom>
+          <a:solidFill>
+            <a:srgbClr val="2E3338"/>
+          </a:solidFill>
+          <a:ln>
+            <a:noFill/>
+          </a:ln>
+          <a:effectLst/>
+        </p:spPr>
+        <p:style>
+          <a:lnRef idx="1">
+            <a:schemeClr val="accent1"/>
+          </a:lnRef>
+          <a:fillRef idx="3">
+            <a:schemeClr val="accent1"/>
+          </a:fillRef>
+          <a:effectRef idx="2">
+            <a:schemeClr val="accent1"/>
+          </a:effectRef>
+          <a:fontRef idx="minor">
+            <a:schemeClr val="lt1"/>
+          </a:fontRef>
+        </p:style>
+        <p:txBody>
+          <a:bodyPr rtlCol="0" anchor="ctr" wrap="square" lIns="73152" rIns="73152"/>
+          <a:lstStyle/>
+          <a:p>
+            <a:pPr algn="ctr"/>
+            <a:r>
+              <a:rPr sz="1500" b="1">
+                <a:solidFill>
+                  <a:srgbClr val="DEE2E6"/>
+                </a:solidFill>
+              </a:rPr>
+              <a:t>Dealing and taking damage</a:t>
+            </a:r>
+          </a:p>
+          <a:p>
+            <a:pPr algn="ctr"/>
+            <a:r>
+              <a:rPr sz="1300" b="0">
+                <a:solidFill>
+                  <a:srgbClr val="9AA3AB"/>
+                </a:solidFill>
+              </a:rPr>
+              <a:t>A hitbox and a hurtbox</a:t>
+            </a:r>
+          </a:p>
+        </p:txBody>
+      </p:sp>
+      <p:sp>
+        <p:nvSpPr>
+          <p:cNvPr id="7" name="Rounded Rectangle 6"/>
+          <p:cNvSpPr/>
+          <p:nvPr/>
+        </p:nvSpPr>
+        <p:spPr>
+          <a:xfrm>
+            <a:off x="548640" y="2468880"/>
+            <a:ext cx="2560320" cy="914400"/>
+          </a:xfrm>
+          <a:prstGeom prst="roundRect">
+            <a:avLst>
+              <a:gd name="adj" fmla="val 12000"/>
+            </a:avLst>
+          </a:prstGeom>
+          <a:solidFill>
+            <a:srgbClr val="2E3338"/>
+          </a:solidFill>
+          <a:ln>
+            <a:noFill/>
+          </a:ln>
+          <a:effectLst/>
+        </p:spPr>
+        <p:style>
+          <a:lnRef idx="1">
+            <a:schemeClr val="accent1"/>
+          </a:lnRef>
+          <a:fillRef idx="3">
+            <a:schemeClr val="accent1"/>
+          </a:fillRef>
+          <a:effectRef idx="2">
+            <a:schemeClr val="accent1"/>
+          </a:effectRef>
+          <a:fontRef idx="minor">
+            <a:schemeClr val="lt1"/>
+          </a:fontRef>
+        </p:style>
+        <p:txBody>
+          <a:bodyPr rtlCol="0" anchor="ctr" wrap="square" lIns="73152" rIns="73152"/>
+          <a:lstStyle/>
+          <a:p>
+            <a:pPr algn="ctr"/>
+            <a:r>
+              <a:rPr sz="1500" b="1">
+                <a:solidFill>
+                  <a:srgbClr val="DEE2E6"/>
+                </a:solidFill>
+              </a:rPr>
+              <a:t>A value that changes over time</a:t>
+            </a:r>
+          </a:p>
+          <a:p>
+            <a:pPr algn="ctr"/>
+            <a:r>
+              <a:rPr sz="1300" b="0">
+                <a:solidFill>
+                  <a:srgbClr val="9AA3AB"/>
+                </a:solidFill>
+              </a:rPr>
+              <a:t>A tween</a:t>
+            </a:r>
+          </a:p>
+        </p:txBody>
+      </p:sp>
+      <p:sp>
+        <p:nvSpPr>
+          <p:cNvPr id="8" name="Rounded Rectangle 7"/>
+          <p:cNvSpPr/>
+          <p:nvPr/>
+        </p:nvSpPr>
+        <p:spPr>
+          <a:xfrm>
+            <a:off x="3291840" y="2468880"/>
+            <a:ext cx="2560320" cy="914400"/>
+          </a:xfrm>
+          <a:prstGeom prst="roundRect">
+            <a:avLst>
+              <a:gd name="adj" fmla="val 12000"/>
+            </a:avLst>
+          </a:prstGeom>
+          <a:solidFill>
+            <a:srgbClr val="2E3338"/>
+          </a:solidFill>
+          <a:ln>
+            <a:noFill/>
+          </a:ln>
+          <a:effectLst/>
+        </p:spPr>
+        <p:style>
+          <a:lnRef idx="1">
+            <a:schemeClr val="accent1"/>
+          </a:lnRef>
+          <a:fillRef idx="3">
+            <a:schemeClr val="accent1"/>
+          </a:fillRef>
+          <a:effectRef idx="2">
+            <a:schemeClr val="accent1"/>
+          </a:effectRef>
+          <a:fontRef idx="minor">
+            <a:schemeClr val="lt1"/>
+          </a:fontRef>
+        </p:style>
+        <p:txBody>
+          <a:bodyPr rtlCol="0" anchor="ctr" wrap="square" lIns="73152" rIns="73152"/>
+          <a:lstStyle/>
+          <a:p>
+            <a:pPr algn="ctr"/>
+            <a:r>
+              <a:rPr sz="1500" b="1">
+                <a:solidFill>
+                  <a:srgbClr val="DEE2E6"/>
+                </a:solidFill>
+              </a:rPr>
+              <a:t>Many kinds of things</a:t>
+            </a:r>
+          </a:p>
+          <a:p>
+            <a:pPr algn="ctr"/>
+            <a:r>
+              <a:rPr sz="1300" b="0">
+                <a:solidFill>
+                  <a:srgbClr val="9AA3AB"/>
+                </a:solidFill>
+              </a:rPr>
+              <a:t>Parts an object has</a:t>
+            </a:r>
+          </a:p>
+        </p:txBody>
+      </p:sp>
+      <p:sp>
+        <p:nvSpPr>
+          <p:cNvPr id="9" name="Rounded Rectangle 8"/>
+          <p:cNvSpPr/>
+          <p:nvPr/>
+        </p:nvSpPr>
+        <p:spPr>
+          <a:xfrm>
+            <a:off x="6035040" y="2468880"/>
+            <a:ext cx="2560320" cy="914400"/>
+          </a:xfrm>
+          <a:prstGeom prst="roundRect">
+            <a:avLst>
+              <a:gd name="adj" fmla="val 12000"/>
+            </a:avLst>
+          </a:prstGeom>
+          <a:solidFill>
+            <a:srgbClr val="2E3338"/>
+          </a:solidFill>
+          <a:ln>
+            <a:noFill/>
+          </a:ln>
+          <a:effectLst/>
+        </p:spPr>
+        <p:style>
+          <a:lnRef idx="1">
+            <a:schemeClr val="accent1"/>
+          </a:lnRef>
+          <a:fillRef idx="3">
+            <a:schemeClr val="accent1"/>
+          </a:fillRef>
+          <a:effectRef idx="2">
+            <a:schemeClr val="accent1"/>
+          </a:effectRef>
+          <a:fontRef idx="minor">
+            <a:schemeClr val="lt1"/>
+          </a:fontRef>
+        </p:style>
+        <p:txBody>
+          <a:bodyPr rtlCol="0" anchor="ctr" wrap="square" lIns="73152" rIns="73152"/>
+          <a:lstStyle/>
+          <a:p>
+            <a:pPr algn="ctr"/>
+            <a:r>
+              <a:rPr sz="1500" b="1">
+                <a:solidFill>
+                  <a:srgbClr val="DEE2E6"/>
+                </a:solidFill>
+              </a:rPr>
+              <a:t>Enemy and object types</a:t>
+            </a:r>
+          </a:p>
+          <a:p>
+            <a:pPr algn="ctr"/>
+            <a:r>
+              <a:rPr sz="1300" b="0">
+                <a:solidFill>
+                  <a:srgbClr val="9AA3AB"/>
+                </a:solidFill>
+              </a:rPr>
+              <a:t>Definitions in XML</a:t>
+            </a:r>
+          </a:p>
+        </p:txBody>
+      </p:sp>
+    </p:spTree>
+  </p:cSld>
+  <p:clrMapOvr>
+    <a:masterClrMapping/>
+  </p:clrMapOvr>
+</p:sld>
+</file>
+
 <file path=ppt/slides/slide5.xml><?xml version="1.0" encoding="utf-8"?>
 <p:sld xmlns:a="http://schemas.openxmlformats.org/drawingml/2006/main" xmlns:r="http://schemas.openxmlformats.org/officeDocument/2006/relationships" xmlns:mc="http://schemas.openxmlformats.org/markup-compatibility/2006" xmlns:mv="urn:schemas-microsoft-com:mac:vml" xmlns:p="http://schemas.openxmlformats.org/presentationml/2006/main" xmlns:c="http://schemas.openxmlformats.org/drawingml/2006/chart" xmlns:dgm="http://schemas.openxmlformats.org/drawingml/2006/diagram" xmlns:o="urn:schemas-microsoft-com:office:office" xmlns:v="urn:schemas-microsoft-com:vml" xmlns:pvml="urn:schemas-microsoft-com:office:powerpoint" xmlns:com="http://schemas.openxmlformats.org/drawingml/2006/compatibility" xmlns:p14="http://schemas.microsoft.com/office/powerpoint/2010/main" xmlns:p15="http://schemas.microsoft.com/office/powerpoint/2012/main" xmlns:ahyp="http://schemas.microsoft.com/office/drawing/2018/hyperlinkcolor">
   <p:cSld>
